--- a/Lectures/Week 10/10. Counting.pptx
+++ b/Lectures/Week 10/10. Counting.pptx
@@ -36,36 +36,35 @@
     <p:sldId id="267" r:id="rId30"/>
     <p:sldId id="316" r:id="rId31"/>
     <p:sldId id="317" r:id="rId32"/>
-    <p:sldId id="318" r:id="rId33"/>
-    <p:sldId id="269" r:id="rId34"/>
-    <p:sldId id="323" r:id="rId35"/>
-    <p:sldId id="324" r:id="rId36"/>
-    <p:sldId id="270" r:id="rId37"/>
-    <p:sldId id="271" r:id="rId38"/>
-    <p:sldId id="325" r:id="rId39"/>
-    <p:sldId id="350" r:id="rId40"/>
-    <p:sldId id="363" r:id="rId41"/>
-    <p:sldId id="302" r:id="rId42"/>
-    <p:sldId id="331" r:id="rId43"/>
-    <p:sldId id="353" r:id="rId44"/>
-    <p:sldId id="352" r:id="rId45"/>
-    <p:sldId id="354" r:id="rId46"/>
-    <p:sldId id="337" r:id="rId47"/>
-    <p:sldId id="338" r:id="rId48"/>
-    <p:sldId id="333" r:id="rId49"/>
-    <p:sldId id="334" r:id="rId50"/>
-    <p:sldId id="366" r:id="rId51"/>
-    <p:sldId id="303" r:id="rId52"/>
-    <p:sldId id="330" r:id="rId53"/>
-    <p:sldId id="355" r:id="rId54"/>
-    <p:sldId id="305" r:id="rId55"/>
-    <p:sldId id="356" r:id="rId56"/>
-    <p:sldId id="306" r:id="rId57"/>
-    <p:sldId id="307" r:id="rId58"/>
-    <p:sldId id="342" r:id="rId59"/>
-    <p:sldId id="343" r:id="rId60"/>
-    <p:sldId id="309" r:id="rId61"/>
-    <p:sldId id="357" r:id="rId62"/>
+    <p:sldId id="269" r:id="rId33"/>
+    <p:sldId id="323" r:id="rId34"/>
+    <p:sldId id="324" r:id="rId35"/>
+    <p:sldId id="270" r:id="rId36"/>
+    <p:sldId id="271" r:id="rId37"/>
+    <p:sldId id="325" r:id="rId38"/>
+    <p:sldId id="350" r:id="rId39"/>
+    <p:sldId id="363" r:id="rId40"/>
+    <p:sldId id="302" r:id="rId41"/>
+    <p:sldId id="331" r:id="rId42"/>
+    <p:sldId id="353" r:id="rId43"/>
+    <p:sldId id="352" r:id="rId44"/>
+    <p:sldId id="354" r:id="rId45"/>
+    <p:sldId id="337" r:id="rId46"/>
+    <p:sldId id="338" r:id="rId47"/>
+    <p:sldId id="333" r:id="rId48"/>
+    <p:sldId id="334" r:id="rId49"/>
+    <p:sldId id="366" r:id="rId50"/>
+    <p:sldId id="303" r:id="rId51"/>
+    <p:sldId id="330" r:id="rId52"/>
+    <p:sldId id="355" r:id="rId53"/>
+    <p:sldId id="305" r:id="rId54"/>
+    <p:sldId id="356" r:id="rId55"/>
+    <p:sldId id="306" r:id="rId56"/>
+    <p:sldId id="307" r:id="rId57"/>
+    <p:sldId id="342" r:id="rId58"/>
+    <p:sldId id="343" r:id="rId59"/>
+    <p:sldId id="309" r:id="rId60"/>
+    <p:sldId id="357" r:id="rId61"/>
   </p:sldIdLst>
   <p:sldSz cx="12192000" cy="6858000"/>
   <p:notesSz cx="6858000" cy="9144000"/>
@@ -318,7 +317,7 @@
           <a:lstStyle/>
           <a:p>
             <a:fld id="{11629A9A-93D7-394A-8E41-744470A2DD63}" type="datetimeFigureOut">
-              <a:t>10/16/20</a:t>
+              <a:t>11/20/20</a:t>
             </a:fld>
             <a:endParaRPr lang="en-US"/>
           </a:p>
@@ -514,7 +513,7 @@
           <a:lstStyle/>
           <a:p>
             <a:fld id="{11629A9A-93D7-394A-8E41-744470A2DD63}" type="datetimeFigureOut">
-              <a:t>10/16/20</a:t>
+              <a:t>11/20/20</a:t>
             </a:fld>
             <a:endParaRPr lang="en-US"/>
           </a:p>
@@ -720,7 +719,7 @@
           <a:lstStyle/>
           <a:p>
             <a:fld id="{11629A9A-93D7-394A-8E41-744470A2DD63}" type="datetimeFigureOut">
-              <a:t>10/16/20</a:t>
+              <a:t>11/20/20</a:t>
             </a:fld>
             <a:endParaRPr lang="en-US"/>
           </a:p>
@@ -916,7 +915,7 @@
           <a:lstStyle/>
           <a:p>
             <a:fld id="{11629A9A-93D7-394A-8E41-744470A2DD63}" type="datetimeFigureOut">
-              <a:t>10/16/20</a:t>
+              <a:t>11/20/20</a:t>
             </a:fld>
             <a:endParaRPr lang="en-US"/>
           </a:p>
@@ -1189,7 +1188,7 @@
           <a:lstStyle/>
           <a:p>
             <a:fld id="{11629A9A-93D7-394A-8E41-744470A2DD63}" type="datetimeFigureOut">
-              <a:t>10/16/20</a:t>
+              <a:t>11/20/20</a:t>
             </a:fld>
             <a:endParaRPr lang="en-US"/>
           </a:p>
@@ -1452,7 +1451,7 @@
           <a:lstStyle/>
           <a:p>
             <a:fld id="{11629A9A-93D7-394A-8E41-744470A2DD63}" type="datetimeFigureOut">
-              <a:t>10/16/20</a:t>
+              <a:t>11/20/20</a:t>
             </a:fld>
             <a:endParaRPr lang="en-US"/>
           </a:p>
@@ -1862,7 +1861,7 @@
           <a:lstStyle/>
           <a:p>
             <a:fld id="{11629A9A-93D7-394A-8E41-744470A2DD63}" type="datetimeFigureOut">
-              <a:t>10/16/20</a:t>
+              <a:t>11/20/20</a:t>
             </a:fld>
             <a:endParaRPr lang="en-US"/>
           </a:p>
@@ -2001,7 +2000,7 @@
           <a:lstStyle/>
           <a:p>
             <a:fld id="{11629A9A-93D7-394A-8E41-744470A2DD63}" type="datetimeFigureOut">
-              <a:t>10/16/20</a:t>
+              <a:t>11/20/20</a:t>
             </a:fld>
             <a:endParaRPr lang="en-US"/>
           </a:p>
@@ -2112,7 +2111,7 @@
           <a:lstStyle/>
           <a:p>
             <a:fld id="{11629A9A-93D7-394A-8E41-744470A2DD63}" type="datetimeFigureOut">
-              <a:t>10/16/20</a:t>
+              <a:t>11/20/20</a:t>
             </a:fld>
             <a:endParaRPr lang="en-US"/>
           </a:p>
@@ -2421,7 +2420,7 @@
           <a:lstStyle/>
           <a:p>
             <a:fld id="{11629A9A-93D7-394A-8E41-744470A2DD63}" type="datetimeFigureOut">
-              <a:t>10/16/20</a:t>
+              <a:t>11/20/20</a:t>
             </a:fld>
             <a:endParaRPr lang="en-US"/>
           </a:p>
@@ -2707,7 +2706,7 @@
           <a:lstStyle/>
           <a:p>
             <a:fld id="{11629A9A-93D7-394A-8E41-744470A2DD63}" type="datetimeFigureOut">
-              <a:t>10/16/20</a:t>
+              <a:t>11/20/20</a:t>
             </a:fld>
             <a:endParaRPr lang="en-US"/>
           </a:p>
@@ -2946,7 +2945,7 @@
           </a:lstStyle>
           <a:p>
             <a:fld id="{11629A9A-93D7-394A-8E41-744470A2DD63}" type="datetimeFigureOut">
-              <a:t>10/16/20</a:t>
+              <a:t>11/20/20</a:t>
             </a:fld>
             <a:endParaRPr lang="en-US"/>
           </a:p>
@@ -8716,551 +8715,6 @@
           <a:p>
             <a:r>
               <a:rPr lang="en-US" dirty="0"/>
-              <a:t>Counting the Number of Permutations</a:t>
-            </a:r>
-          </a:p>
-        </p:txBody>
-      </p:sp>
-      <p:sp>
-        <p:nvSpPr>
-          <p:cNvPr id="3" name="Content Placeholder 2"/>
-          <p:cNvSpPr>
-            <a:spLocks noGrp="1"/>
-          </p:cNvSpPr>
-          <p:nvPr>
-            <p:ph idx="1"/>
-          </p:nvPr>
-        </p:nvSpPr>
-        <p:spPr/>
-        <p:txBody>
-          <a:bodyPr>
-            <a:normAutofit/>
-          </a:bodyPr>
-          <a:lstStyle/>
-          <a:p>
-            <a:pPr>
-              <a:buNone/>
-            </a:pPr>
-            <a:r>
-              <a:rPr lang="en-US" b="1" dirty="0"/>
-              <a:t>Theorem 1</a:t>
-            </a:r>
-            <a:r>
-              <a:rPr lang="en-US" dirty="0"/>
-              <a:t>: If </a:t>
-            </a:r>
-            <a:r>
-              <a:rPr lang="en-US" i="1" dirty="0"/>
-              <a:t>n</a:t>
-            </a:r>
-            <a:r>
-              <a:rPr lang="en-US" dirty="0"/>
-              <a:t> is a positive integer and </a:t>
-            </a:r>
-            <a:r>
-              <a:rPr lang="en-US" i="1" dirty="0"/>
-              <a:t>r</a:t>
-            </a:r>
-            <a:r>
-              <a:rPr lang="en-US" dirty="0"/>
-              <a:t> is an integer with </a:t>
-            </a:r>
-            <a:r>
-              <a:rPr lang="en-US" dirty="0">
-                <a:ea typeface="Cambria Math" pitchFamily="18" charset="0"/>
-              </a:rPr>
-              <a:t>1</a:t>
-            </a:r>
-            <a:r>
-              <a:rPr lang="en-US" dirty="0"/>
-              <a:t> </a:t>
-            </a:r>
-            <a:r>
-              <a:rPr lang="en-US" dirty="0">
-                <a:ea typeface="Cambria Math"/>
-              </a:rPr>
-              <a:t>≤</a:t>
-            </a:r>
-            <a:r>
-              <a:rPr lang="en-US" dirty="0"/>
-              <a:t> </a:t>
-            </a:r>
-            <a:r>
-              <a:rPr lang="en-US" i="1" dirty="0"/>
-              <a:t>r</a:t>
-            </a:r>
-            <a:r>
-              <a:rPr lang="en-US" dirty="0"/>
-              <a:t> </a:t>
-            </a:r>
-            <a:r>
-              <a:rPr lang="en-US" dirty="0">
-                <a:ea typeface="Cambria Math"/>
-              </a:rPr>
-              <a:t>≤</a:t>
-            </a:r>
-            <a:r>
-              <a:rPr lang="en-US" dirty="0"/>
-              <a:t> </a:t>
-            </a:r>
-            <a:r>
-              <a:rPr lang="en-US" i="1" dirty="0"/>
-              <a:t>n</a:t>
-            </a:r>
-            <a:r>
-              <a:rPr lang="en-US" dirty="0"/>
-              <a:t>, then there are</a:t>
-            </a:r>
-          </a:p>
-          <a:p>
-            <a:pPr>
-              <a:buNone/>
-            </a:pPr>
-            <a:r>
-              <a:rPr lang="en-US" dirty="0"/>
-              <a:t>         </a:t>
-            </a:r>
-            <a:r>
-              <a:rPr lang="en-US" i="1" dirty="0"/>
-              <a:t>P</a:t>
-            </a:r>
-            <a:r>
-              <a:rPr lang="en-US" dirty="0"/>
-              <a:t>(</a:t>
-            </a:r>
-            <a:r>
-              <a:rPr lang="en-US" i="1" dirty="0"/>
-              <a:t>n</a:t>
-            </a:r>
-            <a:r>
-              <a:rPr lang="en-US" dirty="0"/>
-              <a:t>, </a:t>
-            </a:r>
-            <a:r>
-              <a:rPr lang="en-US" i="1" dirty="0"/>
-              <a:t>r</a:t>
-            </a:r>
-            <a:r>
-              <a:rPr lang="en-US" dirty="0"/>
-              <a:t>) = </a:t>
-            </a:r>
-            <a:r>
-              <a:rPr lang="en-US" i="1" dirty="0"/>
-              <a:t>n</a:t>
-            </a:r>
-            <a:r>
-              <a:rPr lang="en-US" dirty="0"/>
-              <a:t>(</a:t>
-            </a:r>
-            <a:r>
-              <a:rPr lang="en-US" i="1" dirty="0"/>
-              <a:t>n</a:t>
-            </a:r>
-            <a:r>
-              <a:rPr lang="en-US" dirty="0"/>
-              <a:t> </a:t>
-            </a:r>
-            <a:r>
-              <a:rPr lang="en-US" dirty="0">
-                <a:ea typeface="Cambria Math"/>
-              </a:rPr>
-              <a:t>−</a:t>
-            </a:r>
-            <a:r>
-              <a:rPr lang="en-US" dirty="0"/>
-              <a:t>  </a:t>
-            </a:r>
-            <a:r>
-              <a:rPr lang="en-US" dirty="0">
-                <a:ea typeface="Cambria Math" pitchFamily="18" charset="0"/>
-              </a:rPr>
-              <a:t>1</a:t>
-            </a:r>
-            <a:r>
-              <a:rPr lang="en-US" dirty="0"/>
-              <a:t>)(</a:t>
-            </a:r>
-            <a:r>
-              <a:rPr lang="en-US" i="1" dirty="0"/>
-              <a:t>n </a:t>
-            </a:r>
-            <a:r>
-              <a:rPr lang="en-US" i="1" dirty="0">
-                <a:ea typeface="Cambria Math"/>
-              </a:rPr>
-              <a:t>−</a:t>
-            </a:r>
-            <a:r>
-              <a:rPr lang="en-US" dirty="0"/>
-              <a:t>  </a:t>
-            </a:r>
-            <a:r>
-              <a:rPr lang="en-US" dirty="0">
-                <a:ea typeface="Cambria Math" pitchFamily="18" charset="0"/>
-              </a:rPr>
-              <a:t>2</a:t>
-            </a:r>
-            <a:r>
-              <a:rPr lang="en-US" dirty="0"/>
-              <a:t>) </a:t>
-            </a:r>
-            <a:r>
-              <a:rPr lang="en-US" dirty="0">
-                <a:ea typeface="Cambria Math"/>
-              </a:rPr>
-              <a:t>∙∙∙</a:t>
-            </a:r>
-            <a:r>
-              <a:rPr lang="en-US" dirty="0"/>
-              <a:t>  (</a:t>
-            </a:r>
-            <a:r>
-              <a:rPr lang="en-US" i="1" dirty="0"/>
-              <a:t>n</a:t>
-            </a:r>
-            <a:r>
-              <a:rPr lang="en-US" dirty="0"/>
-              <a:t> </a:t>
-            </a:r>
-            <a:r>
-              <a:rPr lang="en-US" dirty="0">
-                <a:ea typeface="Cambria Math"/>
-              </a:rPr>
-              <a:t>−</a:t>
-            </a:r>
-            <a:r>
-              <a:rPr lang="en-US" dirty="0"/>
-              <a:t>  </a:t>
-            </a:r>
-            <a:r>
-              <a:rPr lang="en-US" i="1" dirty="0"/>
-              <a:t>r</a:t>
-            </a:r>
-            <a:r>
-              <a:rPr lang="en-US" dirty="0"/>
-              <a:t> + </a:t>
-            </a:r>
-            <a:r>
-              <a:rPr lang="en-US" dirty="0">
-                <a:ea typeface="Cambria Math" pitchFamily="18" charset="0"/>
-              </a:rPr>
-              <a:t>1</a:t>
-            </a:r>
-            <a:r>
-              <a:rPr lang="en-US" dirty="0"/>
-              <a:t>)</a:t>
-            </a:r>
-          </a:p>
-          <a:p>
-            <a:pPr>
-              <a:buNone/>
-            </a:pPr>
-            <a:r>
-              <a:rPr lang="en-US" i="1" dirty="0"/>
-              <a:t>    r</a:t>
-            </a:r>
-            <a:r>
-              <a:rPr lang="en-US" dirty="0"/>
-              <a:t>-permutations of a set with n distinct elements.</a:t>
-            </a:r>
-          </a:p>
-          <a:p>
-            <a:pPr>
-              <a:buNone/>
-            </a:pPr>
-            <a:r>
-              <a:rPr lang="en-US" b="1" dirty="0"/>
-              <a:t>Proof</a:t>
-            </a:r>
-            <a:r>
-              <a:rPr lang="en-US" dirty="0"/>
-              <a:t>: Use the product rule. The first element can be chosen in </a:t>
-            </a:r>
-            <a:r>
-              <a:rPr lang="en-US" i="1" dirty="0"/>
-              <a:t>n</a:t>
-            </a:r>
-            <a:r>
-              <a:rPr lang="en-US" dirty="0"/>
-              <a:t> ways. The second in </a:t>
-            </a:r>
-            <a:r>
-              <a:rPr lang="en-US" i="1" dirty="0"/>
-              <a:t>n</a:t>
-            </a:r>
-            <a:r>
-              <a:rPr lang="en-US" dirty="0"/>
-              <a:t> </a:t>
-            </a:r>
-            <a:r>
-              <a:rPr lang="en-US" dirty="0">
-                <a:ea typeface="Cambria Math"/>
-              </a:rPr>
-              <a:t>−</a:t>
-            </a:r>
-            <a:r>
-              <a:rPr lang="en-US" dirty="0"/>
-              <a:t>  </a:t>
-            </a:r>
-            <a:r>
-              <a:rPr lang="en-US" dirty="0">
-                <a:ea typeface="Cambria Math" pitchFamily="18" charset="0"/>
-              </a:rPr>
-              <a:t>1 ways, and so on until there are (</a:t>
-            </a:r>
-            <a:r>
-              <a:rPr lang="en-US" i="1" dirty="0"/>
-              <a:t>n</a:t>
-            </a:r>
-            <a:r>
-              <a:rPr lang="en-US" dirty="0"/>
-              <a:t> </a:t>
-            </a:r>
-            <a:r>
-              <a:rPr lang="en-US" dirty="0">
-                <a:ea typeface="Cambria Math"/>
-              </a:rPr>
-              <a:t>−</a:t>
-            </a:r>
-            <a:r>
-              <a:rPr lang="en-US" dirty="0"/>
-              <a:t> ( </a:t>
-            </a:r>
-            <a:r>
-              <a:rPr lang="en-US" i="1" dirty="0"/>
-              <a:t>r</a:t>
-            </a:r>
-            <a:r>
-              <a:rPr lang="en-US" dirty="0"/>
-              <a:t> </a:t>
-            </a:r>
-            <a:r>
-              <a:rPr lang="en-US" dirty="0">
-                <a:ea typeface="Cambria Math"/>
-              </a:rPr>
-              <a:t>−</a:t>
-            </a:r>
-            <a:r>
-              <a:rPr lang="en-US" dirty="0"/>
-              <a:t> </a:t>
-            </a:r>
-            <a:r>
-              <a:rPr lang="en-US" dirty="0">
-                <a:ea typeface="Cambria Math" pitchFamily="18" charset="0"/>
-              </a:rPr>
-              <a:t>1)) ways to choose the last element. Note that </a:t>
-            </a:r>
-            <a:r>
-              <a:rPr lang="en-US" i="1" dirty="0">
-                <a:ea typeface="Cambria Math" pitchFamily="18" charset="0"/>
-              </a:rPr>
-              <a:t>P</a:t>
-            </a:r>
-            <a:r>
-              <a:rPr lang="en-US" dirty="0">
-                <a:ea typeface="Cambria Math" pitchFamily="18" charset="0"/>
-              </a:rPr>
-              <a:t>(</a:t>
-            </a:r>
-            <a:r>
-              <a:rPr lang="en-US" i="1" dirty="0">
-                <a:ea typeface="Cambria Math" pitchFamily="18" charset="0"/>
-              </a:rPr>
-              <a:t>n</a:t>
-            </a:r>
-            <a:r>
-              <a:rPr lang="en-US" dirty="0">
-                <a:ea typeface="Cambria Math" pitchFamily="18" charset="0"/>
-              </a:rPr>
-              <a:t>, 0) = 1, since there is only one way to order zero elements</a:t>
-            </a:r>
-            <a:r>
-              <a:rPr lang="en-US" dirty="0"/>
-              <a:t>. </a:t>
-            </a:r>
-            <a:r>
-              <a:rPr lang="en-US" i="1" dirty="0">
-                <a:ea typeface="Cambria Math" pitchFamily="18" charset="0"/>
-              </a:rPr>
-              <a:t>	</a:t>
-            </a:r>
-            <a:r>
-              <a:rPr lang="en-US" dirty="0"/>
-              <a:t>◀︎ </a:t>
-            </a:r>
-            <a:endParaRPr lang="en-US" dirty="0">
-              <a:ea typeface="Cambria Math" pitchFamily="18" charset="0"/>
-            </a:endParaRPr>
-          </a:p>
-          <a:p>
-            <a:pPr>
-              <a:buNone/>
-            </a:pPr>
-            <a:r>
-              <a:rPr lang="en-US" b="1" dirty="0">
-                <a:ea typeface="Cambria Math" pitchFamily="18" charset="0"/>
-              </a:rPr>
-              <a:t>Corollary</a:t>
-            </a:r>
-            <a:r>
-              <a:rPr lang="en-US" dirty="0">
-                <a:ea typeface="Cambria Math" pitchFamily="18" charset="0"/>
-              </a:rPr>
-              <a:t>: If </a:t>
-            </a:r>
-            <a:r>
-              <a:rPr lang="en-US" i="1" dirty="0">
-                <a:ea typeface="Cambria Math" pitchFamily="18" charset="0"/>
-              </a:rPr>
-              <a:t>n</a:t>
-            </a:r>
-            <a:r>
-              <a:rPr lang="en-US" dirty="0">
-                <a:ea typeface="Cambria Math" pitchFamily="18" charset="0"/>
-              </a:rPr>
-              <a:t> and </a:t>
-            </a:r>
-            <a:r>
-              <a:rPr lang="en-US" i="1" dirty="0">
-                <a:ea typeface="Cambria Math" pitchFamily="18" charset="0"/>
-              </a:rPr>
-              <a:t>r</a:t>
-            </a:r>
-            <a:r>
-              <a:rPr lang="en-US" dirty="0">
-                <a:ea typeface="Cambria Math" pitchFamily="18" charset="0"/>
-              </a:rPr>
-              <a:t> are integers with 1</a:t>
-            </a:r>
-            <a:r>
-              <a:rPr lang="en-US" dirty="0"/>
-              <a:t> </a:t>
-            </a:r>
-            <a:r>
-              <a:rPr lang="en-US" dirty="0">
-                <a:ea typeface="Cambria Math"/>
-              </a:rPr>
-              <a:t>≤</a:t>
-            </a:r>
-            <a:r>
-              <a:rPr lang="en-US" dirty="0"/>
-              <a:t> </a:t>
-            </a:r>
-            <a:r>
-              <a:rPr lang="en-US" i="1" dirty="0"/>
-              <a:t>r</a:t>
-            </a:r>
-            <a:r>
-              <a:rPr lang="en-US" dirty="0"/>
-              <a:t> </a:t>
-            </a:r>
-            <a:r>
-              <a:rPr lang="en-US" dirty="0">
-                <a:ea typeface="Cambria Math"/>
-              </a:rPr>
-              <a:t>≤</a:t>
-            </a:r>
-            <a:r>
-              <a:rPr lang="en-US" dirty="0"/>
-              <a:t> </a:t>
-            </a:r>
-            <a:r>
-              <a:rPr lang="en-US" i="1" dirty="0"/>
-              <a:t>n, </a:t>
-            </a:r>
-            <a:r>
-              <a:rPr lang="en-US" dirty="0"/>
-              <a:t>then</a:t>
-            </a:r>
-          </a:p>
-          <a:p>
-            <a:endParaRPr lang="en-US" i="1" dirty="0"/>
-          </a:p>
-          <a:p>
-            <a:pPr>
-              <a:buNone/>
-            </a:pPr>
-            <a:endParaRPr lang="en-US" dirty="0"/>
-          </a:p>
-        </p:txBody>
-      </p:sp>
-      <p:pic>
-        <p:nvPicPr>
-          <p:cNvPr id="4" name="Content Placeholder 3" descr="addin_tmp.png"/>
-          <p:cNvPicPr>
-            <a:picLocks noChangeAspect="1"/>
-          </p:cNvPicPr>
-          <p:nvPr>
-            <p:custDataLst>
-              <p:tags r:id="rId1"/>
-            </p:custDataLst>
-          </p:nvPr>
-        </p:nvPicPr>
-        <p:blipFill>
-          <a:blip r:embed="rId3" cstate="print"/>
-          <a:stretch>
-            <a:fillRect/>
-          </a:stretch>
-        </p:blipFill>
-        <p:spPr>
-          <a:xfrm>
-            <a:off x="8502511" y="5388687"/>
-            <a:ext cx="2608898" cy="537210"/>
-          </a:xfrm>
-          <a:prstGeom prst="rect">
-            <a:avLst/>
-          </a:prstGeom>
-        </p:spPr>
-      </p:pic>
-    </p:spTree>
-    <p:extLst>
-      <p:ext uri="{BB962C8B-B14F-4D97-AF65-F5344CB8AC3E}">
-        <p14:creationId xmlns:p14="http://schemas.microsoft.com/office/powerpoint/2010/main" val="4004208495"/>
-      </p:ext>
-    </p:extLst>
-  </p:cSld>
-  <p:clrMapOvr>
-    <a:masterClrMapping/>
-  </p:clrMapOvr>
-</p:sld>
-</file>
-
-<file path=ppt/slides/slide33.xml><?xml version="1.0" encoding="utf-8"?>
-<p:sld xmlns:a="http://schemas.openxmlformats.org/drawingml/2006/main" xmlns:r="http://schemas.openxmlformats.org/officeDocument/2006/relationships" xmlns:p="http://schemas.openxmlformats.org/presentationml/2006/main">
-  <p:cSld>
-    <p:spTree>
-      <p:nvGrpSpPr>
-        <p:cNvPr id="1" name=""/>
-        <p:cNvGrpSpPr/>
-        <p:nvPr/>
-      </p:nvGrpSpPr>
-      <p:grpSpPr>
-        <a:xfrm>
-          <a:off x="0" y="0"/>
-          <a:ext cx="0" cy="0"/>
-          <a:chOff x="0" y="0"/>
-          <a:chExt cx="0" cy="0"/>
-        </a:xfrm>
-      </p:grpSpPr>
-      <p:sp>
-        <p:nvSpPr>
-          <p:cNvPr id="2" name="Title 1"/>
-          <p:cNvSpPr>
-            <a:spLocks noGrp="1"/>
-          </p:cNvSpPr>
-          <p:nvPr>
-            <p:ph type="title"/>
-          </p:nvPr>
-        </p:nvSpPr>
-        <p:spPr/>
-        <p:txBody>
-          <a:bodyPr>
-            <a:normAutofit/>
-          </a:bodyPr>
-          <a:lstStyle/>
-          <a:p>
-            <a:r>
-              <a:rPr lang="en-US" dirty="0"/>
               <a:t>Example</a:t>
             </a:r>
           </a:p>
@@ -9481,7 +8935,7 @@
 </p:sld>
 </file>
 
-<file path=ppt/slides/slide34.xml><?xml version="1.0" encoding="utf-8"?>
+<file path=ppt/slides/slide33.xml><?xml version="1.0" encoding="utf-8"?>
 <p:sld xmlns:a="http://schemas.openxmlformats.org/drawingml/2006/main" xmlns:r="http://schemas.openxmlformats.org/officeDocument/2006/relationships" xmlns:p="http://schemas.openxmlformats.org/presentationml/2006/main">
   <p:cSld>
     <p:spTree>
@@ -9875,7 +9329,7 @@
 </p:sld>
 </file>
 
-<file path=ppt/slides/slide35.xml><?xml version="1.0" encoding="utf-8"?>
+<file path=ppt/slides/slide34.xml><?xml version="1.0" encoding="utf-8"?>
 <p:sld xmlns:a="http://schemas.openxmlformats.org/drawingml/2006/main" xmlns:r="http://schemas.openxmlformats.org/officeDocument/2006/relationships" xmlns:p="http://schemas.openxmlformats.org/presentationml/2006/main">
   <p:cSld>
     <p:spTree>
@@ -10233,6 +9687,376 @@
 </p:sld>
 </file>
 
+<file path=ppt/slides/slide35.xml><?xml version="1.0" encoding="utf-8"?>
+<p:sld xmlns:a="http://schemas.openxmlformats.org/drawingml/2006/main" xmlns:r="http://schemas.openxmlformats.org/officeDocument/2006/relationships" xmlns:p="http://schemas.openxmlformats.org/presentationml/2006/main">
+  <p:cSld>
+    <p:spTree>
+      <p:nvGrpSpPr>
+        <p:cNvPr id="1" name=""/>
+        <p:cNvGrpSpPr/>
+        <p:nvPr/>
+      </p:nvGrpSpPr>
+      <p:grpSpPr>
+        <a:xfrm>
+          <a:off x="0" y="0"/>
+          <a:ext cx="0" cy="0"/>
+          <a:chOff x="0" y="0"/>
+          <a:chExt cx="0" cy="0"/>
+        </a:xfrm>
+      </p:grpSpPr>
+      <p:sp>
+        <p:nvSpPr>
+          <p:cNvPr id="2" name="Title 1"/>
+          <p:cNvSpPr>
+            <a:spLocks noGrp="1"/>
+          </p:cNvSpPr>
+          <p:nvPr>
+            <p:ph type="title"/>
+          </p:nvPr>
+        </p:nvSpPr>
+        <p:spPr/>
+        <p:txBody>
+          <a:bodyPr/>
+          <a:lstStyle/>
+          <a:p>
+            <a:r>
+              <a:rPr lang="en-US" dirty="0"/>
+              <a:t>Counting Combinations</a:t>
+            </a:r>
+          </a:p>
+        </p:txBody>
+      </p:sp>
+      <p:sp>
+        <p:nvSpPr>
+          <p:cNvPr id="6" name="Content Placeholder 5"/>
+          <p:cNvSpPr>
+            <a:spLocks noGrp="1"/>
+          </p:cNvSpPr>
+          <p:nvPr>
+            <p:ph idx="1"/>
+          </p:nvPr>
+        </p:nvSpPr>
+        <p:spPr/>
+        <p:txBody>
+          <a:bodyPr>
+            <a:normAutofit lnSpcReduction="10000"/>
+          </a:bodyPr>
+          <a:lstStyle/>
+          <a:p>
+            <a:pPr>
+              <a:buNone/>
+            </a:pPr>
+            <a:r>
+              <a:rPr lang="en-US" b="1" dirty="0"/>
+              <a:t>Theorem 2</a:t>
+            </a:r>
+            <a:r>
+              <a:rPr lang="en-US" dirty="0"/>
+              <a:t>: The number of </a:t>
+            </a:r>
+            <a:r>
+              <a:rPr lang="en-US" i="1" dirty="0"/>
+              <a:t>r</a:t>
+            </a:r>
+            <a:r>
+              <a:rPr lang="en-US" dirty="0"/>
+              <a:t>-combinations of a set with </a:t>
+            </a:r>
+            <a:r>
+              <a:rPr lang="en-US" i="1" dirty="0"/>
+              <a:t>n</a:t>
+            </a:r>
+            <a:r>
+              <a:rPr lang="en-US" dirty="0"/>
+              <a:t> elements, where </a:t>
+            </a:r>
+            <a:r>
+              <a:rPr lang="en-US" i="1" dirty="0"/>
+              <a:t>n</a:t>
+            </a:r>
+            <a:r>
+              <a:rPr lang="en-US" dirty="0"/>
+              <a:t> </a:t>
+            </a:r>
+            <a:r>
+              <a:rPr lang="en-US" dirty="0">
+                <a:ea typeface="Cambria Math"/>
+              </a:rPr>
+              <a:t>≥</a:t>
+            </a:r>
+            <a:r>
+              <a:rPr lang="en-US" dirty="0"/>
+              <a:t> </a:t>
+            </a:r>
+            <a:r>
+              <a:rPr lang="en-US" i="1" dirty="0"/>
+              <a:t>r</a:t>
+            </a:r>
+            <a:r>
+              <a:rPr lang="en-US" dirty="0">
+                <a:ea typeface="Cambria Math"/>
+              </a:rPr>
+              <a:t> ≥ 0, equals</a:t>
+            </a:r>
+          </a:p>
+          <a:p>
+            <a:pPr>
+              <a:buNone/>
+            </a:pPr>
+            <a:endParaRPr lang="en-US" dirty="0">
+              <a:ea typeface="Cambria Math"/>
+            </a:endParaRPr>
+          </a:p>
+          <a:p>
+            <a:pPr>
+              <a:buNone/>
+            </a:pPr>
+            <a:endParaRPr lang="en-US" dirty="0">
+              <a:ea typeface="Cambria Math"/>
+            </a:endParaRPr>
+          </a:p>
+          <a:p>
+            <a:pPr>
+              <a:buNone/>
+            </a:pPr>
+            <a:r>
+              <a:rPr lang="en-US" b="1" dirty="0">
+                <a:ea typeface="Cambria Math"/>
+              </a:rPr>
+              <a:t>Proof</a:t>
+            </a:r>
+            <a:r>
+              <a:rPr lang="en-US" dirty="0">
+                <a:ea typeface="Cambria Math"/>
+              </a:rPr>
+              <a:t>:  By the product rule </a:t>
+            </a:r>
+            <a:r>
+              <a:rPr lang="en-US" i="1" dirty="0">
+                <a:ea typeface="Cambria Math"/>
+              </a:rPr>
+              <a:t>P</a:t>
+            </a:r>
+            <a:r>
+              <a:rPr lang="en-US" dirty="0">
+                <a:ea typeface="Cambria Math"/>
+              </a:rPr>
+              <a:t>(</a:t>
+            </a:r>
+            <a:r>
+              <a:rPr lang="en-US" i="1" dirty="0">
+                <a:ea typeface="Cambria Math"/>
+              </a:rPr>
+              <a:t>n</a:t>
+            </a:r>
+            <a:r>
+              <a:rPr lang="en-US" dirty="0">
+                <a:ea typeface="Cambria Math"/>
+              </a:rPr>
+              <a:t>, </a:t>
+            </a:r>
+            <a:r>
+              <a:rPr lang="en-US" i="1" dirty="0">
+                <a:ea typeface="Cambria Math"/>
+              </a:rPr>
+              <a:t>r</a:t>
+            </a:r>
+            <a:r>
+              <a:rPr lang="en-US" dirty="0">
+                <a:ea typeface="Cambria Math"/>
+              </a:rPr>
+              <a:t>) = </a:t>
+            </a:r>
+            <a:r>
+              <a:rPr lang="en-US" i="1" dirty="0">
+                <a:ea typeface="Cambria Math"/>
+              </a:rPr>
+              <a:t>C</a:t>
+            </a:r>
+            <a:r>
+              <a:rPr lang="en-US" dirty="0">
+                <a:ea typeface="Cambria Math"/>
+              </a:rPr>
+              <a:t>(</a:t>
+            </a:r>
+            <a:r>
+              <a:rPr lang="en-US" i="1" dirty="0" err="1">
+                <a:ea typeface="Cambria Math"/>
+              </a:rPr>
+              <a:t>n</a:t>
+            </a:r>
+            <a:r>
+              <a:rPr lang="en-US" dirty="0" err="1">
+                <a:ea typeface="Cambria Math"/>
+              </a:rPr>
+              <a:t>,</a:t>
+            </a:r>
+            <a:r>
+              <a:rPr lang="en-US" i="1" dirty="0" err="1">
+                <a:ea typeface="Cambria Math"/>
+              </a:rPr>
+              <a:t>r</a:t>
+            </a:r>
+            <a:r>
+              <a:rPr lang="en-US" dirty="0">
+                <a:ea typeface="Cambria Math"/>
+              </a:rPr>
+              <a:t>) ∙ </a:t>
+            </a:r>
+            <a:r>
+              <a:rPr lang="en-US" i="1" dirty="0">
+                <a:ea typeface="Cambria Math"/>
+              </a:rPr>
+              <a:t>P</a:t>
+            </a:r>
+            <a:r>
+              <a:rPr lang="en-US" dirty="0">
+                <a:ea typeface="Cambria Math"/>
+              </a:rPr>
+              <a:t>(</a:t>
+            </a:r>
+            <a:r>
+              <a:rPr lang="en-US" i="1" dirty="0" err="1">
+                <a:ea typeface="Cambria Math"/>
+              </a:rPr>
+              <a:t>r</a:t>
+            </a:r>
+            <a:r>
+              <a:rPr lang="en-US" dirty="0" err="1">
+                <a:ea typeface="Cambria Math"/>
+              </a:rPr>
+              <a:t>,</a:t>
+            </a:r>
+            <a:r>
+              <a:rPr lang="en-US" i="1" dirty="0" err="1">
+                <a:ea typeface="Cambria Math"/>
+              </a:rPr>
+              <a:t>r</a:t>
+            </a:r>
+            <a:r>
+              <a:rPr lang="en-US" dirty="0">
+                <a:ea typeface="Cambria Math"/>
+              </a:rPr>
+              <a:t>). Therefore,</a:t>
+            </a:r>
+          </a:p>
+          <a:p>
+            <a:pPr>
+              <a:buNone/>
+            </a:pPr>
+            <a:endParaRPr lang="en-US" dirty="0">
+              <a:ea typeface="Cambria Math"/>
+            </a:endParaRPr>
+          </a:p>
+          <a:p>
+            <a:pPr>
+              <a:buNone/>
+            </a:pPr>
+            <a:endParaRPr lang="en-US" dirty="0">
+              <a:ea typeface="Cambria Math"/>
+            </a:endParaRPr>
+          </a:p>
+          <a:p>
+            <a:pPr>
+              <a:buNone/>
+            </a:pPr>
+            <a:endParaRPr lang="en-US" dirty="0">
+              <a:ea typeface="Cambria Math"/>
+            </a:endParaRPr>
+          </a:p>
+          <a:p>
+            <a:pPr>
+              <a:buNone/>
+            </a:pPr>
+            <a:r>
+              <a:rPr lang="en-US" i="1" dirty="0">
+                <a:ea typeface="Cambria Math" pitchFamily="18" charset="0"/>
+              </a:rPr>
+              <a:t>	</a:t>
+            </a:r>
+            <a:r>
+              <a:rPr lang="en-US" dirty="0"/>
+              <a:t>◀︎</a:t>
+            </a:r>
+            <a:r>
+              <a:rPr lang="en-US" dirty="0">
+                <a:ea typeface="Cambria Math"/>
+              </a:rPr>
+              <a:t> </a:t>
+            </a:r>
+            <a:endParaRPr lang="en-US" dirty="0"/>
+          </a:p>
+        </p:txBody>
+      </p:sp>
+      <p:pic>
+        <p:nvPicPr>
+          <p:cNvPr id="11" name="Picture 10" descr="addin_tmp.png"/>
+          <p:cNvPicPr>
+            <a:picLocks noChangeAspect="1"/>
+          </p:cNvPicPr>
+          <p:nvPr>
+            <p:custDataLst>
+              <p:tags r:id="rId1"/>
+            </p:custDataLst>
+          </p:nvPr>
+        </p:nvPicPr>
+        <p:blipFill>
+          <a:blip r:embed="rId4" cstate="print"/>
+          <a:stretch>
+            <a:fillRect/>
+          </a:stretch>
+        </p:blipFill>
+        <p:spPr>
+          <a:xfrm>
+            <a:off x="2243957" y="4845269"/>
+            <a:ext cx="7296659" cy="658949"/>
+          </a:xfrm>
+          <a:prstGeom prst="rect">
+            <a:avLst/>
+          </a:prstGeom>
+        </p:spPr>
+      </p:pic>
+      <p:pic>
+        <p:nvPicPr>
+          <p:cNvPr id="12" name="Picture 11" descr="addin_tmp.png"/>
+          <p:cNvPicPr>
+            <a:picLocks noChangeAspect="1"/>
+          </p:cNvPicPr>
+          <p:nvPr>
+            <p:custDataLst>
+              <p:tags r:id="rId2"/>
+            </p:custDataLst>
+          </p:nvPr>
+        </p:nvPicPr>
+        <p:blipFill>
+          <a:blip r:embed="rId5" cstate="print"/>
+          <a:stretch>
+            <a:fillRect/>
+          </a:stretch>
+        </p:blipFill>
+        <p:spPr>
+          <a:xfrm>
+            <a:off x="4343402" y="2869324"/>
+            <a:ext cx="3031694" cy="550153"/>
+          </a:xfrm>
+          <a:prstGeom prst="rect">
+            <a:avLst/>
+          </a:prstGeom>
+        </p:spPr>
+      </p:pic>
+    </p:spTree>
+    <p:extLst>
+      <p:ext uri="{BB962C8B-B14F-4D97-AF65-F5344CB8AC3E}">
+        <p14:creationId xmlns:p14="http://schemas.microsoft.com/office/powerpoint/2010/main" val="2036226478"/>
+      </p:ext>
+    </p:extLst>
+  </p:cSld>
+  <p:clrMapOvr>
+    <a:masterClrMapping/>
+  </p:clrMapOvr>
+</p:sld>
+</file>
+
 <file path=ppt/slides/slide36.xml><?xml version="1.0" encoding="utf-8"?>
 <p:sld xmlns:a="http://schemas.openxmlformats.org/drawingml/2006/main" xmlns:r="http://schemas.openxmlformats.org/officeDocument/2006/relationships" xmlns:p="http://schemas.openxmlformats.org/presentationml/2006/main">
   <p:cSld>
@@ -10267,14 +10091,14 @@
           <a:p>
             <a:r>
               <a:rPr lang="en-US" dirty="0"/>
-              <a:t>Counting Combinations</a:t>
+              <a:t>Example</a:t>
             </a:r>
           </a:p>
         </p:txBody>
       </p:sp>
       <p:sp>
         <p:nvSpPr>
-          <p:cNvPr id="6" name="Content Placeholder 5"/>
+          <p:cNvPr id="3" name="Content Placeholder 2"/>
           <p:cNvSpPr>
             <a:spLocks noGrp="1"/>
           </p:cNvSpPr>
@@ -10285,7 +10109,7 @@
         <p:spPr/>
         <p:txBody>
           <a:bodyPr>
-            <a:normAutofit lnSpcReduction="10000"/>
+            <a:normAutofit fontScale="92500" lnSpcReduction="10000"/>
           </a:bodyPr>
           <a:lstStyle/>
           <a:p>
@@ -10293,250 +10117,113 @@
               <a:buNone/>
             </a:pPr>
             <a:r>
-              <a:rPr lang="en-US" b="1" dirty="0"/>
-              <a:t>Theorem 2</a:t>
-            </a:r>
-            <a:r>
-              <a:rPr lang="en-US" dirty="0"/>
-              <a:t>: The number of </a:t>
-            </a:r>
-            <a:r>
-              <a:rPr lang="en-US" i="1" dirty="0"/>
-              <a:t>r</a:t>
-            </a:r>
-            <a:r>
-              <a:rPr lang="en-US" dirty="0"/>
-              <a:t>-combinations of a set with </a:t>
-            </a:r>
-            <a:r>
-              <a:rPr lang="en-US" i="1" dirty="0"/>
-              <a:t>n</a:t>
-            </a:r>
-            <a:r>
-              <a:rPr lang="en-US" dirty="0"/>
-              <a:t> elements, where </a:t>
-            </a:r>
-            <a:r>
-              <a:rPr lang="en-US" i="1" dirty="0"/>
-              <a:t>n</a:t>
-            </a:r>
-            <a:r>
-              <a:rPr lang="en-US" dirty="0"/>
-              <a:t> </a:t>
-            </a:r>
-            <a:r>
-              <a:rPr lang="en-US" dirty="0">
-                <a:ea typeface="Cambria Math"/>
-              </a:rPr>
-              <a:t>≥</a:t>
-            </a:r>
-            <a:r>
-              <a:rPr lang="en-US" dirty="0"/>
-              <a:t> </a:t>
-            </a:r>
-            <a:r>
-              <a:rPr lang="en-US" i="1" dirty="0"/>
-              <a:t>r</a:t>
-            </a:r>
-            <a:r>
-              <a:rPr lang="en-US" dirty="0">
-                <a:ea typeface="Cambria Math"/>
-              </a:rPr>
-              <a:t> ≥ 0, equals</a:t>
+              <a:rPr lang="en-US" dirty="0"/>
+              <a:t>How many poker hands of five cards can be dealt from a standard deck of </a:t>
+            </a:r>
+            <a:r>
+              <a:rPr lang="en-US" dirty="0">
+                <a:ea typeface="Cambria Math" pitchFamily="18" charset="0"/>
+              </a:rPr>
+              <a:t>52</a:t>
+            </a:r>
+            <a:r>
+              <a:rPr lang="en-US" dirty="0"/>
+              <a:t> cards? </a:t>
             </a:r>
           </a:p>
           <a:p>
             <a:pPr>
               <a:buNone/>
             </a:pPr>
-            <a:endParaRPr lang="en-US" dirty="0">
-              <a:ea typeface="Cambria Math"/>
-            </a:endParaRPr>
+            <a:r>
+              <a:rPr lang="en-US" dirty="0"/>
+              <a:t>Since the order in which the cards are dealt does not matter, the number of five card hands is:</a:t>
+            </a:r>
+          </a:p>
+          <a:p>
+            <a:endParaRPr lang="en-US" dirty="0"/>
+          </a:p>
+          <a:p>
+            <a:pPr marL="0" indent="0">
+              <a:buNone/>
+            </a:pPr>
+            <a:endParaRPr lang="en-US" dirty="0"/>
+          </a:p>
+          <a:p>
+            <a:pPr marL="0" indent="0">
+              <a:buNone/>
+            </a:pPr>
+            <a:r>
+              <a:rPr lang="en-US" dirty="0"/>
+              <a:t>How many ways are there to select </a:t>
+            </a:r>
+            <a:r>
+              <a:rPr lang="en-US" dirty="0">
+                <a:ea typeface="Cambria Math" pitchFamily="18" charset="0"/>
+              </a:rPr>
+              <a:t>47</a:t>
+            </a:r>
+            <a:r>
+              <a:rPr lang="en-US" dirty="0"/>
+              <a:t> cards from a deck of </a:t>
+            </a:r>
+            <a:r>
+              <a:rPr lang="en-US" dirty="0">
+                <a:ea typeface="Cambria Math" pitchFamily="18" charset="0"/>
+              </a:rPr>
+              <a:t>52</a:t>
+            </a:r>
+            <a:r>
+              <a:rPr lang="en-US" dirty="0"/>
+              <a:t> cards?</a:t>
+            </a:r>
+          </a:p>
+          <a:p>
+            <a:pPr marL="0" indent="0">
+              <a:buNone/>
+            </a:pPr>
+            <a:r>
+              <a:rPr lang="en-US" dirty="0"/>
+              <a:t>The number of different ways to select </a:t>
+            </a:r>
+            <a:r>
+              <a:rPr lang="en-US" dirty="0">
+                <a:ea typeface="Cambria Math" pitchFamily="18" charset="0"/>
+              </a:rPr>
+              <a:t>47</a:t>
+            </a:r>
+            <a:r>
+              <a:rPr lang="en-US" dirty="0"/>
+              <a:t> cards from </a:t>
+            </a:r>
+            <a:r>
+              <a:rPr lang="en-US" dirty="0">
+                <a:ea typeface="Cambria Math" pitchFamily="18" charset="0"/>
+              </a:rPr>
+              <a:t>52</a:t>
+            </a:r>
+            <a:r>
+              <a:rPr lang="en-US" dirty="0"/>
+              <a:t> is</a:t>
+            </a:r>
+          </a:p>
+          <a:p>
+            <a:endParaRPr lang="en-US" dirty="0"/>
           </a:p>
           <a:p>
             <a:pPr>
               <a:buNone/>
             </a:pPr>
-            <a:endParaRPr lang="en-US" dirty="0">
-              <a:ea typeface="Cambria Math"/>
-            </a:endParaRPr>
-          </a:p>
-          <a:p>
-            <a:pPr>
-              <a:buNone/>
-            </a:pPr>
-            <a:r>
-              <a:rPr lang="en-US" b="1" dirty="0">
-                <a:ea typeface="Cambria Math"/>
-              </a:rPr>
-              <a:t>Proof</a:t>
-            </a:r>
-            <a:r>
-              <a:rPr lang="en-US" dirty="0">
-                <a:ea typeface="Cambria Math"/>
-              </a:rPr>
-              <a:t>:  By the product rule </a:t>
-            </a:r>
-            <a:r>
-              <a:rPr lang="en-US" i="1" dirty="0">
-                <a:ea typeface="Cambria Math"/>
-              </a:rPr>
-              <a:t>P</a:t>
-            </a:r>
-            <a:r>
-              <a:rPr lang="en-US" dirty="0">
-                <a:ea typeface="Cambria Math"/>
-              </a:rPr>
-              <a:t>(</a:t>
-            </a:r>
-            <a:r>
-              <a:rPr lang="en-US" i="1" dirty="0">
-                <a:ea typeface="Cambria Math"/>
-              </a:rPr>
-              <a:t>n</a:t>
-            </a:r>
-            <a:r>
-              <a:rPr lang="en-US" dirty="0">
-                <a:ea typeface="Cambria Math"/>
-              </a:rPr>
-              <a:t>, </a:t>
-            </a:r>
-            <a:r>
-              <a:rPr lang="en-US" i="1" dirty="0">
-                <a:ea typeface="Cambria Math"/>
-              </a:rPr>
-              <a:t>r</a:t>
-            </a:r>
-            <a:r>
-              <a:rPr lang="en-US" dirty="0">
-                <a:ea typeface="Cambria Math"/>
-              </a:rPr>
-              <a:t>) = </a:t>
-            </a:r>
-            <a:r>
-              <a:rPr lang="en-US" i="1" dirty="0">
-                <a:ea typeface="Cambria Math"/>
-              </a:rPr>
-              <a:t>C</a:t>
-            </a:r>
-            <a:r>
-              <a:rPr lang="en-US" dirty="0">
-                <a:ea typeface="Cambria Math"/>
-              </a:rPr>
-              <a:t>(</a:t>
-            </a:r>
-            <a:r>
-              <a:rPr lang="en-US" i="1" dirty="0" err="1">
-                <a:ea typeface="Cambria Math"/>
-              </a:rPr>
-              <a:t>n</a:t>
-            </a:r>
-            <a:r>
-              <a:rPr lang="en-US" dirty="0" err="1">
-                <a:ea typeface="Cambria Math"/>
-              </a:rPr>
-              <a:t>,</a:t>
-            </a:r>
-            <a:r>
-              <a:rPr lang="en-US" i="1" dirty="0" err="1">
-                <a:ea typeface="Cambria Math"/>
-              </a:rPr>
-              <a:t>r</a:t>
-            </a:r>
-            <a:r>
-              <a:rPr lang="en-US" dirty="0">
-                <a:ea typeface="Cambria Math"/>
-              </a:rPr>
-              <a:t>) ∙ </a:t>
-            </a:r>
-            <a:r>
-              <a:rPr lang="en-US" i="1" dirty="0">
-                <a:ea typeface="Cambria Math"/>
-              </a:rPr>
-              <a:t>P</a:t>
-            </a:r>
-            <a:r>
-              <a:rPr lang="en-US" dirty="0">
-                <a:ea typeface="Cambria Math"/>
-              </a:rPr>
-              <a:t>(</a:t>
-            </a:r>
-            <a:r>
-              <a:rPr lang="en-US" i="1" dirty="0" err="1">
-                <a:ea typeface="Cambria Math"/>
-              </a:rPr>
-              <a:t>r</a:t>
-            </a:r>
-            <a:r>
-              <a:rPr lang="en-US" dirty="0" err="1">
-                <a:ea typeface="Cambria Math"/>
-              </a:rPr>
-              <a:t>,</a:t>
-            </a:r>
-            <a:r>
-              <a:rPr lang="en-US" i="1" dirty="0" err="1">
-                <a:ea typeface="Cambria Math"/>
-              </a:rPr>
-              <a:t>r</a:t>
-            </a:r>
-            <a:r>
-              <a:rPr lang="en-US" dirty="0">
-                <a:ea typeface="Cambria Math"/>
-              </a:rPr>
-              <a:t>). Therefore,</a:t>
-            </a:r>
-          </a:p>
-          <a:p>
-            <a:pPr>
-              <a:buNone/>
-            </a:pPr>
-            <a:endParaRPr lang="en-US" dirty="0">
-              <a:ea typeface="Cambria Math"/>
-            </a:endParaRPr>
-          </a:p>
-          <a:p>
-            <a:pPr>
-              <a:buNone/>
-            </a:pPr>
-            <a:endParaRPr lang="en-US" dirty="0">
-              <a:ea typeface="Cambria Math"/>
-            </a:endParaRPr>
-          </a:p>
-          <a:p>
-            <a:pPr>
-              <a:buNone/>
-            </a:pPr>
-            <a:endParaRPr lang="en-US" dirty="0">
-              <a:ea typeface="Cambria Math"/>
-            </a:endParaRPr>
-          </a:p>
-          <a:p>
-            <a:pPr>
-              <a:buNone/>
-            </a:pPr>
-            <a:r>
-              <a:rPr lang="en-US" i="1" dirty="0">
-                <a:ea typeface="Cambria Math" pitchFamily="18" charset="0"/>
-              </a:rPr>
-              <a:t>	</a:t>
-            </a:r>
-            <a:r>
-              <a:rPr lang="en-US" dirty="0"/>
-              <a:t>◀︎</a:t>
-            </a:r>
-            <a:r>
-              <a:rPr lang="en-US" dirty="0">
-                <a:ea typeface="Cambria Math"/>
-              </a:rPr>
-              <a:t> </a:t>
-            </a:r>
-            <a:endParaRPr lang="en-US" dirty="0"/>
+            <a:r>
+              <a:rPr lang="en-US" dirty="0"/>
+              <a:t>    </a:t>
+            </a:r>
           </a:p>
         </p:txBody>
       </p:sp>
       <p:pic>
         <p:nvPicPr>
-          <p:cNvPr id="11" name="Picture 10" descr="addin_tmp.png"/>
+          <p:cNvPr id="13" name="Picture 12" descr="addin_tmp.png"/>
           <p:cNvPicPr>
             <a:picLocks noChangeAspect="1"/>
           </p:cNvPicPr>
@@ -10547,15 +10234,43 @@
           </p:nvPr>
         </p:nvPicPr>
         <p:blipFill>
-          <a:blip r:embed="rId4" cstate="print"/>
+          <a:blip r:embed="rId5" cstate="print"/>
           <a:stretch>
             <a:fillRect/>
           </a:stretch>
         </p:blipFill>
         <p:spPr>
           <a:xfrm>
-            <a:off x="2243957" y="4845269"/>
-            <a:ext cx="7296659" cy="658949"/>
+            <a:off x="1467269" y="3443324"/>
+            <a:ext cx="2078831" cy="397669"/>
+          </a:xfrm>
+          <a:prstGeom prst="rect">
+            <a:avLst/>
+          </a:prstGeom>
+        </p:spPr>
+      </p:pic>
+      <p:pic>
+        <p:nvPicPr>
+          <p:cNvPr id="10" name="Picture 9" descr="addin_tmp.png"/>
+          <p:cNvPicPr>
+            <a:picLocks noChangeAspect="1"/>
+          </p:cNvPicPr>
+          <p:nvPr>
+            <p:custDataLst>
+              <p:tags r:id="rId2"/>
+            </p:custDataLst>
+          </p:nvPr>
+        </p:nvPicPr>
+        <p:blipFill>
+          <a:blip r:embed="rId6" cstate="print"/>
+          <a:stretch>
+            <a:fillRect/>
+          </a:stretch>
+        </p:blipFill>
+        <p:spPr>
+          <a:xfrm>
+            <a:off x="3715288" y="3450468"/>
+            <a:ext cx="6672263" cy="390525"/>
           </a:xfrm>
           <a:prstGeom prst="rect">
             <a:avLst/>
@@ -10570,20 +10285,20 @@
           </p:cNvPicPr>
           <p:nvPr>
             <p:custDataLst>
-              <p:tags r:id="rId2"/>
+              <p:tags r:id="rId3"/>
             </p:custDataLst>
           </p:nvPr>
         </p:nvPicPr>
         <p:blipFill>
-          <a:blip r:embed="rId5" cstate="print"/>
+          <a:blip r:embed="rId7" cstate="print"/>
           <a:stretch>
             <a:fillRect/>
           </a:stretch>
         </p:blipFill>
         <p:spPr>
           <a:xfrm>
-            <a:off x="4343402" y="2869324"/>
-            <a:ext cx="3031694" cy="550153"/>
+            <a:off x="1582883" y="5458692"/>
+            <a:ext cx="5676900" cy="397669"/>
           </a:xfrm>
           <a:prstGeom prst="rect">
             <a:avLst/>
@@ -10593,7 +10308,7 @@
     </p:spTree>
     <p:extLst>
       <p:ext uri="{BB962C8B-B14F-4D97-AF65-F5344CB8AC3E}">
-        <p14:creationId xmlns:p14="http://schemas.microsoft.com/office/powerpoint/2010/main" val="2036226478"/>
+        <p14:creationId xmlns:p14="http://schemas.microsoft.com/office/powerpoint/2010/main" val="2758762720"/>
       </p:ext>
     </p:extLst>
   </p:cSld>
@@ -10637,267 +10352,6 @@
           <a:p>
             <a:r>
               <a:rPr lang="en-US" dirty="0"/>
-              <a:t>Example</a:t>
-            </a:r>
-          </a:p>
-        </p:txBody>
-      </p:sp>
-      <p:sp>
-        <p:nvSpPr>
-          <p:cNvPr id="3" name="Content Placeholder 2"/>
-          <p:cNvSpPr>
-            <a:spLocks noGrp="1"/>
-          </p:cNvSpPr>
-          <p:nvPr>
-            <p:ph idx="1"/>
-          </p:nvPr>
-        </p:nvSpPr>
-        <p:spPr/>
-        <p:txBody>
-          <a:bodyPr>
-            <a:normAutofit fontScale="92500" lnSpcReduction="10000"/>
-          </a:bodyPr>
-          <a:lstStyle/>
-          <a:p>
-            <a:pPr>
-              <a:buNone/>
-            </a:pPr>
-            <a:r>
-              <a:rPr lang="en-US" dirty="0"/>
-              <a:t>How many poker hands of five cards can be dealt from a standard deck of </a:t>
-            </a:r>
-            <a:r>
-              <a:rPr lang="en-US" dirty="0">
-                <a:ea typeface="Cambria Math" pitchFamily="18" charset="0"/>
-              </a:rPr>
-              <a:t>52</a:t>
-            </a:r>
-            <a:r>
-              <a:rPr lang="en-US" dirty="0"/>
-              <a:t> cards? </a:t>
-            </a:r>
-          </a:p>
-          <a:p>
-            <a:pPr>
-              <a:buNone/>
-            </a:pPr>
-            <a:r>
-              <a:rPr lang="en-US" dirty="0"/>
-              <a:t>Since the order in which the cards are dealt does not matter, the number of five card hands is:</a:t>
-            </a:r>
-          </a:p>
-          <a:p>
-            <a:endParaRPr lang="en-US" dirty="0"/>
-          </a:p>
-          <a:p>
-            <a:pPr marL="0" indent="0">
-              <a:buNone/>
-            </a:pPr>
-            <a:endParaRPr lang="en-US" dirty="0"/>
-          </a:p>
-          <a:p>
-            <a:pPr marL="0" indent="0">
-              <a:buNone/>
-            </a:pPr>
-            <a:r>
-              <a:rPr lang="en-US" dirty="0"/>
-              <a:t>How many ways are there to select </a:t>
-            </a:r>
-            <a:r>
-              <a:rPr lang="en-US" dirty="0">
-                <a:ea typeface="Cambria Math" pitchFamily="18" charset="0"/>
-              </a:rPr>
-              <a:t>47</a:t>
-            </a:r>
-            <a:r>
-              <a:rPr lang="en-US" dirty="0"/>
-              <a:t> cards from a deck of </a:t>
-            </a:r>
-            <a:r>
-              <a:rPr lang="en-US" dirty="0">
-                <a:ea typeface="Cambria Math" pitchFamily="18" charset="0"/>
-              </a:rPr>
-              <a:t>52</a:t>
-            </a:r>
-            <a:r>
-              <a:rPr lang="en-US" dirty="0"/>
-              <a:t> cards?</a:t>
-            </a:r>
-          </a:p>
-          <a:p>
-            <a:pPr marL="0" indent="0">
-              <a:buNone/>
-            </a:pPr>
-            <a:r>
-              <a:rPr lang="en-US" dirty="0"/>
-              <a:t>The number of different ways to select </a:t>
-            </a:r>
-            <a:r>
-              <a:rPr lang="en-US" dirty="0">
-                <a:ea typeface="Cambria Math" pitchFamily="18" charset="0"/>
-              </a:rPr>
-              <a:t>47</a:t>
-            </a:r>
-            <a:r>
-              <a:rPr lang="en-US" dirty="0"/>
-              <a:t> cards from </a:t>
-            </a:r>
-            <a:r>
-              <a:rPr lang="en-US" dirty="0">
-                <a:ea typeface="Cambria Math" pitchFamily="18" charset="0"/>
-              </a:rPr>
-              <a:t>52</a:t>
-            </a:r>
-            <a:r>
-              <a:rPr lang="en-US" dirty="0"/>
-              <a:t> is</a:t>
-            </a:r>
-          </a:p>
-          <a:p>
-            <a:endParaRPr lang="en-US" dirty="0"/>
-          </a:p>
-          <a:p>
-            <a:pPr>
-              <a:buNone/>
-            </a:pPr>
-            <a:r>
-              <a:rPr lang="en-US" dirty="0"/>
-              <a:t>    </a:t>
-            </a:r>
-          </a:p>
-        </p:txBody>
-      </p:sp>
-      <p:pic>
-        <p:nvPicPr>
-          <p:cNvPr id="13" name="Picture 12" descr="addin_tmp.png"/>
-          <p:cNvPicPr>
-            <a:picLocks noChangeAspect="1"/>
-          </p:cNvPicPr>
-          <p:nvPr>
-            <p:custDataLst>
-              <p:tags r:id="rId1"/>
-            </p:custDataLst>
-          </p:nvPr>
-        </p:nvPicPr>
-        <p:blipFill>
-          <a:blip r:embed="rId5" cstate="print"/>
-          <a:stretch>
-            <a:fillRect/>
-          </a:stretch>
-        </p:blipFill>
-        <p:spPr>
-          <a:xfrm>
-            <a:off x="1467269" y="3443324"/>
-            <a:ext cx="2078831" cy="397669"/>
-          </a:xfrm>
-          <a:prstGeom prst="rect">
-            <a:avLst/>
-          </a:prstGeom>
-        </p:spPr>
-      </p:pic>
-      <p:pic>
-        <p:nvPicPr>
-          <p:cNvPr id="10" name="Picture 9" descr="addin_tmp.png"/>
-          <p:cNvPicPr>
-            <a:picLocks noChangeAspect="1"/>
-          </p:cNvPicPr>
-          <p:nvPr>
-            <p:custDataLst>
-              <p:tags r:id="rId2"/>
-            </p:custDataLst>
-          </p:nvPr>
-        </p:nvPicPr>
-        <p:blipFill>
-          <a:blip r:embed="rId6" cstate="print"/>
-          <a:stretch>
-            <a:fillRect/>
-          </a:stretch>
-        </p:blipFill>
-        <p:spPr>
-          <a:xfrm>
-            <a:off x="3715288" y="3450468"/>
-            <a:ext cx="6672263" cy="390525"/>
-          </a:xfrm>
-          <a:prstGeom prst="rect">
-            <a:avLst/>
-          </a:prstGeom>
-        </p:spPr>
-      </p:pic>
-      <p:pic>
-        <p:nvPicPr>
-          <p:cNvPr id="12" name="Picture 11" descr="addin_tmp.png"/>
-          <p:cNvPicPr>
-            <a:picLocks noChangeAspect="1"/>
-          </p:cNvPicPr>
-          <p:nvPr>
-            <p:custDataLst>
-              <p:tags r:id="rId3"/>
-            </p:custDataLst>
-          </p:nvPr>
-        </p:nvPicPr>
-        <p:blipFill>
-          <a:blip r:embed="rId7" cstate="print"/>
-          <a:stretch>
-            <a:fillRect/>
-          </a:stretch>
-        </p:blipFill>
-        <p:spPr>
-          <a:xfrm>
-            <a:off x="1582883" y="5458692"/>
-            <a:ext cx="5676900" cy="397669"/>
-          </a:xfrm>
-          <a:prstGeom prst="rect">
-            <a:avLst/>
-          </a:prstGeom>
-        </p:spPr>
-      </p:pic>
-    </p:spTree>
-    <p:extLst>
-      <p:ext uri="{BB962C8B-B14F-4D97-AF65-F5344CB8AC3E}">
-        <p14:creationId xmlns:p14="http://schemas.microsoft.com/office/powerpoint/2010/main" val="2758762720"/>
-      </p:ext>
-    </p:extLst>
-  </p:cSld>
-  <p:clrMapOvr>
-    <a:masterClrMapping/>
-  </p:clrMapOvr>
-</p:sld>
-</file>
-
-<file path=ppt/slides/slide38.xml><?xml version="1.0" encoding="utf-8"?>
-<p:sld xmlns:a="http://schemas.openxmlformats.org/drawingml/2006/main" xmlns:r="http://schemas.openxmlformats.org/officeDocument/2006/relationships" xmlns:p="http://schemas.openxmlformats.org/presentationml/2006/main">
-  <p:cSld>
-    <p:spTree>
-      <p:nvGrpSpPr>
-        <p:cNvPr id="1" name=""/>
-        <p:cNvGrpSpPr/>
-        <p:nvPr/>
-      </p:nvGrpSpPr>
-      <p:grpSpPr>
-        <a:xfrm>
-          <a:off x="0" y="0"/>
-          <a:ext cx="0" cy="0"/>
-          <a:chOff x="0" y="0"/>
-          <a:chExt cx="0" cy="0"/>
-        </a:xfrm>
-      </p:grpSpPr>
-      <p:sp>
-        <p:nvSpPr>
-          <p:cNvPr id="2" name="Title 1"/>
-          <p:cNvSpPr>
-            <a:spLocks noGrp="1"/>
-          </p:cNvSpPr>
-          <p:nvPr>
-            <p:ph type="title"/>
-          </p:nvPr>
-        </p:nvSpPr>
-        <p:spPr/>
-        <p:txBody>
-          <a:bodyPr/>
-          <a:lstStyle/>
-          <a:p>
-            <a:r>
-              <a:rPr lang="en-US" dirty="0"/>
               <a:t>Combinations</a:t>
             </a:r>
           </a:p>
@@ -11250,7 +10704,7 @@
 </p:sld>
 </file>
 
-<file path=ppt/slides/slide39.xml><?xml version="1.0" encoding="utf-8"?>
+<file path=ppt/slides/slide38.xml><?xml version="1.0" encoding="utf-8"?>
 <p:sld xmlns:a="http://schemas.openxmlformats.org/drawingml/2006/main" xmlns:r="http://schemas.openxmlformats.org/officeDocument/2006/relationships" xmlns:p="http://schemas.openxmlformats.org/presentationml/2006/main">
   <p:cSld>
     <p:spTree>
@@ -11407,6 +10861,199 @@
     <p:extLst>
       <p:ext uri="{BB962C8B-B14F-4D97-AF65-F5344CB8AC3E}">
         <p14:creationId xmlns:p14="http://schemas.microsoft.com/office/powerpoint/2010/main" val="2541148861"/>
+      </p:ext>
+    </p:extLst>
+  </p:cSld>
+  <p:clrMapOvr>
+    <a:masterClrMapping/>
+  </p:clrMapOvr>
+</p:sld>
+</file>
+
+<file path=ppt/slides/slide39.xml><?xml version="1.0" encoding="utf-8"?>
+<p:sld xmlns:a="http://schemas.openxmlformats.org/drawingml/2006/main" xmlns:r="http://schemas.openxmlformats.org/officeDocument/2006/relationships" xmlns:p="http://schemas.openxmlformats.org/presentationml/2006/main">
+  <p:cSld>
+    <p:bg>
+      <p:bgPr>
+        <a:solidFill>
+          <a:schemeClr val="bg1">
+            <a:lumMod val="95000"/>
+          </a:schemeClr>
+        </a:solidFill>
+        <a:effectLst/>
+      </p:bgPr>
+    </p:bg>
+    <p:spTree>
+      <p:nvGrpSpPr>
+        <p:cNvPr id="1" name=""/>
+        <p:cNvGrpSpPr/>
+        <p:nvPr/>
+      </p:nvGrpSpPr>
+      <p:grpSpPr>
+        <a:xfrm>
+          <a:off x="0" y="0"/>
+          <a:ext cx="0" cy="0"/>
+          <a:chOff x="0" y="0"/>
+          <a:chExt cx="0" cy="0"/>
+        </a:xfrm>
+      </p:grpSpPr>
+      <p:sp>
+        <p:nvSpPr>
+          <p:cNvPr id="2" name="Title 1">
+            <a:extLst>
+              <a:ext uri="{FF2B5EF4-FFF2-40B4-BE49-F238E27FC236}">
+                <a16:creationId xmlns:a16="http://schemas.microsoft.com/office/drawing/2014/main" id="{00168756-70EF-F04B-B39F-3424381BB315}"/>
+              </a:ext>
+            </a:extLst>
+          </p:cNvPr>
+          <p:cNvSpPr>
+            <a:spLocks noGrp="1"/>
+          </p:cNvSpPr>
+          <p:nvPr>
+            <p:ph type="title"/>
+          </p:nvPr>
+        </p:nvSpPr>
+        <p:spPr/>
+        <p:txBody>
+          <a:bodyPr/>
+          <a:lstStyle/>
+          <a:p>
+            <a:r>
+              <a:rPr lang="en-US"/>
+              <a:t>Summary</a:t>
+            </a:r>
+          </a:p>
+        </p:txBody>
+      </p:sp>
+      <mc:AlternateContent xmlns:mc="http://schemas.openxmlformats.org/markup-compatibility/2006" xmlns:a14="http://schemas.microsoft.com/office/drawing/2010/main">
+        <mc:Choice Requires="a14">
+          <p:sp>
+            <p:nvSpPr>
+              <p:cNvPr id="3" name="Content Placeholder 2">
+                <a:extLst>
+                  <a:ext uri="{FF2B5EF4-FFF2-40B4-BE49-F238E27FC236}">
+                    <a16:creationId xmlns:a16="http://schemas.microsoft.com/office/drawing/2014/main" id="{CB58361C-1AC9-6245-929F-CA250848B30A}"/>
+                  </a:ext>
+                </a:extLst>
+              </p:cNvPr>
+              <p:cNvSpPr>
+                <a:spLocks noGrp="1"/>
+              </p:cNvSpPr>
+              <p:nvPr>
+                <p:ph idx="1"/>
+              </p:nvPr>
+            </p:nvSpPr>
+            <p:spPr/>
+            <p:txBody>
+              <a:bodyPr/>
+              <a:lstStyle/>
+              <a:p>
+                <a:r>
+                  <a:rPr lang="en-US" dirty="0"/>
+                  <a:t>Permutations n!</a:t>
+                </a:r>
+              </a:p>
+              <a:p>
+                <a:r>
+                  <a:rPr lang="en-US" dirty="0"/>
+                  <a:t>Combinations </a:t>
+                </a:r>
+                <a14:m>
+                  <m:oMath xmlns:m="http://schemas.openxmlformats.org/officeDocument/2006/math">
+                    <m:d>
+                      <m:dPr>
+                        <m:ctrlPr>
+                          <a:rPr lang="en-US" i="1">
+                            <a:latin typeface="Cambria Math" panose="02040503050406030204" pitchFamily="18" charset="0"/>
+                          </a:rPr>
+                        </m:ctrlPr>
+                      </m:dPr>
+                      <m:e>
+                        <m:f>
+                          <m:fPr>
+                            <m:type m:val="noBar"/>
+                            <m:ctrlPr>
+                              <a:rPr lang="en-US" i="1">
+                                <a:latin typeface="Cambria Math" panose="02040503050406030204" pitchFamily="18" charset="0"/>
+                              </a:rPr>
+                            </m:ctrlPr>
+                          </m:fPr>
+                          <m:num>
+                            <m:r>
+                              <a:rPr lang="en-US" i="1">
+                                <a:latin typeface="Cambria Math" panose="02040503050406030204" pitchFamily="18" charset="0"/>
+                              </a:rPr>
+                              <m:t>𝑛</m:t>
+                            </m:r>
+                          </m:num>
+                          <m:den>
+                            <m:r>
+                              <a:rPr lang="fr-CH" i="1">
+                                <a:latin typeface="Cambria Math" panose="02040503050406030204" pitchFamily="18" charset="0"/>
+                              </a:rPr>
+                              <m:t>𝑟</m:t>
+                            </m:r>
+                          </m:den>
+                        </m:f>
+                      </m:e>
+                    </m:d>
+                  </m:oMath>
+                </a14:m>
+                <a:r>
+                  <a:rPr lang="en-US" dirty="0"/>
+                  <a:t> </a:t>
+                </a:r>
+              </a:p>
+              <a:p>
+                <a:endParaRPr lang="en-US"/>
+              </a:p>
+            </p:txBody>
+          </p:sp>
+        </mc:Choice>
+        <mc:Fallback xmlns="">
+          <p:sp>
+            <p:nvSpPr>
+              <p:cNvPr id="3" name="Content Placeholder 2">
+                <a:extLst>
+                  <a:ext uri="{FF2B5EF4-FFF2-40B4-BE49-F238E27FC236}">
+                    <a16:creationId xmlns:a16="http://schemas.microsoft.com/office/drawing/2014/main" id="{CB58361C-1AC9-6245-929F-CA250848B30A}"/>
+                  </a:ext>
+                </a:extLst>
+              </p:cNvPr>
+              <p:cNvSpPr>
+                <a:spLocks noGrp="1" noRot="1" noChangeAspect="1" noMove="1" noResize="1" noEditPoints="1" noAdjustHandles="1" noChangeArrowheads="1" noChangeShapeType="1" noTextEdit="1"/>
+              </p:cNvSpPr>
+              <p:nvPr>
+                <p:ph idx="1"/>
+              </p:nvPr>
+            </p:nvSpPr>
+            <p:spPr>
+              <a:blipFill>
+                <a:blip r:embed="rId2"/>
+                <a:stretch>
+                  <a:fillRect l="-965" t="-2632"/>
+                </a:stretch>
+              </a:blipFill>
+            </p:spPr>
+            <p:txBody>
+              <a:bodyPr/>
+              <a:lstStyle/>
+              <a:p>
+                <a:r>
+                  <a:rPr lang="en-US">
+                    <a:noFill/>
+                  </a:rPr>
+                  <a:t> </a:t>
+                </a:r>
+              </a:p>
+            </p:txBody>
+          </p:sp>
+        </mc:Fallback>
+      </mc:AlternateContent>
+    </p:spTree>
+    <p:extLst>
+      <p:ext uri="{BB962C8B-B14F-4D97-AF65-F5344CB8AC3E}">
+        <p14:creationId xmlns:p14="http://schemas.microsoft.com/office/powerpoint/2010/main" val="190721652"/>
       </p:ext>
     </p:extLst>
   </p:cSld>
@@ -11547,18 +11194,12 @@
       </p:grpSpPr>
       <p:sp>
         <p:nvSpPr>
-          <p:cNvPr id="2" name="Title 1">
-            <a:extLst>
-              <a:ext uri="{FF2B5EF4-FFF2-40B4-BE49-F238E27FC236}">
-                <a16:creationId xmlns:a16="http://schemas.microsoft.com/office/drawing/2014/main" id="{00168756-70EF-F04B-B39F-3424381BB315}"/>
-              </a:ext>
-            </a:extLst>
-          </p:cNvPr>
+          <p:cNvPr id="2" name="Title 1"/>
           <p:cNvSpPr>
             <a:spLocks noGrp="1"/>
           </p:cNvSpPr>
           <p:nvPr>
-            <p:ph type="title"/>
+            <p:ph type="ctrTitle"/>
           </p:nvPr>
         </p:nvSpPr>
         <p:spPr/>
@@ -11567,141 +11208,45 @@
           <a:lstStyle/>
           <a:p>
             <a:r>
-              <a:rPr lang="en-US"/>
-              <a:t>Summary</a:t>
+              <a:rPr lang="en-US" dirty="0"/>
+              <a:t>Binomial Coefficients and Identities</a:t>
             </a:r>
           </a:p>
         </p:txBody>
       </p:sp>
-      <mc:AlternateContent xmlns:mc="http://schemas.openxmlformats.org/markup-compatibility/2006" xmlns:a14="http://schemas.microsoft.com/office/drawing/2010/main">
-        <mc:Choice Requires="a14">
-          <p:sp>
-            <p:nvSpPr>
-              <p:cNvPr id="3" name="Content Placeholder 2">
-                <a:extLst>
-                  <a:ext uri="{FF2B5EF4-FFF2-40B4-BE49-F238E27FC236}">
-                    <a16:creationId xmlns:a16="http://schemas.microsoft.com/office/drawing/2014/main" id="{CB58361C-1AC9-6245-929F-CA250848B30A}"/>
-                  </a:ext>
-                </a:extLst>
-              </p:cNvPr>
-              <p:cNvSpPr>
-                <a:spLocks noGrp="1"/>
-              </p:cNvSpPr>
-              <p:nvPr>
-                <p:ph idx="1"/>
-              </p:nvPr>
-            </p:nvSpPr>
-            <p:spPr/>
-            <p:txBody>
-              <a:bodyPr/>
-              <a:lstStyle/>
-              <a:p>
-                <a:r>
-                  <a:rPr lang="en-US" dirty="0"/>
-                  <a:t>Permutations n!</a:t>
-                </a:r>
-              </a:p>
-              <a:p>
-                <a:r>
-                  <a:rPr lang="en-US" dirty="0"/>
-                  <a:t>Combinations </a:t>
-                </a:r>
-                <a14:m>
-                  <m:oMath xmlns:m="http://schemas.openxmlformats.org/officeDocument/2006/math">
-                    <m:d>
-                      <m:dPr>
-                        <m:ctrlPr>
-                          <a:rPr lang="en-US" i="1">
-                            <a:latin typeface="Cambria Math" panose="02040503050406030204" pitchFamily="18" charset="0"/>
-                          </a:rPr>
-                        </m:ctrlPr>
-                      </m:dPr>
-                      <m:e>
-                        <m:f>
-                          <m:fPr>
-                            <m:type m:val="noBar"/>
-                            <m:ctrlPr>
-                              <a:rPr lang="en-US" i="1">
-                                <a:latin typeface="Cambria Math" panose="02040503050406030204" pitchFamily="18" charset="0"/>
-                              </a:rPr>
-                            </m:ctrlPr>
-                          </m:fPr>
-                          <m:num>
-                            <m:r>
-                              <a:rPr lang="en-US" i="1">
-                                <a:latin typeface="Cambria Math" panose="02040503050406030204" pitchFamily="18" charset="0"/>
-                              </a:rPr>
-                              <m:t>𝑛</m:t>
-                            </m:r>
-                          </m:num>
-                          <m:den>
-                            <m:r>
-                              <a:rPr lang="fr-CH" i="1">
-                                <a:latin typeface="Cambria Math" panose="02040503050406030204" pitchFamily="18" charset="0"/>
-                              </a:rPr>
-                              <m:t>𝑟</m:t>
-                            </m:r>
-                          </m:den>
-                        </m:f>
-                      </m:e>
-                    </m:d>
-                  </m:oMath>
-                </a14:m>
-                <a:r>
-                  <a:rPr lang="en-US" dirty="0"/>
-                  <a:t> </a:t>
-                </a:r>
-              </a:p>
-              <a:p>
-                <a:endParaRPr lang="en-US"/>
-              </a:p>
-            </p:txBody>
-          </p:sp>
-        </mc:Choice>
-        <mc:Fallback xmlns="">
-          <p:sp>
-            <p:nvSpPr>
-              <p:cNvPr id="3" name="Content Placeholder 2">
-                <a:extLst>
-                  <a:ext uri="{FF2B5EF4-FFF2-40B4-BE49-F238E27FC236}">
-                    <a16:creationId xmlns:a16="http://schemas.microsoft.com/office/drawing/2014/main" id="{CB58361C-1AC9-6245-929F-CA250848B30A}"/>
-                  </a:ext>
-                </a:extLst>
-              </p:cNvPr>
-              <p:cNvSpPr>
-                <a:spLocks noGrp="1" noRot="1" noChangeAspect="1" noMove="1" noResize="1" noEditPoints="1" noAdjustHandles="1" noChangeArrowheads="1" noChangeShapeType="1" noTextEdit="1"/>
-              </p:cNvSpPr>
-              <p:nvPr>
-                <p:ph idx="1"/>
-              </p:nvPr>
-            </p:nvSpPr>
-            <p:spPr>
-              <a:blipFill>
-                <a:blip r:embed="rId2"/>
-                <a:stretch>
-                  <a:fillRect l="-965" t="-2632"/>
-                </a:stretch>
-              </a:blipFill>
-            </p:spPr>
-            <p:txBody>
-              <a:bodyPr/>
-              <a:lstStyle/>
-              <a:p>
-                <a:r>
-                  <a:rPr lang="en-US">
-                    <a:noFill/>
-                  </a:rPr>
-                  <a:t> </a:t>
-                </a:r>
-              </a:p>
-            </p:txBody>
-          </p:sp>
-        </mc:Fallback>
-      </mc:AlternateContent>
+      <p:sp>
+        <p:nvSpPr>
+          <p:cNvPr id="3" name="Subtitle 2"/>
+          <p:cNvSpPr>
+            <a:spLocks noGrp="1"/>
+          </p:cNvSpPr>
+          <p:nvPr>
+            <p:ph type="subTitle" idx="1"/>
+          </p:nvPr>
+        </p:nvSpPr>
+        <p:spPr/>
+        <p:txBody>
+          <a:bodyPr/>
+          <a:lstStyle/>
+          <a:p>
+            <a:r>
+              <a:rPr lang="en-US" dirty="0"/>
+              <a:t>Section </a:t>
+            </a:r>
+            <a:r>
+              <a:rPr lang="en-US" dirty="0">
+                <a:latin typeface="Cambria Math" pitchFamily="18" charset="0"/>
+                <a:ea typeface="Cambria Math" pitchFamily="18" charset="0"/>
+              </a:rPr>
+              <a:t>6.4</a:t>
+            </a:r>
+          </a:p>
+        </p:txBody>
+      </p:sp>
     </p:spTree>
     <p:extLst>
       <p:ext uri="{BB962C8B-B14F-4D97-AF65-F5344CB8AC3E}">
-        <p14:creationId xmlns:p14="http://schemas.microsoft.com/office/powerpoint/2010/main" val="190721652"/>
+        <p14:creationId xmlns:p14="http://schemas.microsoft.com/office/powerpoint/2010/main" val="109148625"/>
       </p:ext>
     </p:extLst>
   </p:cSld>
@@ -11745,97 +11290,6 @@
             <a:spLocks noGrp="1"/>
           </p:cNvSpPr>
           <p:nvPr>
-            <p:ph type="ctrTitle"/>
-          </p:nvPr>
-        </p:nvSpPr>
-        <p:spPr/>
-        <p:txBody>
-          <a:bodyPr/>
-          <a:lstStyle/>
-          <a:p>
-            <a:r>
-              <a:rPr lang="en-US" dirty="0"/>
-              <a:t>Binomial Coefficients and Identities</a:t>
-            </a:r>
-          </a:p>
-        </p:txBody>
-      </p:sp>
-      <p:sp>
-        <p:nvSpPr>
-          <p:cNvPr id="3" name="Subtitle 2"/>
-          <p:cNvSpPr>
-            <a:spLocks noGrp="1"/>
-          </p:cNvSpPr>
-          <p:nvPr>
-            <p:ph type="subTitle" idx="1"/>
-          </p:nvPr>
-        </p:nvSpPr>
-        <p:spPr/>
-        <p:txBody>
-          <a:bodyPr/>
-          <a:lstStyle/>
-          <a:p>
-            <a:r>
-              <a:rPr lang="en-US" dirty="0"/>
-              <a:t>Section </a:t>
-            </a:r>
-            <a:r>
-              <a:rPr lang="en-US" dirty="0">
-                <a:latin typeface="Cambria Math" pitchFamily="18" charset="0"/>
-                <a:ea typeface="Cambria Math" pitchFamily="18" charset="0"/>
-              </a:rPr>
-              <a:t>6.4</a:t>
-            </a:r>
-          </a:p>
-        </p:txBody>
-      </p:sp>
-    </p:spTree>
-    <p:extLst>
-      <p:ext uri="{BB962C8B-B14F-4D97-AF65-F5344CB8AC3E}">
-        <p14:creationId xmlns:p14="http://schemas.microsoft.com/office/powerpoint/2010/main" val="109148625"/>
-      </p:ext>
-    </p:extLst>
-  </p:cSld>
-  <p:clrMapOvr>
-    <a:masterClrMapping/>
-  </p:clrMapOvr>
-</p:sld>
-</file>
-
-<file path=ppt/slides/slide42.xml><?xml version="1.0" encoding="utf-8"?>
-<p:sld xmlns:a="http://schemas.openxmlformats.org/drawingml/2006/main" xmlns:r="http://schemas.openxmlformats.org/officeDocument/2006/relationships" xmlns:p="http://schemas.openxmlformats.org/presentationml/2006/main">
-  <p:cSld>
-    <p:bg>
-      <p:bgPr>
-        <a:solidFill>
-          <a:schemeClr val="bg1">
-            <a:lumMod val="95000"/>
-          </a:schemeClr>
-        </a:solidFill>
-        <a:effectLst/>
-      </p:bgPr>
-    </p:bg>
-    <p:spTree>
-      <p:nvGrpSpPr>
-        <p:cNvPr id="1" name=""/>
-        <p:cNvGrpSpPr/>
-        <p:nvPr/>
-      </p:nvGrpSpPr>
-      <p:grpSpPr>
-        <a:xfrm>
-          <a:off x="0" y="0"/>
-          <a:ext cx="0" cy="0"/>
-          <a:chOff x="0" y="0"/>
-          <a:chExt cx="0" cy="0"/>
-        </a:xfrm>
-      </p:grpSpPr>
-      <p:sp>
-        <p:nvSpPr>
-          <p:cNvPr id="2" name="Title 1"/>
-          <p:cNvSpPr>
-            <a:spLocks noGrp="1"/>
-          </p:cNvSpPr>
-          <p:nvPr>
             <p:ph type="title"/>
           </p:nvPr>
         </p:nvSpPr>
@@ -11892,7 +11346,7 @@
 </p:sld>
 </file>
 
-<file path=ppt/slides/slide43.xml><?xml version="1.0" encoding="utf-8"?>
+<file path=ppt/slides/slide42.xml><?xml version="1.0" encoding="utf-8"?>
 <p:sld xmlns:a="http://schemas.openxmlformats.org/drawingml/2006/main" xmlns:r="http://schemas.openxmlformats.org/officeDocument/2006/relationships" xmlns:p="http://schemas.openxmlformats.org/presentationml/2006/main">
   <p:cSld>
     <p:spTree>
@@ -12591,7 +12045,7 @@
 </p:sld>
 </file>
 
-<file path=ppt/slides/slide44.xml><?xml version="1.0" encoding="utf-8"?>
+<file path=ppt/slides/slide43.xml><?xml version="1.0" encoding="utf-8"?>
 <p:sld xmlns:a="http://schemas.openxmlformats.org/drawingml/2006/main" xmlns:r="http://schemas.openxmlformats.org/officeDocument/2006/relationships" xmlns:p="http://schemas.openxmlformats.org/presentationml/2006/main">
   <p:cSld>
     <p:spTree>
@@ -12754,7 +12208,7 @@
 </p:sld>
 </file>
 
-<file path=ppt/slides/slide45.xml><?xml version="1.0" encoding="utf-8"?>
+<file path=ppt/slides/slide44.xml><?xml version="1.0" encoding="utf-8"?>
 <p:sld xmlns:a="http://schemas.openxmlformats.org/drawingml/2006/main" xmlns:r="http://schemas.openxmlformats.org/officeDocument/2006/relationships" xmlns:p="http://schemas.openxmlformats.org/presentationml/2006/main">
   <p:cSld>
     <p:spTree>
@@ -13376,7 +12830,7 @@
 </p:sld>
 </file>
 
-<file path=ppt/slides/slide46.xml><?xml version="1.0" encoding="utf-8"?>
+<file path=ppt/slides/slide45.xml><?xml version="1.0" encoding="utf-8"?>
 <p:sld xmlns:a="http://schemas.openxmlformats.org/drawingml/2006/main" xmlns:r="http://schemas.openxmlformats.org/officeDocument/2006/relationships" xmlns:p="http://schemas.openxmlformats.org/presentationml/2006/main">
   <p:cSld>
     <p:spTree>
@@ -13777,7 +13231,7 @@
 </p:sld>
 </file>
 
-<file path=ppt/slides/slide47.xml><?xml version="1.0" encoding="utf-8"?>
+<file path=ppt/slides/slide46.xml><?xml version="1.0" encoding="utf-8"?>
 <p:sld xmlns:a="http://schemas.openxmlformats.org/drawingml/2006/main" xmlns:r="http://schemas.openxmlformats.org/officeDocument/2006/relationships" xmlns:p="http://schemas.openxmlformats.org/presentationml/2006/main">
   <p:cSld>
     <p:spTree>
@@ -14021,7 +13475,7 @@
 </p:sld>
 </file>
 
-<file path=ppt/slides/slide48.xml><?xml version="1.0" encoding="utf-8"?>
+<file path=ppt/slides/slide47.xml><?xml version="1.0" encoding="utf-8"?>
 <p:sld xmlns:a="http://schemas.openxmlformats.org/drawingml/2006/main" xmlns:r="http://schemas.openxmlformats.org/officeDocument/2006/relationships" xmlns:p="http://schemas.openxmlformats.org/presentationml/2006/main">
   <p:cSld>
     <p:spTree>
@@ -15063,7 +14517,7 @@
 </p:sld>
 </file>
 
-<file path=ppt/slides/slide49.xml><?xml version="1.0" encoding="utf-8"?>
+<file path=ppt/slides/slide48.xml><?xml version="1.0" encoding="utf-8"?>
 <p:sld xmlns:a="http://schemas.openxmlformats.org/drawingml/2006/main" xmlns:r="http://schemas.openxmlformats.org/officeDocument/2006/relationships" xmlns:p="http://schemas.openxmlformats.org/presentationml/2006/main">
   <p:cSld>
     <p:spTree>
@@ -15125,8 +14579,8 @@
           </a:xfrm>
         </p:spPr>
       </p:pic>
-      <mc:AlternateContent xmlns:mc="http://schemas.openxmlformats.org/markup-compatibility/2006" xmlns:a14="http://schemas.microsoft.com/office/drawing/2010/main">
-        <mc:Choice Requires="a14">
+      <mc:AlternateContent xmlns:mc="http://schemas.openxmlformats.org/markup-compatibility/2006">
+        <mc:Choice xmlns:a14="http://schemas.microsoft.com/office/drawing/2010/main" Requires="a14">
           <p:sp>
             <p:nvSpPr>
               <p:cNvPr id="5" name="TextBox 4"/>
@@ -15136,7 +14590,7 @@
             <p:spPr>
               <a:xfrm>
                 <a:off x="427111" y="2290422"/>
-                <a:ext cx="4540469" cy="1291700"/>
+                <a:ext cx="4540469" cy="1267591"/>
               </a:xfrm>
               <a:prstGeom prst="rect">
                 <a:avLst/>
@@ -15193,7 +14647,7 @@
                               <a:rPr lang="fr-CH" sz="2400" b="0" i="1">
                                 <a:latin typeface="Cambria Math" panose="02040503050406030204" pitchFamily="18" charset="0"/>
                               </a:rPr>
-                              <m:t>𝑘</m:t>
+                              <m:t>𝑛</m:t>
                             </m:r>
                           </m:num>
                           <m:den>
@@ -15201,7 +14655,7 @@
                               <a:rPr lang="fr-CH" sz="2400" b="0" i="1">
                                 <a:latin typeface="Cambria Math" panose="02040503050406030204" pitchFamily="18" charset="0"/>
                               </a:rPr>
-                              <m:t>𝑛</m:t>
+                              <m:t>𝑘</m:t>
                             </m:r>
                           </m:den>
                         </m:f>
@@ -15255,7 +14709,7 @@
             </p:txBody>
           </p:sp>
         </mc:Choice>
-        <mc:Fallback xmlns="">
+        <mc:Fallback>
           <p:sp>
             <p:nvSpPr>
               <p:cNvPr id="5" name="TextBox 4"/>
@@ -15267,7 +14721,7 @@
             <p:spPr>
               <a:xfrm>
                 <a:off x="427111" y="2290422"/>
-                <a:ext cx="4540469" cy="1291700"/>
+                <a:ext cx="4540469" cy="1267591"/>
               </a:xfrm>
               <a:prstGeom prst="rect">
                 <a:avLst/>
@@ -15275,7 +14729,7 @@
               <a:blipFill>
                 <a:blip r:embed="rId3"/>
                 <a:stretch>
-                  <a:fillRect l="-2235" t="-3922" r="-1117" b="-8824"/>
+                  <a:fillRect l="-2235" t="-4000" r="-1117" b="-9000"/>
                 </a:stretch>
               </a:blipFill>
               <a:ln>
@@ -15342,6 +14796,118 @@
     <p:extLst>
       <p:ext uri="{BB962C8B-B14F-4D97-AF65-F5344CB8AC3E}">
         <p14:creationId xmlns:p14="http://schemas.microsoft.com/office/powerpoint/2010/main" val="3386731527"/>
+      </p:ext>
+    </p:extLst>
+  </p:cSld>
+  <p:clrMapOvr>
+    <a:masterClrMapping/>
+  </p:clrMapOvr>
+</p:sld>
+</file>
+
+<file path=ppt/slides/slide49.xml><?xml version="1.0" encoding="utf-8"?>
+<p:sld xmlns:a="http://schemas.openxmlformats.org/drawingml/2006/main" xmlns:r="http://schemas.openxmlformats.org/officeDocument/2006/relationships" xmlns:p="http://schemas.openxmlformats.org/presentationml/2006/main">
+  <p:cSld>
+    <p:bg>
+      <p:bgPr>
+        <a:solidFill>
+          <a:schemeClr val="bg1">
+            <a:lumMod val="95000"/>
+          </a:schemeClr>
+        </a:solidFill>
+        <a:effectLst/>
+      </p:bgPr>
+    </p:bg>
+    <p:spTree>
+      <p:nvGrpSpPr>
+        <p:cNvPr id="1" name=""/>
+        <p:cNvGrpSpPr/>
+        <p:nvPr/>
+      </p:nvGrpSpPr>
+      <p:grpSpPr>
+        <a:xfrm>
+          <a:off x="0" y="0"/>
+          <a:ext cx="0" cy="0"/>
+          <a:chOff x="0" y="0"/>
+          <a:chExt cx="0" cy="0"/>
+        </a:xfrm>
+      </p:grpSpPr>
+      <p:sp>
+        <p:nvSpPr>
+          <p:cNvPr id="2" name="Title 1">
+            <a:extLst>
+              <a:ext uri="{FF2B5EF4-FFF2-40B4-BE49-F238E27FC236}">
+                <a16:creationId xmlns:a16="http://schemas.microsoft.com/office/drawing/2014/main" id="{5682FF81-947A-094C-9CB0-C5932A27790F}"/>
+              </a:ext>
+            </a:extLst>
+          </p:cNvPr>
+          <p:cNvSpPr>
+            <a:spLocks noGrp="1"/>
+          </p:cNvSpPr>
+          <p:nvPr>
+            <p:ph type="title"/>
+          </p:nvPr>
+        </p:nvSpPr>
+        <p:spPr/>
+        <p:txBody>
+          <a:bodyPr/>
+          <a:lstStyle/>
+          <a:p>
+            <a:r>
+              <a:rPr lang="en-US"/>
+              <a:t>Summary</a:t>
+            </a:r>
+          </a:p>
+        </p:txBody>
+      </p:sp>
+      <p:sp>
+        <p:nvSpPr>
+          <p:cNvPr id="3" name="Content Placeholder 2">
+            <a:extLst>
+              <a:ext uri="{FF2B5EF4-FFF2-40B4-BE49-F238E27FC236}">
+                <a16:creationId xmlns:a16="http://schemas.microsoft.com/office/drawing/2014/main" id="{8DC850C2-156A-C545-976F-A0DB7D3783E7}"/>
+              </a:ext>
+            </a:extLst>
+          </p:cNvPr>
+          <p:cNvSpPr>
+            <a:spLocks noGrp="1"/>
+          </p:cNvSpPr>
+          <p:nvPr>
+            <p:ph idx="1"/>
+          </p:nvPr>
+        </p:nvSpPr>
+        <p:spPr/>
+        <p:txBody>
+          <a:bodyPr/>
+          <a:lstStyle/>
+          <a:p>
+            <a:r>
+              <a:rPr lang="en-US" dirty="0"/>
+              <a:t>The Binomial Theorem</a:t>
+            </a:r>
+          </a:p>
+          <a:p>
+            <a:pPr lvl="1"/>
+            <a:r>
+              <a:rPr lang="en-US" dirty="0"/>
+              <a:t>Binomial expansion </a:t>
+            </a:r>
+          </a:p>
+          <a:p>
+            <a:r>
+              <a:rPr lang="en-US" dirty="0"/>
+              <a:t>Pascal’s Identity and Triangle</a:t>
+            </a:r>
+          </a:p>
+          <a:p>
+            <a:endParaRPr lang="en-US"/>
+          </a:p>
+        </p:txBody>
+      </p:sp>
+    </p:spTree>
+    <p:extLst>
+      <p:ext uri="{BB962C8B-B14F-4D97-AF65-F5344CB8AC3E}">
+        <p14:creationId xmlns:p14="http://schemas.microsoft.com/office/powerpoint/2010/main" val="1182768847"/>
       </p:ext>
     </p:extLst>
   </p:cSld>
@@ -15563,18 +15129,12 @@
       </p:grpSpPr>
       <p:sp>
         <p:nvSpPr>
-          <p:cNvPr id="2" name="Title 1">
-            <a:extLst>
-              <a:ext uri="{FF2B5EF4-FFF2-40B4-BE49-F238E27FC236}">
-                <a16:creationId xmlns:a16="http://schemas.microsoft.com/office/drawing/2014/main" id="{5682FF81-947A-094C-9CB0-C5932A27790F}"/>
-              </a:ext>
-            </a:extLst>
-          </p:cNvPr>
+          <p:cNvPr id="2" name="Title 1"/>
           <p:cNvSpPr>
             <a:spLocks noGrp="1"/>
           </p:cNvSpPr>
           <p:nvPr>
-            <p:ph type="title"/>
+            <p:ph type="ctrTitle"/>
           </p:nvPr>
         </p:nvSpPr>
         <p:spPr/>
@@ -15583,26 +15143,20 @@
           <a:lstStyle/>
           <a:p>
             <a:r>
-              <a:rPr lang="en-US"/>
-              <a:t>Summary</a:t>
+              <a:rPr lang="en-US" dirty="0"/>
+              <a:t>Generalized Permutations and Combinations</a:t>
             </a:r>
           </a:p>
         </p:txBody>
       </p:sp>
       <p:sp>
         <p:nvSpPr>
-          <p:cNvPr id="3" name="Content Placeholder 2">
-            <a:extLst>
-              <a:ext uri="{FF2B5EF4-FFF2-40B4-BE49-F238E27FC236}">
-                <a16:creationId xmlns:a16="http://schemas.microsoft.com/office/drawing/2014/main" id="{8DC850C2-156A-C545-976F-A0DB7D3783E7}"/>
-              </a:ext>
-            </a:extLst>
-          </p:cNvPr>
+          <p:cNvPr id="3" name="Subtitle 2"/>
           <p:cNvSpPr>
             <a:spLocks noGrp="1"/>
           </p:cNvSpPr>
           <p:nvPr>
-            <p:ph idx="1"/>
+            <p:ph type="subTitle" idx="1"/>
           </p:nvPr>
         </p:nvSpPr>
         <p:spPr/>
@@ -15612,31 +15166,21 @@
           <a:p>
             <a:r>
               <a:rPr lang="en-US" dirty="0"/>
-              <a:t>The Binomial Theorem</a:t>
-            </a:r>
-          </a:p>
-          <a:p>
-            <a:pPr lvl="1"/>
-            <a:r>
-              <a:rPr lang="en-US" dirty="0"/>
-              <a:t>Binomial expansion </a:t>
-            </a:r>
-          </a:p>
-          <a:p>
-            <a:r>
-              <a:rPr lang="en-US" dirty="0"/>
-              <a:t>Pascal’s Identity and Triangle</a:t>
-            </a:r>
-          </a:p>
-          <a:p>
-            <a:endParaRPr lang="en-US"/>
+              <a:t>Section </a:t>
+            </a:r>
+            <a:r>
+              <a:rPr lang="en-US" dirty="0">
+                <a:ea typeface="Cambria Math" pitchFamily="18" charset="0"/>
+              </a:rPr>
+              <a:t>6.5</a:t>
+            </a:r>
           </a:p>
         </p:txBody>
       </p:sp>
     </p:spTree>
     <p:extLst>
       <p:ext uri="{BB962C8B-B14F-4D97-AF65-F5344CB8AC3E}">
-        <p14:creationId xmlns:p14="http://schemas.microsoft.com/office/powerpoint/2010/main" val="1182768847"/>
+        <p14:creationId xmlns:p14="http://schemas.microsoft.com/office/powerpoint/2010/main" val="3325512938"/>
       </p:ext>
     </p:extLst>
   </p:cSld>
@@ -15680,7 +15224,7 @@
             <a:spLocks noGrp="1"/>
           </p:cNvSpPr>
           <p:nvPr>
-            <p:ph type="ctrTitle"/>
+            <p:ph type="title"/>
           </p:nvPr>
         </p:nvSpPr>
         <p:spPr/>
@@ -15690,19 +15234,19 @@
           <a:p>
             <a:r>
               <a:rPr lang="en-US" dirty="0"/>
-              <a:t>Generalized Permutations and Combinations</a:t>
+              <a:t>Video 66: Counting with Repetitions</a:t>
             </a:r>
           </a:p>
         </p:txBody>
       </p:sp>
       <p:sp>
         <p:nvSpPr>
-          <p:cNvPr id="3" name="Subtitle 2"/>
+          <p:cNvPr id="3" name="Content Placeholder 2"/>
           <p:cNvSpPr>
             <a:spLocks noGrp="1"/>
           </p:cNvSpPr>
           <p:nvPr>
-            <p:ph type="subTitle" idx="1"/>
+            <p:ph idx="1"/>
           </p:nvPr>
         </p:nvSpPr>
         <p:spPr/>
@@ -15712,13 +15256,19 @@
           <a:p>
             <a:r>
               <a:rPr lang="en-US" dirty="0"/>
-              <a:t>Section </a:t>
-            </a:r>
-            <a:r>
-              <a:rPr lang="en-US" dirty="0">
-                <a:ea typeface="Cambria Math" pitchFamily="18" charset="0"/>
-              </a:rPr>
-              <a:t>6.5</a:t>
+              <a:t>Permutations with Repetition</a:t>
+            </a:r>
+          </a:p>
+          <a:p>
+            <a:r>
+              <a:rPr lang="en-US" dirty="0"/>
+              <a:t>Combinations with Repetition</a:t>
+            </a:r>
+          </a:p>
+          <a:p>
+            <a:r>
+              <a:rPr lang="en-US" dirty="0"/>
+              <a:t>Permutations with Indistinguishable Objects</a:t>
             </a:r>
           </a:p>
         </p:txBody>
@@ -15726,7 +15276,7 @@
     </p:spTree>
     <p:extLst>
       <p:ext uri="{BB962C8B-B14F-4D97-AF65-F5344CB8AC3E}">
-        <p14:creationId xmlns:p14="http://schemas.microsoft.com/office/powerpoint/2010/main" val="3325512938"/>
+        <p14:creationId xmlns:p14="http://schemas.microsoft.com/office/powerpoint/2010/main" val="2820759891"/>
       </p:ext>
     </p:extLst>
   </p:cSld>
@@ -15739,16 +15289,6 @@
 <file path=ppt/slides/slide52.xml><?xml version="1.0" encoding="utf-8"?>
 <p:sld xmlns:a="http://schemas.openxmlformats.org/drawingml/2006/main" xmlns:r="http://schemas.openxmlformats.org/officeDocument/2006/relationships" xmlns:p="http://schemas.openxmlformats.org/presentationml/2006/main">
   <p:cSld>
-    <p:bg>
-      <p:bgPr>
-        <a:solidFill>
-          <a:schemeClr val="bg1">
-            <a:lumMod val="95000"/>
-          </a:schemeClr>
-        </a:solidFill>
-        <a:effectLst/>
-      </p:bgPr>
-    </p:bg>
     <p:spTree>
       <p:nvGrpSpPr>
         <p:cNvPr id="1" name=""/>
@@ -15765,7 +15305,13 @@
       </p:grpSpPr>
       <p:sp>
         <p:nvSpPr>
-          <p:cNvPr id="2" name="Title 1"/>
+          <p:cNvPr id="2" name="Title 1">
+            <a:extLst>
+              <a:ext uri="{FF2B5EF4-FFF2-40B4-BE49-F238E27FC236}">
+                <a16:creationId xmlns:a16="http://schemas.microsoft.com/office/drawing/2014/main" id="{1B0CBD52-ED0F-3545-B5D4-4A6F78497930}"/>
+              </a:ext>
+            </a:extLst>
+          </p:cNvPr>
           <p:cNvSpPr>
             <a:spLocks noGrp="1"/>
           </p:cNvSpPr>
@@ -15780,14 +15326,21 @@
           <a:p>
             <a:r>
               <a:rPr lang="en-US" dirty="0"/>
-              <a:t>Video 66: Counting with Repetitions</a:t>
-            </a:r>
+              <a:t>Permutations with Repetition</a:t>
+            </a:r>
+            <a:endParaRPr lang="en-US"/>
           </a:p>
         </p:txBody>
       </p:sp>
       <p:sp>
         <p:nvSpPr>
-          <p:cNvPr id="3" name="Content Placeholder 2"/>
+          <p:cNvPr id="3" name="Content Placeholder 2">
+            <a:extLst>
+              <a:ext uri="{FF2B5EF4-FFF2-40B4-BE49-F238E27FC236}">
+                <a16:creationId xmlns:a16="http://schemas.microsoft.com/office/drawing/2014/main" id="{EC734AF7-A6D2-2840-895D-F075EE3EDE0B}"/>
+              </a:ext>
+            </a:extLst>
+          </p:cNvPr>
           <p:cNvSpPr>
             <a:spLocks noGrp="1"/>
           </p:cNvSpPr>
@@ -15797,32 +15350,165 @@
         </p:nvSpPr>
         <p:spPr/>
         <p:txBody>
-          <a:bodyPr/>
+          <a:bodyPr>
+            <a:normAutofit lnSpcReduction="10000"/>
+          </a:bodyPr>
           <a:lstStyle/>
           <a:p>
-            <a:r>
-              <a:rPr lang="en-US" dirty="0"/>
-              <a:t>Permutations with Repetition</a:t>
-            </a:r>
-          </a:p>
-          <a:p>
-            <a:r>
-              <a:rPr lang="en-US" dirty="0"/>
-              <a:t>Combinations with Repetition</a:t>
-            </a:r>
-          </a:p>
-          <a:p>
-            <a:r>
-              <a:rPr lang="en-US" dirty="0"/>
-              <a:t>Permutations with Indistinguishable Objects</a:t>
-            </a:r>
+            <a:pPr marL="0" indent="0">
+              <a:buNone/>
+            </a:pPr>
+            <a:r>
+              <a:rPr lang="en-US" b="1" dirty="0"/>
+              <a:t>Definition</a:t>
+            </a:r>
+            <a:r>
+              <a:rPr lang="en-US" dirty="0"/>
+              <a:t>: An </a:t>
+            </a:r>
+            <a:r>
+              <a:rPr lang="en-US" b="1" dirty="0"/>
+              <a:t>r-permutation </a:t>
+            </a:r>
+            <a:r>
+              <a:rPr lang="en-US" dirty="0"/>
+              <a:t>with repetition of a set of distinct objects is an ordered arrangement of r elements from the set, where elements can occur multiple times.</a:t>
+            </a:r>
+          </a:p>
+          <a:p>
+            <a:endParaRPr lang="en-US" dirty="0"/>
+          </a:p>
+          <a:p>
+            <a:pPr>
+              <a:buNone/>
+            </a:pPr>
+            <a:r>
+              <a:rPr lang="en-US" b="1" dirty="0"/>
+              <a:t>Theorem </a:t>
+            </a:r>
+            <a:r>
+              <a:rPr lang="en-US" b="1" dirty="0">
+                <a:ea typeface="Cambria Math" pitchFamily="18" charset="0"/>
+              </a:rPr>
+              <a:t>3</a:t>
+            </a:r>
+            <a:r>
+              <a:rPr lang="en-US" dirty="0"/>
+              <a:t>: The number of </a:t>
+            </a:r>
+            <a:r>
+              <a:rPr lang="en-US" i="1" dirty="0"/>
+              <a:t>r</a:t>
+            </a:r>
+            <a:r>
+              <a:rPr lang="en-US" dirty="0"/>
+              <a:t>-permutations of a set of </a:t>
+            </a:r>
+            <a:r>
+              <a:rPr lang="en-US" i="1" dirty="0"/>
+              <a:t>n</a:t>
+            </a:r>
+            <a:r>
+              <a:rPr lang="en-US" dirty="0"/>
+              <a:t> objects with repetition allowed is </a:t>
+            </a:r>
+            <a:r>
+              <a:rPr lang="en-US" i="1" dirty="0"/>
+              <a:t>n</a:t>
+            </a:r>
+            <a:r>
+              <a:rPr lang="en-US" i="1" baseline="30000" dirty="0"/>
+              <a:t>r</a:t>
+            </a:r>
+            <a:r>
+              <a:rPr lang="en-US" dirty="0"/>
+              <a:t>.</a:t>
+            </a:r>
+          </a:p>
+          <a:p>
+            <a:pPr>
+              <a:buNone/>
+            </a:pPr>
+            <a:r>
+              <a:rPr lang="en-US" b="1" dirty="0"/>
+              <a:t>Proof</a:t>
+            </a:r>
+            <a:r>
+              <a:rPr lang="en-US" dirty="0"/>
+              <a:t>: There are </a:t>
+            </a:r>
+            <a:r>
+              <a:rPr lang="en-US" i="1" dirty="0"/>
+              <a:t>n</a:t>
+            </a:r>
+            <a:r>
+              <a:rPr lang="en-US" dirty="0"/>
+              <a:t> ways to select an element of the set for each of the </a:t>
+            </a:r>
+            <a:r>
+              <a:rPr lang="en-US" i="1" dirty="0"/>
+              <a:t>r</a:t>
+            </a:r>
+            <a:r>
+              <a:rPr lang="en-US" dirty="0"/>
+              <a:t> positions in the </a:t>
+            </a:r>
+            <a:r>
+              <a:rPr lang="en-US" i="1" dirty="0"/>
+              <a:t>r</a:t>
+            </a:r>
+            <a:r>
+              <a:rPr lang="en-US" dirty="0"/>
+              <a:t>-permutation when repetition is allowed. </a:t>
+            </a:r>
+          </a:p>
+          <a:p>
+            <a:pPr>
+              <a:buNone/>
+            </a:pPr>
+            <a:r>
+              <a:rPr lang="en-US" dirty="0"/>
+              <a:t>Hence, by the product rule there are </a:t>
+            </a:r>
+            <a:r>
+              <a:rPr lang="en-US" i="1" dirty="0"/>
+              <a:t>n</a:t>
+            </a:r>
+            <a:r>
+              <a:rPr lang="en-US" i="1" baseline="30000" dirty="0"/>
+              <a:t>r</a:t>
+            </a:r>
+            <a:r>
+              <a:rPr lang="en-US" dirty="0"/>
+              <a:t> </a:t>
+            </a:r>
+            <a:r>
+              <a:rPr lang="en-US" i="1" dirty="0"/>
+              <a:t>r</a:t>
+            </a:r>
+            <a:r>
+              <a:rPr lang="en-US" dirty="0"/>
+              <a:t>-permutations with repetition. </a:t>
+            </a:r>
+          </a:p>
+          <a:p>
+            <a:pPr>
+              <a:buNone/>
+            </a:pPr>
+            <a:r>
+              <a:rPr lang="en-US" dirty="0"/>
+              <a:t>											◀︎ </a:t>
+            </a:r>
+          </a:p>
+          <a:p>
+            <a:endParaRPr lang="en-US"/>
           </a:p>
         </p:txBody>
       </p:sp>
     </p:spTree>
     <p:extLst>
       <p:ext uri="{BB962C8B-B14F-4D97-AF65-F5344CB8AC3E}">
-        <p14:creationId xmlns:p14="http://schemas.microsoft.com/office/powerpoint/2010/main" val="2820759891"/>
+        <p14:creationId xmlns:p14="http://schemas.microsoft.com/office/powerpoint/2010/main" val="3392149951"/>
       </p:ext>
     </p:extLst>
   </p:cSld>
@@ -15851,238 +15537,6 @@
       </p:grpSpPr>
       <p:sp>
         <p:nvSpPr>
-          <p:cNvPr id="2" name="Title 1">
-            <a:extLst>
-              <a:ext uri="{FF2B5EF4-FFF2-40B4-BE49-F238E27FC236}">
-                <a16:creationId xmlns:a16="http://schemas.microsoft.com/office/drawing/2014/main" id="{1B0CBD52-ED0F-3545-B5D4-4A6F78497930}"/>
-              </a:ext>
-            </a:extLst>
-          </p:cNvPr>
-          <p:cNvSpPr>
-            <a:spLocks noGrp="1"/>
-          </p:cNvSpPr>
-          <p:nvPr>
-            <p:ph type="title"/>
-          </p:nvPr>
-        </p:nvSpPr>
-        <p:spPr/>
-        <p:txBody>
-          <a:bodyPr/>
-          <a:lstStyle/>
-          <a:p>
-            <a:r>
-              <a:rPr lang="en-US" dirty="0"/>
-              <a:t>Permutations with Repetition</a:t>
-            </a:r>
-            <a:endParaRPr lang="en-US"/>
-          </a:p>
-        </p:txBody>
-      </p:sp>
-      <p:sp>
-        <p:nvSpPr>
-          <p:cNvPr id="3" name="Content Placeholder 2">
-            <a:extLst>
-              <a:ext uri="{FF2B5EF4-FFF2-40B4-BE49-F238E27FC236}">
-                <a16:creationId xmlns:a16="http://schemas.microsoft.com/office/drawing/2014/main" id="{EC734AF7-A6D2-2840-895D-F075EE3EDE0B}"/>
-              </a:ext>
-            </a:extLst>
-          </p:cNvPr>
-          <p:cNvSpPr>
-            <a:spLocks noGrp="1"/>
-          </p:cNvSpPr>
-          <p:nvPr>
-            <p:ph idx="1"/>
-          </p:nvPr>
-        </p:nvSpPr>
-        <p:spPr/>
-        <p:txBody>
-          <a:bodyPr>
-            <a:normAutofit lnSpcReduction="10000"/>
-          </a:bodyPr>
-          <a:lstStyle/>
-          <a:p>
-            <a:pPr marL="0" indent="0">
-              <a:buNone/>
-            </a:pPr>
-            <a:r>
-              <a:rPr lang="en-US" b="1" dirty="0"/>
-              <a:t>Definition</a:t>
-            </a:r>
-            <a:r>
-              <a:rPr lang="en-US" dirty="0"/>
-              <a:t>: An </a:t>
-            </a:r>
-            <a:r>
-              <a:rPr lang="en-US" b="1" dirty="0"/>
-              <a:t>r-permutation </a:t>
-            </a:r>
-            <a:r>
-              <a:rPr lang="en-US" dirty="0"/>
-              <a:t>with repetition of a set of distinct objects is an ordered arrangement of r elements from the set, where elements can occur multiple times.</a:t>
-            </a:r>
-          </a:p>
-          <a:p>
-            <a:endParaRPr lang="en-US" dirty="0"/>
-          </a:p>
-          <a:p>
-            <a:pPr>
-              <a:buNone/>
-            </a:pPr>
-            <a:r>
-              <a:rPr lang="en-US" b="1" dirty="0"/>
-              <a:t>Theorem </a:t>
-            </a:r>
-            <a:r>
-              <a:rPr lang="en-US" b="1" dirty="0">
-                <a:ea typeface="Cambria Math" pitchFamily="18" charset="0"/>
-              </a:rPr>
-              <a:t>3</a:t>
-            </a:r>
-            <a:r>
-              <a:rPr lang="en-US" dirty="0"/>
-              <a:t>: The number of </a:t>
-            </a:r>
-            <a:r>
-              <a:rPr lang="en-US" i="1" dirty="0"/>
-              <a:t>r</a:t>
-            </a:r>
-            <a:r>
-              <a:rPr lang="en-US" dirty="0"/>
-              <a:t>-permutations of a set of </a:t>
-            </a:r>
-            <a:r>
-              <a:rPr lang="en-US" i="1" dirty="0"/>
-              <a:t>n</a:t>
-            </a:r>
-            <a:r>
-              <a:rPr lang="en-US" dirty="0"/>
-              <a:t> objects with repetition allowed is </a:t>
-            </a:r>
-            <a:r>
-              <a:rPr lang="en-US" i="1" dirty="0"/>
-              <a:t>n</a:t>
-            </a:r>
-            <a:r>
-              <a:rPr lang="en-US" i="1" baseline="30000" dirty="0"/>
-              <a:t>r</a:t>
-            </a:r>
-            <a:r>
-              <a:rPr lang="en-US" dirty="0"/>
-              <a:t>.</a:t>
-            </a:r>
-          </a:p>
-          <a:p>
-            <a:pPr>
-              <a:buNone/>
-            </a:pPr>
-            <a:r>
-              <a:rPr lang="en-US" b="1" dirty="0"/>
-              <a:t>Proof</a:t>
-            </a:r>
-            <a:r>
-              <a:rPr lang="en-US" dirty="0"/>
-              <a:t>: There are </a:t>
-            </a:r>
-            <a:r>
-              <a:rPr lang="en-US" i="1" dirty="0"/>
-              <a:t>n</a:t>
-            </a:r>
-            <a:r>
-              <a:rPr lang="en-US" dirty="0"/>
-              <a:t> ways to select an element of the set for each of the </a:t>
-            </a:r>
-            <a:r>
-              <a:rPr lang="en-US" i="1" dirty="0"/>
-              <a:t>r</a:t>
-            </a:r>
-            <a:r>
-              <a:rPr lang="en-US" dirty="0"/>
-              <a:t> positions in the </a:t>
-            </a:r>
-            <a:r>
-              <a:rPr lang="en-US" i="1" dirty="0"/>
-              <a:t>r</a:t>
-            </a:r>
-            <a:r>
-              <a:rPr lang="en-US" dirty="0"/>
-              <a:t>-permutation when repetition is allowed. </a:t>
-            </a:r>
-          </a:p>
-          <a:p>
-            <a:pPr>
-              <a:buNone/>
-            </a:pPr>
-            <a:r>
-              <a:rPr lang="en-US" dirty="0"/>
-              <a:t>Hence, by the product rule there are </a:t>
-            </a:r>
-            <a:r>
-              <a:rPr lang="en-US" i="1" dirty="0"/>
-              <a:t>n</a:t>
-            </a:r>
-            <a:r>
-              <a:rPr lang="en-US" i="1" baseline="30000" dirty="0"/>
-              <a:t>r</a:t>
-            </a:r>
-            <a:r>
-              <a:rPr lang="en-US" dirty="0"/>
-              <a:t> </a:t>
-            </a:r>
-            <a:r>
-              <a:rPr lang="en-US" i="1" dirty="0"/>
-              <a:t>r</a:t>
-            </a:r>
-            <a:r>
-              <a:rPr lang="en-US" dirty="0"/>
-              <a:t>-permutations with repetition. </a:t>
-            </a:r>
-          </a:p>
-          <a:p>
-            <a:pPr>
-              <a:buNone/>
-            </a:pPr>
-            <a:r>
-              <a:rPr lang="en-US" dirty="0"/>
-              <a:t>											◀︎ </a:t>
-            </a:r>
-          </a:p>
-          <a:p>
-            <a:endParaRPr lang="en-US"/>
-          </a:p>
-        </p:txBody>
-      </p:sp>
-    </p:spTree>
-    <p:extLst>
-      <p:ext uri="{BB962C8B-B14F-4D97-AF65-F5344CB8AC3E}">
-        <p14:creationId xmlns:p14="http://schemas.microsoft.com/office/powerpoint/2010/main" val="3392149951"/>
-      </p:ext>
-    </p:extLst>
-  </p:cSld>
-  <p:clrMapOvr>
-    <a:masterClrMapping/>
-  </p:clrMapOvr>
-</p:sld>
-</file>
-
-<file path=ppt/slides/slide54.xml><?xml version="1.0" encoding="utf-8"?>
-<p:sld xmlns:a="http://schemas.openxmlformats.org/drawingml/2006/main" xmlns:r="http://schemas.openxmlformats.org/officeDocument/2006/relationships" xmlns:p="http://schemas.openxmlformats.org/presentationml/2006/main">
-  <p:cSld>
-    <p:spTree>
-      <p:nvGrpSpPr>
-        <p:cNvPr id="1" name=""/>
-        <p:cNvGrpSpPr/>
-        <p:nvPr/>
-      </p:nvGrpSpPr>
-      <p:grpSpPr>
-        <a:xfrm>
-          <a:off x="0" y="0"/>
-          <a:ext cx="0" cy="0"/>
-          <a:chOff x="0" y="0"/>
-          <a:chExt cx="0" cy="0"/>
-        </a:xfrm>
-      </p:grpSpPr>
-      <p:sp>
-        <p:nvSpPr>
           <p:cNvPr id="2" name="Title 1"/>
           <p:cNvSpPr>
             <a:spLocks noGrp="1"/>
@@ -16193,7 +15647,7 @@
 </p:sld>
 </file>
 
-<file path=ppt/slides/slide55.xml><?xml version="1.0" encoding="utf-8"?>
+<file path=ppt/slides/slide54.xml><?xml version="1.0" encoding="utf-8"?>
 <p:sld xmlns:a="http://schemas.openxmlformats.org/drawingml/2006/main" xmlns:r="http://schemas.openxmlformats.org/officeDocument/2006/relationships" xmlns:p="http://schemas.openxmlformats.org/presentationml/2006/main">
   <p:cSld>
     <p:spTree>
@@ -16357,7 +15811,7 @@
 </p:sld>
 </file>
 
-<file path=ppt/slides/slide56.xml><?xml version="1.0" encoding="utf-8"?>
+<file path=ppt/slides/slide55.xml><?xml version="1.0" encoding="utf-8"?>
 <p:sld xmlns:a="http://schemas.openxmlformats.org/drawingml/2006/main" xmlns:r="http://schemas.openxmlformats.org/officeDocument/2006/relationships" xmlns:p="http://schemas.openxmlformats.org/presentationml/2006/main">
   <p:cSld>
     <p:spTree>
@@ -16640,6 +16094,351 @@
 </p:sld>
 </file>
 
+<file path=ppt/slides/slide56.xml><?xml version="1.0" encoding="utf-8"?>
+<p:sld xmlns:a="http://schemas.openxmlformats.org/drawingml/2006/main" xmlns:r="http://schemas.openxmlformats.org/officeDocument/2006/relationships" xmlns:p="http://schemas.openxmlformats.org/presentationml/2006/main">
+  <p:cSld>
+    <p:spTree>
+      <p:nvGrpSpPr>
+        <p:cNvPr id="1" name=""/>
+        <p:cNvGrpSpPr/>
+        <p:nvPr/>
+      </p:nvGrpSpPr>
+      <p:grpSpPr>
+        <a:xfrm>
+          <a:off x="0" y="0"/>
+          <a:ext cx="0" cy="0"/>
+          <a:chOff x="0" y="0"/>
+          <a:chExt cx="0" cy="0"/>
+        </a:xfrm>
+      </p:grpSpPr>
+      <p:sp>
+        <p:nvSpPr>
+          <p:cNvPr id="2" name="Title 1"/>
+          <p:cNvSpPr>
+            <a:spLocks noGrp="1"/>
+          </p:cNvSpPr>
+          <p:nvPr>
+            <p:ph type="title"/>
+          </p:nvPr>
+        </p:nvSpPr>
+        <p:spPr/>
+        <p:txBody>
+          <a:bodyPr/>
+          <a:lstStyle/>
+          <a:p>
+            <a:r>
+              <a:rPr lang="en-US" dirty="0"/>
+              <a:t>Combinations with Repetition</a:t>
+            </a:r>
+          </a:p>
+        </p:txBody>
+      </p:sp>
+      <p:sp>
+        <p:nvSpPr>
+          <p:cNvPr id="3" name="Content Placeholder 2"/>
+          <p:cNvSpPr>
+            <a:spLocks noGrp="1"/>
+          </p:cNvSpPr>
+          <p:nvPr>
+            <p:ph idx="1"/>
+          </p:nvPr>
+        </p:nvSpPr>
+        <p:spPr/>
+        <p:txBody>
+          <a:bodyPr>
+            <a:normAutofit fontScale="85000" lnSpcReduction="20000"/>
+          </a:bodyPr>
+          <a:lstStyle/>
+          <a:p>
+            <a:pPr>
+              <a:buNone/>
+            </a:pPr>
+            <a:r>
+              <a:rPr lang="en-US" b="1" dirty="0"/>
+              <a:t>Theorem 4</a:t>
+            </a:r>
+            <a:r>
+              <a:rPr lang="en-US" dirty="0"/>
+              <a:t>: The number of </a:t>
+            </a:r>
+            <a:r>
+              <a:rPr lang="en-US" i="1" dirty="0"/>
+              <a:t>r</a:t>
+            </a:r>
+            <a:r>
+              <a:rPr lang="en-US" dirty="0"/>
+              <a:t>-combinations from a set with </a:t>
+            </a:r>
+            <a:r>
+              <a:rPr lang="en-US" i="1" dirty="0"/>
+              <a:t>n</a:t>
+            </a:r>
+            <a:r>
+              <a:rPr lang="en-US" dirty="0"/>
+              <a:t> elements when repetition of elements is allowed is</a:t>
+            </a:r>
+          </a:p>
+          <a:p>
+            <a:pPr>
+              <a:buNone/>
+            </a:pPr>
+            <a:r>
+              <a:rPr lang="en-US" dirty="0"/>
+              <a:t>                       </a:t>
+            </a:r>
+            <a:r>
+              <a:rPr lang="en-US" i="1" dirty="0"/>
+              <a:t>C</a:t>
+            </a:r>
+            <a:r>
+              <a:rPr lang="en-US" dirty="0"/>
+              <a:t>(</a:t>
+            </a:r>
+            <a:r>
+              <a:rPr lang="en-US" i="1" dirty="0"/>
+              <a:t>n + r – </a:t>
+            </a:r>
+            <a:r>
+              <a:rPr lang="en-US" dirty="0"/>
+              <a:t>1</a:t>
+            </a:r>
+            <a:r>
+              <a:rPr lang="en-US" i="1" dirty="0"/>
+              <a:t>, r</a:t>
+            </a:r>
+            <a:r>
+              <a:rPr lang="en-US" dirty="0"/>
+              <a:t>)</a:t>
+            </a:r>
+            <a:r>
+              <a:rPr lang="en-US" i="1" dirty="0"/>
+              <a:t> = C</a:t>
+            </a:r>
+            <a:r>
+              <a:rPr lang="en-US" dirty="0"/>
+              <a:t>(</a:t>
+            </a:r>
+            <a:r>
+              <a:rPr lang="en-US" i="1" dirty="0"/>
+              <a:t>n + r – </a:t>
+            </a:r>
+            <a:r>
+              <a:rPr lang="en-US" dirty="0"/>
+              <a:t>1</a:t>
+            </a:r>
+            <a:r>
+              <a:rPr lang="en-US" i="1" dirty="0"/>
+              <a:t>, n –</a:t>
+            </a:r>
+            <a:r>
+              <a:rPr lang="en-US" dirty="0"/>
+              <a:t>1).</a:t>
+            </a:r>
+          </a:p>
+          <a:p>
+            <a:pPr>
+              <a:buNone/>
+            </a:pPr>
+            <a:r>
+              <a:rPr lang="en-US" b="1" dirty="0"/>
+              <a:t>Proof</a:t>
+            </a:r>
+            <a:r>
+              <a:rPr lang="en-US" dirty="0"/>
+              <a:t>: </a:t>
+            </a:r>
+          </a:p>
+          <a:p>
+            <a:pPr>
+              <a:buNone/>
+            </a:pPr>
+            <a:r>
+              <a:rPr lang="en-US" dirty="0"/>
+              <a:t>Each </a:t>
+            </a:r>
+            <a:r>
+              <a:rPr lang="en-US" i="1" dirty="0"/>
+              <a:t>r</a:t>
+            </a:r>
+            <a:r>
+              <a:rPr lang="en-US" dirty="0"/>
+              <a:t>-combination of a set with </a:t>
+            </a:r>
+            <a:r>
+              <a:rPr lang="en-US" i="1" dirty="0"/>
+              <a:t>n</a:t>
+            </a:r>
+            <a:r>
+              <a:rPr lang="en-US" dirty="0"/>
+              <a:t> elements with repetition allowed can be represented by a list of </a:t>
+            </a:r>
+            <a:r>
+              <a:rPr lang="en-US" i="1" dirty="0"/>
+              <a:t>n –</a:t>
+            </a:r>
+            <a:r>
+              <a:rPr lang="en-US" dirty="0"/>
+              <a:t>1 bars and </a:t>
+            </a:r>
+            <a:r>
+              <a:rPr lang="en-US" i="1" dirty="0"/>
+              <a:t>r</a:t>
+            </a:r>
+            <a:r>
+              <a:rPr lang="en-US" dirty="0"/>
+              <a:t> stars. </a:t>
+            </a:r>
+          </a:p>
+          <a:p>
+            <a:pPr>
+              <a:buNone/>
+            </a:pPr>
+            <a:r>
+              <a:rPr lang="en-US" dirty="0"/>
+              <a:t>The bars mark the </a:t>
+            </a:r>
+            <a:r>
+              <a:rPr lang="en-US" i="1" dirty="0"/>
+              <a:t>n</a:t>
+            </a:r>
+            <a:r>
+              <a:rPr lang="en-US" dirty="0"/>
+              <a:t> cells containing a star for each time the </a:t>
+            </a:r>
+            <a:r>
+              <a:rPr lang="en-US" i="1" dirty="0" err="1"/>
+              <a:t>i</a:t>
+            </a:r>
+            <a:r>
+              <a:rPr lang="en-US" baseline="30000" dirty="0" err="1"/>
+              <a:t>th</a:t>
+            </a:r>
+            <a:r>
+              <a:rPr lang="en-US" dirty="0"/>
+              <a:t> element of the set occurs in the combination.</a:t>
+            </a:r>
+          </a:p>
+          <a:p>
+            <a:pPr>
+              <a:buNone/>
+            </a:pPr>
+            <a:r>
+              <a:rPr lang="en-US" dirty="0"/>
+              <a:t>The number of such lists is </a:t>
+            </a:r>
+            <a:r>
+              <a:rPr lang="en-US" i="1" dirty="0"/>
+              <a:t>C</a:t>
+            </a:r>
+            <a:r>
+              <a:rPr lang="en-US" dirty="0"/>
+              <a:t>(</a:t>
+            </a:r>
+            <a:r>
+              <a:rPr lang="en-US" i="1" dirty="0"/>
+              <a:t>n + r – </a:t>
+            </a:r>
+            <a:r>
+              <a:rPr lang="en-US" dirty="0"/>
+              <a:t>1</a:t>
+            </a:r>
+            <a:r>
+              <a:rPr lang="en-US" i="1" dirty="0"/>
+              <a:t>, r</a:t>
+            </a:r>
+            <a:r>
+              <a:rPr lang="en-US" dirty="0"/>
+              <a:t>)</a:t>
+            </a:r>
+            <a:r>
+              <a:rPr lang="en-US" i="1" dirty="0"/>
+              <a:t>: </a:t>
+            </a:r>
+            <a:r>
+              <a:rPr lang="en-US" dirty="0"/>
+              <a:t>each list is a choice of the </a:t>
+            </a:r>
+            <a:r>
+              <a:rPr lang="en-US" i="1" dirty="0"/>
+              <a:t>r</a:t>
+            </a:r>
+            <a:r>
+              <a:rPr lang="en-US" dirty="0"/>
+              <a:t> positions to place the stars, from the total of </a:t>
+            </a:r>
+            <a:r>
+              <a:rPr lang="en-US" i="1" dirty="0"/>
+              <a:t>n + r – </a:t>
+            </a:r>
+            <a:r>
+              <a:rPr lang="en-US" dirty="0"/>
+              <a:t>1</a:t>
+            </a:r>
+            <a:r>
+              <a:rPr lang="en-US" i="1" dirty="0"/>
+              <a:t> </a:t>
+            </a:r>
+            <a:r>
+              <a:rPr lang="en-US" dirty="0"/>
+              <a:t>positions to place the stars and the bars. </a:t>
+            </a:r>
+          </a:p>
+          <a:p>
+            <a:pPr>
+              <a:buNone/>
+            </a:pPr>
+            <a:r>
+              <a:rPr lang="en-US" dirty="0"/>
+              <a:t>This is also equal to </a:t>
+            </a:r>
+            <a:r>
+              <a:rPr lang="en-US" i="1" dirty="0"/>
+              <a:t>C</a:t>
+            </a:r>
+            <a:r>
+              <a:rPr lang="en-US" dirty="0"/>
+              <a:t>(</a:t>
+            </a:r>
+            <a:r>
+              <a:rPr lang="en-US" i="1" dirty="0"/>
+              <a:t>n + r – </a:t>
+            </a:r>
+            <a:r>
+              <a:rPr lang="en-US" dirty="0"/>
+              <a:t>1</a:t>
+            </a:r>
+            <a:r>
+              <a:rPr lang="en-US" i="1" dirty="0"/>
+              <a:t>, n –</a:t>
+            </a:r>
+            <a:r>
+              <a:rPr lang="en-US" dirty="0"/>
+              <a:t>1), which is the number of ways to place the</a:t>
+            </a:r>
+            <a:r>
+              <a:rPr lang="en-US" i="1" dirty="0"/>
+              <a:t> n –</a:t>
+            </a:r>
+            <a:r>
+              <a:rPr lang="en-US" dirty="0"/>
+              <a:t>1 bars. 											◀︎ </a:t>
+            </a:r>
+          </a:p>
+        </p:txBody>
+      </p:sp>
+    </p:spTree>
+    <p:extLst>
+      <p:ext uri="{BB962C8B-B14F-4D97-AF65-F5344CB8AC3E}">
+        <p14:creationId xmlns:p14="http://schemas.microsoft.com/office/powerpoint/2010/main" val="127473517"/>
+      </p:ext>
+    </p:extLst>
+  </p:cSld>
+  <p:clrMapOvr>
+    <a:masterClrMapping/>
+  </p:clrMapOvr>
+</p:sld>
+</file>
+
 <file path=ppt/slides/slide57.xml><?xml version="1.0" encoding="utf-8"?>
 <p:sld xmlns:a="http://schemas.openxmlformats.org/drawingml/2006/main" xmlns:r="http://schemas.openxmlformats.org/officeDocument/2006/relationships" xmlns:p="http://schemas.openxmlformats.org/presentationml/2006/main">
   <p:cSld>
@@ -16674,7 +16473,7 @@
           <a:p>
             <a:r>
               <a:rPr lang="en-US" dirty="0"/>
-              <a:t>Combinations with Repetition</a:t>
+              <a:t>Example</a:t>
             </a:r>
           </a:p>
         </p:txBody>
@@ -16692,7 +16491,7 @@
         <p:spPr/>
         <p:txBody>
           <a:bodyPr>
-            <a:normAutofit fontScale="85000" lnSpcReduction="20000"/>
+            <a:normAutofit/>
           </a:bodyPr>
           <a:lstStyle/>
           <a:p>
@@ -16700,28 +16499,8 @@
               <a:buNone/>
             </a:pPr>
             <a:r>
-              <a:rPr lang="en-US" b="1" dirty="0"/>
-              <a:t>Theorem 4</a:t>
-            </a:r>
-            <a:r>
-              <a:rPr lang="en-US" dirty="0"/>
-              <a:t>: The number of </a:t>
-            </a:r>
-            <a:r>
-              <a:rPr lang="en-US" i="1" dirty="0"/>
-              <a:t>r</a:t>
-            </a:r>
-            <a:r>
-              <a:rPr lang="en-US" dirty="0"/>
-              <a:t>-combinations from a set with </a:t>
-            </a:r>
-            <a:r>
-              <a:rPr lang="en-US" i="1" dirty="0"/>
-              <a:t>n</a:t>
-            </a:r>
-            <a:r>
-              <a:rPr lang="en-US" dirty="0"/>
-              <a:t> elements when repetition of elements is allowed is</a:t>
+              <a:rPr lang="en-US" dirty="0"/>
+              <a:t>How many solutions does the equation</a:t>
             </a:r>
           </a:p>
           <a:p>
@@ -16730,55 +16509,106 @@
             </a:pPr>
             <a:r>
               <a:rPr lang="en-US" dirty="0"/>
-              <a:t>                       </a:t>
-            </a:r>
-            <a:r>
-              <a:rPr lang="en-US" i="1" dirty="0"/>
-              <a:t>C</a:t>
-            </a:r>
-            <a:r>
-              <a:rPr lang="en-US" dirty="0"/>
-              <a:t>(</a:t>
-            </a:r>
-            <a:r>
-              <a:rPr lang="en-US" i="1" dirty="0"/>
-              <a:t>n + r – </a:t>
-            </a:r>
-            <a:r>
-              <a:rPr lang="en-US" dirty="0"/>
+              <a:t>         </a:t>
+            </a:r>
+            <a:r>
+              <a:rPr lang="en-US" i="1" dirty="0"/>
+              <a:t>x</a:t>
+            </a:r>
+            <a:r>
+              <a:rPr lang="en-US" baseline="-25000" dirty="0">
+                <a:ea typeface="Cambria Math" pitchFamily="18" charset="0"/>
+              </a:rPr>
               <a:t>1</a:t>
             </a:r>
             <a:r>
-              <a:rPr lang="en-US" i="1" dirty="0"/>
-              <a:t>, r</a:t>
-            </a:r>
-            <a:r>
-              <a:rPr lang="en-US" dirty="0"/>
-              <a:t>)</a:t>
-            </a:r>
-            <a:r>
-              <a:rPr lang="en-US" i="1" dirty="0"/>
-              <a:t> = C</a:t>
-            </a:r>
-            <a:r>
-              <a:rPr lang="en-US" dirty="0"/>
-              <a:t>(</a:t>
-            </a:r>
-            <a:r>
-              <a:rPr lang="en-US" i="1" dirty="0"/>
-              <a:t>n + r – </a:t>
-            </a:r>
-            <a:r>
-              <a:rPr lang="en-US" dirty="0"/>
+              <a:rPr lang="en-US" dirty="0"/>
+              <a:t> + </a:t>
+            </a:r>
+            <a:r>
+              <a:rPr lang="en-US" i="1" dirty="0"/>
+              <a:t>x</a:t>
+            </a:r>
+            <a:r>
+              <a:rPr lang="en-US" baseline="-25000" dirty="0">
+                <a:ea typeface="Cambria Math" pitchFamily="18" charset="0"/>
+              </a:rPr>
+              <a:t>2</a:t>
+            </a:r>
+            <a:r>
+              <a:rPr lang="en-US" dirty="0"/>
+              <a:t> + </a:t>
+            </a:r>
+            <a:r>
+              <a:rPr lang="en-US" i="1" dirty="0"/>
+              <a:t>x</a:t>
+            </a:r>
+            <a:r>
+              <a:rPr lang="en-US" baseline="-25000" dirty="0">
+                <a:ea typeface="Cambria Math" pitchFamily="18" charset="0"/>
+              </a:rPr>
+              <a:t>3</a:t>
+            </a:r>
+            <a:r>
+              <a:rPr lang="en-US" dirty="0"/>
+              <a:t> = </a:t>
+            </a:r>
+            <a:r>
+              <a:rPr lang="en-US" dirty="0">
+                <a:ea typeface="Cambria Math" pitchFamily="18" charset="0"/>
+              </a:rPr>
+              <a:t>11</a:t>
+            </a:r>
+          </a:p>
+          <a:p>
+            <a:pPr>
+              <a:buNone/>
+            </a:pPr>
+            <a:r>
+              <a:rPr lang="en-US" dirty="0"/>
+              <a:t>have, where </a:t>
+            </a:r>
+            <a:r>
+              <a:rPr lang="en-US" i="1" dirty="0"/>
+              <a:t>x</a:t>
+            </a:r>
+            <a:r>
+              <a:rPr lang="en-US" baseline="-25000" dirty="0">
+                <a:ea typeface="Cambria Math" pitchFamily="18" charset="0"/>
+              </a:rPr>
               <a:t>1</a:t>
             </a:r>
             <a:r>
-              <a:rPr lang="en-US" i="1" dirty="0"/>
-              <a:t>, n –</a:t>
-            </a:r>
-            <a:r>
-              <a:rPr lang="en-US" dirty="0"/>
-              <a:t>1).</a:t>
+              <a:rPr lang="en-US" dirty="0"/>
+              <a:t> , </a:t>
+            </a:r>
+            <a:r>
+              <a:rPr lang="en-US" i="1" dirty="0"/>
+              <a:t>x</a:t>
+            </a:r>
+            <a:r>
+              <a:rPr lang="en-US" baseline="-25000" dirty="0">
+                <a:ea typeface="Cambria Math" pitchFamily="18" charset="0"/>
+              </a:rPr>
+              <a:t>2</a:t>
+            </a:r>
+            <a:r>
+              <a:rPr lang="en-US" dirty="0"/>
+              <a:t> and</a:t>
+            </a:r>
+            <a:r>
+              <a:rPr lang="en-US" i="1" dirty="0"/>
+              <a:t> x</a:t>
+            </a:r>
+            <a:r>
+              <a:rPr lang="en-US" baseline="-25000" dirty="0">
+                <a:ea typeface="Cambria Math" pitchFamily="18" charset="0"/>
+              </a:rPr>
+              <a:t>3</a:t>
+            </a:r>
+            <a:r>
+              <a:rPr lang="en-US" dirty="0"/>
+              <a:t> are nonnegative integers?</a:t>
             </a:r>
           </a:p>
           <a:p>
@@ -16786,12 +16616,60 @@
               <a:buNone/>
             </a:pPr>
             <a:r>
-              <a:rPr lang="en-US" b="1" dirty="0"/>
-              <a:t>Proof</a:t>
-            </a:r>
-            <a:r>
-              <a:rPr lang="en-US" dirty="0"/>
-              <a:t>: </a:t>
+              <a:rPr lang="en-US" dirty="0"/>
+              <a:t>Each solution corresponds to a way to select </a:t>
+            </a:r>
+            <a:r>
+              <a:rPr lang="en-US" dirty="0">
+                <a:ea typeface="Cambria Math" pitchFamily="18" charset="0"/>
+              </a:rPr>
+              <a:t>11</a:t>
+            </a:r>
+            <a:r>
+              <a:rPr lang="en-US" dirty="0"/>
+              <a:t> items from a set with three elements: </a:t>
+            </a:r>
+            <a:r>
+              <a:rPr lang="en-US" i="1" dirty="0"/>
+              <a:t>x</a:t>
+            </a:r>
+            <a:r>
+              <a:rPr lang="en-US" baseline="-25000" dirty="0">
+                <a:ea typeface="Cambria Math" pitchFamily="18" charset="0"/>
+              </a:rPr>
+              <a:t>1</a:t>
+            </a:r>
+            <a:r>
+              <a:rPr lang="en-US" dirty="0"/>
+              <a:t> elements of type one, </a:t>
+            </a:r>
+            <a:r>
+              <a:rPr lang="en-US" i="1" dirty="0"/>
+              <a:t>x</a:t>
+            </a:r>
+            <a:r>
+              <a:rPr lang="en-US" baseline="-25000" dirty="0">
+                <a:ea typeface="Cambria Math" pitchFamily="18" charset="0"/>
+              </a:rPr>
+              <a:t>2</a:t>
+            </a:r>
+            <a:r>
+              <a:rPr lang="en-US" dirty="0"/>
+              <a:t>  of type two, and </a:t>
+            </a:r>
+            <a:r>
+              <a:rPr lang="en-US" i="1" dirty="0"/>
+              <a:t>x</a:t>
+            </a:r>
+            <a:r>
+              <a:rPr lang="en-US" baseline="-25000" dirty="0">
+                <a:ea typeface="Cambria Math" pitchFamily="18" charset="0"/>
+              </a:rPr>
+              <a:t>3</a:t>
+            </a:r>
+            <a:r>
+              <a:rPr lang="en-US" dirty="0"/>
+              <a:t> of type three. </a:t>
             </a:r>
           </a:p>
           <a:p>
@@ -16800,69 +16678,24 @@
             </a:pPr>
             <a:r>
               <a:rPr lang="en-US" dirty="0"/>
-              <a:t>Each </a:t>
-            </a:r>
-            <a:r>
-              <a:rPr lang="en-US" i="1" dirty="0"/>
-              <a:t>r</a:t>
-            </a:r>
-            <a:r>
-              <a:rPr lang="en-US" dirty="0"/>
-              <a:t>-combination of a set with </a:t>
-            </a:r>
-            <a:r>
-              <a:rPr lang="en-US" i="1" dirty="0"/>
-              <a:t>n</a:t>
-            </a:r>
-            <a:r>
-              <a:rPr lang="en-US" dirty="0"/>
-              <a:t> elements with repetition allowed can be represented by a list of </a:t>
-            </a:r>
-            <a:r>
-              <a:rPr lang="en-US" i="1" dirty="0"/>
-              <a:t>n –</a:t>
-            </a:r>
-            <a:r>
-              <a:rPr lang="en-US" dirty="0"/>
-              <a:t>1 bars and </a:t>
-            </a:r>
-            <a:r>
-              <a:rPr lang="en-US" i="1" dirty="0"/>
-              <a:t>r</a:t>
-            </a:r>
-            <a:r>
-              <a:rPr lang="en-US" dirty="0"/>
-              <a:t> stars. </a:t>
+              <a:t>By Theorem </a:t>
+            </a:r>
+            <a:r>
+              <a:rPr lang="en-US" dirty="0">
+                <a:ea typeface="Cambria Math" pitchFamily="18" charset="0"/>
+              </a:rPr>
+              <a:t>4</a:t>
+            </a:r>
+            <a:r>
+              <a:rPr lang="en-US" dirty="0"/>
+              <a:t> it follows that there are </a:t>
             </a:r>
           </a:p>
           <a:p>
             <a:pPr>
               <a:buNone/>
             </a:pPr>
-            <a:r>
-              <a:rPr lang="en-US" dirty="0"/>
-              <a:t>The bars mark the </a:t>
-            </a:r>
-            <a:r>
-              <a:rPr lang="en-US" i="1" dirty="0"/>
-              <a:t>n</a:t>
-            </a:r>
-            <a:r>
-              <a:rPr lang="en-US" dirty="0"/>
-              <a:t> cells containing a star for each time the </a:t>
-            </a:r>
-            <a:r>
-              <a:rPr lang="en-US" i="1" dirty="0" err="1"/>
-              <a:t>i</a:t>
-            </a:r>
-            <a:r>
-              <a:rPr lang="en-US" baseline="30000" dirty="0" err="1"/>
-              <a:t>th</a:t>
-            </a:r>
-            <a:r>
-              <a:rPr lang="en-US" dirty="0"/>
-              <a:t> element of the set occurs in the combination.</a:t>
-            </a:r>
+            <a:endParaRPr lang="en-US" dirty="0"/>
           </a:p>
           <a:p>
             <a:pPr>
@@ -16870,112 +16703,43 @@
             </a:pPr>
             <a:r>
               <a:rPr lang="en-US" dirty="0"/>
-              <a:t>The number of such lists is </a:t>
-            </a:r>
-            <a:r>
-              <a:rPr lang="en-US" i="1" dirty="0"/>
-              <a:t>C</a:t>
-            </a:r>
-            <a:r>
-              <a:rPr lang="en-US" dirty="0"/>
-              <a:t>(</a:t>
-            </a:r>
-            <a:r>
-              <a:rPr lang="en-US" i="1" dirty="0"/>
-              <a:t>n + r – </a:t>
-            </a:r>
-            <a:r>
-              <a:rPr lang="en-US" dirty="0"/>
-              <a:t>1</a:t>
-            </a:r>
-            <a:r>
-              <a:rPr lang="en-US" i="1" dirty="0"/>
-              <a:t>, r</a:t>
-            </a:r>
-            <a:r>
-              <a:rPr lang="en-US" dirty="0"/>
-              <a:t>)</a:t>
-            </a:r>
-            <a:r>
-              <a:rPr lang="en-US" i="1" dirty="0"/>
-              <a:t>: </a:t>
-            </a:r>
-            <a:r>
-              <a:rPr lang="en-US" dirty="0"/>
-              <a:t>each list is a choice of the </a:t>
-            </a:r>
-            <a:r>
-              <a:rPr lang="en-US" i="1" dirty="0"/>
-              <a:t>r</a:t>
-            </a:r>
-            <a:r>
-              <a:rPr lang="en-US" dirty="0"/>
-              <a:t> positions to place the stars, from the total of </a:t>
-            </a:r>
-            <a:r>
-              <a:rPr lang="en-US" i="1" dirty="0"/>
-              <a:t>n + r – </a:t>
-            </a:r>
-            <a:r>
-              <a:rPr lang="en-US" dirty="0"/>
-              <a:t>1</a:t>
-            </a:r>
-            <a:r>
-              <a:rPr lang="en-US" i="1" dirty="0"/>
-              <a:t> </a:t>
-            </a:r>
-            <a:r>
-              <a:rPr lang="en-US" dirty="0"/>
-              <a:t>positions to place the stars and the bars. </a:t>
-            </a:r>
-          </a:p>
-          <a:p>
-            <a:pPr>
-              <a:buNone/>
-            </a:pPr>
-            <a:r>
-              <a:rPr lang="en-US" dirty="0"/>
-              <a:t>This is also equal to </a:t>
-            </a:r>
-            <a:r>
-              <a:rPr lang="en-US" i="1" dirty="0"/>
-              <a:t>C</a:t>
-            </a:r>
-            <a:r>
-              <a:rPr lang="en-US" dirty="0"/>
-              <a:t>(</a:t>
-            </a:r>
-            <a:r>
-              <a:rPr lang="en-US" i="1" dirty="0"/>
-              <a:t>n + r – </a:t>
-            </a:r>
-            <a:r>
-              <a:rPr lang="en-US" dirty="0"/>
-              <a:t>1</a:t>
-            </a:r>
-            <a:r>
-              <a:rPr lang="en-US" i="1" dirty="0"/>
-              <a:t>, n –</a:t>
-            </a:r>
-            <a:r>
-              <a:rPr lang="en-US" dirty="0"/>
-              <a:t>1), which is the number of ways to place the</a:t>
-            </a:r>
-            <a:r>
-              <a:rPr lang="en-US" i="1" dirty="0"/>
-              <a:t> n –</a:t>
-            </a:r>
-            <a:r>
-              <a:rPr lang="en-US" dirty="0"/>
-              <a:t>1 bars. 											◀︎ </a:t>
+              <a:t>    solutions.</a:t>
             </a:r>
           </a:p>
         </p:txBody>
       </p:sp>
+      <p:pic>
+        <p:nvPicPr>
+          <p:cNvPr id="4" name="Picture 3" descr="addin_tmp.png"/>
+          <p:cNvPicPr>
+            <a:picLocks noChangeAspect="1"/>
+          </p:cNvPicPr>
+          <p:nvPr>
+            <p:custDataLst>
+              <p:tags r:id="rId1"/>
+            </p:custDataLst>
+          </p:nvPr>
+        </p:nvPicPr>
+        <p:blipFill>
+          <a:blip r:embed="rId3" cstate="print"/>
+          <a:stretch>
+            <a:fillRect/>
+          </a:stretch>
+        </p:blipFill>
+        <p:spPr>
+          <a:xfrm>
+            <a:off x="1632066" y="5248103"/>
+            <a:ext cx="5894070" cy="306705"/>
+          </a:xfrm>
+          <a:prstGeom prst="rect">
+            <a:avLst/>
+          </a:prstGeom>
+        </p:spPr>
+      </p:pic>
     </p:spTree>
     <p:extLst>
       <p:ext uri="{BB962C8B-B14F-4D97-AF65-F5344CB8AC3E}">
-        <p14:creationId xmlns:p14="http://schemas.microsoft.com/office/powerpoint/2010/main" val="127473517"/>
+        <p14:creationId xmlns:p14="http://schemas.microsoft.com/office/powerpoint/2010/main" val="1717450633"/>
       </p:ext>
     </p:extLst>
   </p:cSld>
@@ -17014,12 +16778,14 @@
         </p:nvSpPr>
         <p:spPr/>
         <p:txBody>
-          <a:bodyPr/>
+          <a:bodyPr>
+            <a:normAutofit/>
+          </a:bodyPr>
           <a:lstStyle/>
           <a:p>
             <a:r>
               <a:rPr lang="en-US" dirty="0"/>
-              <a:t>Example</a:t>
+              <a:t>Permutations with Indistinguishable Objects</a:t>
             </a:r>
           </a:p>
         </p:txBody>
@@ -17034,7 +16800,12 @@
             <p:ph idx="1"/>
           </p:nvPr>
         </p:nvSpPr>
-        <p:spPr/>
+        <p:spPr>
+          <a:xfrm>
+            <a:off x="838200" y="1825625"/>
+            <a:ext cx="11122572" cy="4351338"/>
+          </a:xfrm>
+        </p:spPr>
         <p:txBody>
           <a:bodyPr>
             <a:normAutofit/>
@@ -17045,8 +16816,20 @@
               <a:buNone/>
             </a:pPr>
             <a:r>
-              <a:rPr lang="en-US" dirty="0"/>
-              <a:t>How many solutions does the equation</a:t>
+              <a:rPr lang="en-US" b="1" dirty="0"/>
+              <a:t>Example</a:t>
+            </a:r>
+            <a:r>
+              <a:rPr lang="en-US" dirty="0"/>
+              <a:t>: How many different strings can be made by reordering the letters of the word </a:t>
+            </a:r>
+            <a:r>
+              <a:rPr lang="en-US" i="1" dirty="0"/>
+              <a:t>SUCCESS</a:t>
+            </a:r>
+            <a:r>
+              <a:rPr lang="en-US" dirty="0"/>
+              <a:t>.</a:t>
             </a:r>
           </a:p>
           <a:p>
@@ -17055,55 +16838,154 @@
             </a:pPr>
             <a:r>
               <a:rPr lang="en-US" dirty="0"/>
-              <a:t>         </a:t>
-            </a:r>
-            <a:r>
-              <a:rPr lang="en-US" i="1" dirty="0"/>
-              <a:t>x</a:t>
-            </a:r>
-            <a:r>
-              <a:rPr lang="en-US" baseline="-25000" dirty="0">
+              <a:t>There are seven possible positions for the three Ss, two Cs, one U, and </a:t>
+            </a:r>
+            <a:br>
+              <a:rPr lang="en-US" dirty="0"/>
+            </a:br>
+            <a:r>
+              <a:rPr lang="en-US" dirty="0"/>
+              <a:t>one E. </a:t>
+            </a:r>
+          </a:p>
+          <a:p>
+            <a:pPr lvl="1"/>
+            <a:r>
+              <a:rPr lang="en-US" dirty="0"/>
+              <a:t>The three Ss can be placed in </a:t>
+            </a:r>
+            <a:r>
+              <a:rPr lang="en-US" i="1" dirty="0"/>
+              <a:t>C</a:t>
+            </a:r>
+            <a:r>
+              <a:rPr lang="en-US" dirty="0"/>
+              <a:t>(</a:t>
+            </a:r>
+            <a:r>
+              <a:rPr lang="en-US" dirty="0">
+                <a:ea typeface="Cambria Math" pitchFamily="18" charset="0"/>
+              </a:rPr>
+              <a:t>7</a:t>
+            </a:r>
+            <a:r>
+              <a:rPr lang="en-US" dirty="0"/>
+              <a:t>, </a:t>
+            </a:r>
+            <a:r>
+              <a:rPr lang="en-US" dirty="0">
+                <a:ea typeface="Cambria Math" pitchFamily="18" charset="0"/>
+              </a:rPr>
+              <a:t>3</a:t>
+            </a:r>
+            <a:r>
+              <a:rPr lang="en-US" dirty="0"/>
+              <a:t>) different ways, leaving four positions free.</a:t>
+            </a:r>
+          </a:p>
+          <a:p>
+            <a:pPr lvl="1"/>
+            <a:r>
+              <a:rPr lang="en-US" dirty="0"/>
+              <a:t>Then the two Cs can be placed in </a:t>
+            </a:r>
+            <a:r>
+              <a:rPr lang="en-US" i="1" dirty="0"/>
+              <a:t>C</a:t>
+            </a:r>
+            <a:r>
+              <a:rPr lang="en-US" dirty="0"/>
+              <a:t>(</a:t>
+            </a:r>
+            <a:r>
+              <a:rPr lang="en-US" dirty="0">
+                <a:ea typeface="Cambria Math" pitchFamily="18" charset="0"/>
+              </a:rPr>
+              <a:t>4</a:t>
+            </a:r>
+            <a:r>
+              <a:rPr lang="en-US" dirty="0"/>
+              <a:t>, </a:t>
+            </a:r>
+            <a:r>
+              <a:rPr lang="en-US" dirty="0">
+                <a:ea typeface="Cambria Math" pitchFamily="18" charset="0"/>
+              </a:rPr>
+              <a:t>2</a:t>
+            </a:r>
+            <a:r>
+              <a:rPr lang="en-US" dirty="0"/>
+              <a:t>) different ways, leaving two positions free. </a:t>
+            </a:r>
+          </a:p>
+          <a:p>
+            <a:pPr lvl="1"/>
+            <a:r>
+              <a:rPr lang="en-US" dirty="0"/>
+              <a:t>Then the U can be placed in </a:t>
+            </a:r>
+            <a:r>
+              <a:rPr lang="en-US" i="1" dirty="0"/>
+              <a:t>C</a:t>
+            </a:r>
+            <a:r>
+              <a:rPr lang="en-US" dirty="0"/>
+              <a:t>(</a:t>
+            </a:r>
+            <a:r>
+              <a:rPr lang="en-US" dirty="0">
+                <a:ea typeface="Cambria Math" pitchFamily="18" charset="0"/>
+              </a:rPr>
+              <a:t>2</a:t>
+            </a:r>
+            <a:r>
+              <a:rPr lang="en-US" dirty="0"/>
+              <a:t>, </a:t>
+            </a:r>
+            <a:r>
+              <a:rPr lang="en-US" dirty="0">
                 <a:ea typeface="Cambria Math" pitchFamily="18" charset="0"/>
               </a:rPr>
               <a:t>1</a:t>
             </a:r>
             <a:r>
               <a:rPr lang="en-US" dirty="0"/>
-              <a:t> + </a:t>
-            </a:r>
-            <a:r>
-              <a:rPr lang="en-US" i="1" dirty="0"/>
-              <a:t>x</a:t>
-            </a:r>
-            <a:r>
-              <a:rPr lang="en-US" baseline="-25000" dirty="0">
-                <a:ea typeface="Cambria Math" pitchFamily="18" charset="0"/>
-              </a:rPr>
-              <a:t>2</a:t>
-            </a:r>
-            <a:r>
-              <a:rPr lang="en-US" dirty="0"/>
-              <a:t> + </a:t>
-            </a:r>
-            <a:r>
-              <a:rPr lang="en-US" i="1" dirty="0"/>
-              <a:t>x</a:t>
-            </a:r>
-            <a:r>
-              <a:rPr lang="en-US" baseline="-25000" dirty="0">
-                <a:ea typeface="Cambria Math" pitchFamily="18" charset="0"/>
-              </a:rPr>
-              <a:t>3</a:t>
-            </a:r>
-            <a:r>
-              <a:rPr lang="en-US" dirty="0"/>
-              <a:t> = </a:t>
-            </a:r>
-            <a:r>
-              <a:rPr lang="en-US" dirty="0">
-                <a:ea typeface="Cambria Math" pitchFamily="18" charset="0"/>
-              </a:rPr>
-              <a:t>11</a:t>
+              <a:t>) different ways, leaving one position free. </a:t>
+            </a:r>
+          </a:p>
+          <a:p>
+            <a:pPr lvl="1"/>
+            <a:r>
+              <a:rPr lang="en-US" dirty="0"/>
+              <a:t>Then the E can be placed in </a:t>
+            </a:r>
+            <a:r>
+              <a:rPr lang="en-US" i="1" dirty="0"/>
+              <a:t>C</a:t>
+            </a:r>
+            <a:r>
+              <a:rPr lang="en-US" dirty="0"/>
+              <a:t>(</a:t>
+            </a:r>
+            <a:r>
+              <a:rPr lang="en-US" dirty="0">
+                <a:ea typeface="Cambria Math" pitchFamily="18" charset="0"/>
+              </a:rPr>
+              <a:t>1</a:t>
+            </a:r>
+            <a:r>
+              <a:rPr lang="en-US" dirty="0"/>
+              <a:t>, </a:t>
+            </a:r>
+            <a:r>
+              <a:rPr lang="en-US" dirty="0">
+                <a:ea typeface="Cambria Math" pitchFamily="18" charset="0"/>
+              </a:rPr>
+              <a:t>1</a:t>
+            </a:r>
+            <a:r>
+              <a:rPr lang="en-US" dirty="0"/>
+              <a:t>) ways.</a:t>
             </a:r>
           </a:p>
           <a:p>
@@ -17112,129 +16994,7 @@
             </a:pPr>
             <a:r>
               <a:rPr lang="en-US" dirty="0"/>
-              <a:t>have, where </a:t>
-            </a:r>
-            <a:r>
-              <a:rPr lang="en-US" i="1" dirty="0"/>
-              <a:t>x</a:t>
-            </a:r>
-            <a:r>
-              <a:rPr lang="en-US" baseline="-25000" dirty="0">
-                <a:ea typeface="Cambria Math" pitchFamily="18" charset="0"/>
-              </a:rPr>
-              <a:t>1</a:t>
-            </a:r>
-            <a:r>
-              <a:rPr lang="en-US" dirty="0"/>
-              <a:t> , </a:t>
-            </a:r>
-            <a:r>
-              <a:rPr lang="en-US" i="1" dirty="0"/>
-              <a:t>x</a:t>
-            </a:r>
-            <a:r>
-              <a:rPr lang="en-US" baseline="-25000" dirty="0">
-                <a:ea typeface="Cambria Math" pitchFamily="18" charset="0"/>
-              </a:rPr>
-              <a:t>2</a:t>
-            </a:r>
-            <a:r>
-              <a:rPr lang="en-US" dirty="0"/>
-              <a:t> and</a:t>
-            </a:r>
-            <a:r>
-              <a:rPr lang="en-US" i="1" dirty="0"/>
-              <a:t> x</a:t>
-            </a:r>
-            <a:r>
-              <a:rPr lang="en-US" baseline="-25000" dirty="0">
-                <a:ea typeface="Cambria Math" pitchFamily="18" charset="0"/>
-              </a:rPr>
-              <a:t>3</a:t>
-            </a:r>
-            <a:r>
-              <a:rPr lang="en-US" dirty="0"/>
-              <a:t> are nonnegative integers?</a:t>
-            </a:r>
-          </a:p>
-          <a:p>
-            <a:pPr>
-              <a:buNone/>
-            </a:pPr>
-            <a:r>
-              <a:rPr lang="en-US" dirty="0"/>
-              <a:t>Each solution corresponds to a way to select </a:t>
-            </a:r>
-            <a:r>
-              <a:rPr lang="en-US" dirty="0">
-                <a:ea typeface="Cambria Math" pitchFamily="18" charset="0"/>
-              </a:rPr>
-              <a:t>11</a:t>
-            </a:r>
-            <a:r>
-              <a:rPr lang="en-US" dirty="0"/>
-              <a:t> items from a set with three elements: </a:t>
-            </a:r>
-            <a:r>
-              <a:rPr lang="en-US" i="1" dirty="0"/>
-              <a:t>x</a:t>
-            </a:r>
-            <a:r>
-              <a:rPr lang="en-US" baseline="-25000" dirty="0">
-                <a:ea typeface="Cambria Math" pitchFamily="18" charset="0"/>
-              </a:rPr>
-              <a:t>1</a:t>
-            </a:r>
-            <a:r>
-              <a:rPr lang="en-US" dirty="0"/>
-              <a:t> elements of type one, </a:t>
-            </a:r>
-            <a:r>
-              <a:rPr lang="en-US" i="1" dirty="0"/>
-              <a:t>x</a:t>
-            </a:r>
-            <a:r>
-              <a:rPr lang="en-US" baseline="-25000" dirty="0">
-                <a:ea typeface="Cambria Math" pitchFamily="18" charset="0"/>
-              </a:rPr>
-              <a:t>2</a:t>
-            </a:r>
-            <a:r>
-              <a:rPr lang="en-US" dirty="0"/>
-              <a:t>  of type two, and </a:t>
-            </a:r>
-            <a:r>
-              <a:rPr lang="en-US" i="1" dirty="0"/>
-              <a:t>x</a:t>
-            </a:r>
-            <a:r>
-              <a:rPr lang="en-US" baseline="-25000" dirty="0">
-                <a:ea typeface="Cambria Math" pitchFamily="18" charset="0"/>
-              </a:rPr>
-              <a:t>3</a:t>
-            </a:r>
-            <a:r>
-              <a:rPr lang="en-US" dirty="0"/>
-              <a:t> of type three. </a:t>
-            </a:r>
-          </a:p>
-          <a:p>
-            <a:pPr>
-              <a:buNone/>
-            </a:pPr>
-            <a:r>
-              <a:rPr lang="en-US" dirty="0"/>
-              <a:t>By Theorem </a:t>
-            </a:r>
-            <a:r>
-              <a:rPr lang="en-US" dirty="0">
-                <a:ea typeface="Cambria Math" pitchFamily="18" charset="0"/>
-              </a:rPr>
-              <a:t>4</a:t>
-            </a:r>
-            <a:r>
-              <a:rPr lang="en-US" dirty="0"/>
-              <a:t> it follows that there are </a:t>
+              <a:t>     By the product rule, the number of different strings is:</a:t>
             </a:r>
           </a:p>
           <a:p>
@@ -17242,21 +17002,12 @@
               <a:buNone/>
             </a:pPr>
             <a:endParaRPr lang="en-US" dirty="0"/>
-          </a:p>
-          <a:p>
-            <a:pPr>
-              <a:buNone/>
-            </a:pPr>
-            <a:r>
-              <a:rPr lang="en-US" dirty="0"/>
-              <a:t>    solutions.</a:t>
-            </a:r>
           </a:p>
         </p:txBody>
       </p:sp>
       <p:pic>
         <p:nvPicPr>
-          <p:cNvPr id="4" name="Picture 3" descr="addin_tmp.png"/>
+          <p:cNvPr id="7" name="Picture 6" descr="addin_tmp.png"/>
           <p:cNvPicPr>
             <a:picLocks noChangeAspect="1"/>
           </p:cNvPicPr>
@@ -17274,8 +17025,8 @@
         </p:blipFill>
         <p:spPr>
           <a:xfrm>
-            <a:off x="1632066" y="5248103"/>
-            <a:ext cx="5894070" cy="306705"/>
+            <a:off x="1533843" y="5858828"/>
+            <a:ext cx="10290432" cy="453072"/>
           </a:xfrm>
           <a:prstGeom prst="rect">
             <a:avLst/>
@@ -17285,7 +17036,7 @@
     </p:spTree>
     <p:extLst>
       <p:ext uri="{BB962C8B-B14F-4D97-AF65-F5344CB8AC3E}">
-        <p14:creationId xmlns:p14="http://schemas.microsoft.com/office/powerpoint/2010/main" val="1717450633"/>
+        <p14:creationId xmlns:p14="http://schemas.microsoft.com/office/powerpoint/2010/main" val="1894197044"/>
       </p:ext>
     </p:extLst>
   </p:cSld>
@@ -17346,59 +17097,146 @@
             <p:ph idx="1"/>
           </p:nvPr>
         </p:nvSpPr>
-        <p:spPr>
-          <a:xfrm>
-            <a:off x="838200" y="1825625"/>
-            <a:ext cx="11122572" cy="4351338"/>
-          </a:xfrm>
-        </p:spPr>
+        <p:spPr/>
         <p:txBody>
           <a:bodyPr>
-            <a:normAutofit/>
+            <a:normAutofit fontScale="70000" lnSpcReduction="20000"/>
           </a:bodyPr>
           <a:lstStyle/>
           <a:p>
             <a:pPr>
+              <a:lnSpc>
+                <a:spcPct val="120000"/>
+              </a:lnSpc>
               <a:buNone/>
             </a:pPr>
             <a:r>
               <a:rPr lang="en-US" b="1" dirty="0"/>
-              <a:t>Example</a:t>
-            </a:r>
-            <a:r>
-              <a:rPr lang="en-US" dirty="0"/>
-              <a:t>: How many different strings can be made by reordering the letters of the word </a:t>
-            </a:r>
-            <a:r>
-              <a:rPr lang="en-US" i="1" dirty="0"/>
-              <a:t>SUCCESS</a:t>
-            </a:r>
-            <a:r>
-              <a:rPr lang="en-US" dirty="0"/>
-              <a:t>.</a:t>
-            </a:r>
+              <a:t>Theorem </a:t>
+            </a:r>
+            <a:r>
+              <a:rPr lang="en-US" b="1" dirty="0">
+                <a:ea typeface="Cambria Math" pitchFamily="18" charset="0"/>
+              </a:rPr>
+              <a:t>5</a:t>
+            </a:r>
+            <a:r>
+              <a:rPr lang="en-US" dirty="0"/>
+              <a:t>: The number of different permutations of </a:t>
+            </a:r>
+            <a:r>
+              <a:rPr lang="en-US" i="1" dirty="0"/>
+              <a:t>n</a:t>
+            </a:r>
+            <a:r>
+              <a:rPr lang="en-US" dirty="0"/>
+              <a:t> objects, where there are </a:t>
+            </a:r>
+            <a:r>
+              <a:rPr lang="en-US" i="1" dirty="0"/>
+              <a:t>n</a:t>
+            </a:r>
+            <a:r>
+              <a:rPr lang="en-US" baseline="-25000" dirty="0">
+                <a:ea typeface="Cambria Math" pitchFamily="18" charset="0"/>
+              </a:rPr>
+              <a:t>1</a:t>
+            </a:r>
+            <a:r>
+              <a:rPr lang="en-US" dirty="0"/>
+              <a:t> indistinguishable objects of type </a:t>
+            </a:r>
+            <a:r>
+              <a:rPr lang="en-US" dirty="0">
+                <a:ea typeface="Cambria Math" pitchFamily="18" charset="0"/>
+              </a:rPr>
+              <a:t>1</a:t>
+            </a:r>
+            <a:r>
+              <a:rPr lang="en-US" dirty="0"/>
+              <a:t>, </a:t>
+            </a:r>
+            <a:r>
+              <a:rPr lang="en-US" i="1" dirty="0"/>
+              <a:t>n</a:t>
+            </a:r>
+            <a:r>
+              <a:rPr lang="en-US" baseline="-25000" dirty="0">
+                <a:ea typeface="Cambria Math" pitchFamily="18" charset="0"/>
+              </a:rPr>
+              <a:t>2</a:t>
+            </a:r>
+            <a:r>
+              <a:rPr lang="en-US" dirty="0"/>
+              <a:t> indistinguishable objects of type </a:t>
+            </a:r>
+            <a:r>
+              <a:rPr lang="en-US" dirty="0">
+                <a:ea typeface="Cambria Math" pitchFamily="18" charset="0"/>
+              </a:rPr>
+              <a:t>2</a:t>
+            </a:r>
+            <a:r>
+              <a:rPr lang="en-US" dirty="0"/>
+              <a:t>, …., and </a:t>
+            </a:r>
+            <a:r>
+              <a:rPr lang="en-US" i="1" dirty="0" err="1"/>
+              <a:t>n</a:t>
+            </a:r>
+            <a:r>
+              <a:rPr lang="en-US" i="1" baseline="-25000" dirty="0" err="1"/>
+              <a:t>k</a:t>
+            </a:r>
+            <a:r>
+              <a:rPr lang="en-US" baseline="-25000" dirty="0"/>
+              <a:t> </a:t>
+            </a:r>
+            <a:r>
+              <a:rPr lang="en-US" dirty="0"/>
+              <a:t>indistinguishable objects of type </a:t>
+            </a:r>
+            <a:r>
+              <a:rPr lang="en-US" i="1" dirty="0"/>
+              <a:t>k</a:t>
+            </a:r>
+            <a:r>
+              <a:rPr lang="en-US" dirty="0"/>
+              <a:t>, is:</a:t>
+            </a:r>
+          </a:p>
+          <a:p>
+            <a:endParaRPr lang="en-US" dirty="0"/>
+          </a:p>
+          <a:p>
+            <a:endParaRPr lang="en-US" dirty="0"/>
           </a:p>
           <a:p>
             <a:pPr>
+              <a:lnSpc>
+                <a:spcPct val="120000"/>
+              </a:lnSpc>
               <a:buNone/>
             </a:pPr>
             <a:r>
-              <a:rPr lang="en-US" dirty="0"/>
-              <a:t>There are seven possible positions for the three Ss, two Cs, one U, and </a:t>
-            </a:r>
-            <a:br>
-              <a:rPr lang="en-US" dirty="0"/>
-            </a:br>
-            <a:r>
-              <a:rPr lang="en-US" dirty="0"/>
-              <a:t>one E. </a:t>
-            </a:r>
-          </a:p>
-          <a:p>
-            <a:pPr lvl="1"/>
-            <a:r>
-              <a:rPr lang="en-US" dirty="0"/>
-              <a:t>The three Ss can be placed in </a:t>
+              <a:rPr lang="en-US" b="1" dirty="0"/>
+              <a:t>Proof</a:t>
+            </a:r>
+            <a:r>
+              <a:rPr lang="en-US" dirty="0"/>
+              <a:t>: By the product rule the total number of permutations is: </a:t>
+            </a:r>
+          </a:p>
+          <a:p>
+            <a:pPr>
+              <a:lnSpc>
+                <a:spcPct val="120000"/>
+              </a:lnSpc>
+              <a:buNone/>
+            </a:pPr>
+            <a:r>
+              <a:rPr lang="en-US" dirty="0"/>
+              <a:t>       </a:t>
             </a:r>
             <a:r>
               <a:rPr lang="en-US" i="1" dirty="0"/>
@@ -17409,31 +17247,78 @@
               <a:t>(</a:t>
             </a:r>
             <a:r>
-              <a:rPr lang="en-US" dirty="0">
-                <a:ea typeface="Cambria Math" pitchFamily="18" charset="0"/>
-              </a:rPr>
-              <a:t>7</a:t>
+              <a:rPr lang="en-US" i="1" dirty="0"/>
+              <a:t>n</a:t>
             </a:r>
             <a:r>
               <a:rPr lang="en-US" dirty="0"/>
               <a:t>, </a:t>
             </a:r>
             <a:r>
-              <a:rPr lang="en-US" dirty="0">
-                <a:ea typeface="Cambria Math" pitchFamily="18" charset="0"/>
-              </a:rPr>
-              <a:t>3</a:t>
-            </a:r>
-            <a:r>
-              <a:rPr lang="en-US" dirty="0"/>
-              <a:t>) different ways, leaving four positions free.</a:t>
-            </a:r>
-          </a:p>
-          <a:p>
-            <a:pPr lvl="1"/>
-            <a:r>
-              <a:rPr lang="en-US" dirty="0"/>
-              <a:t>Then the two Cs can be placed in </a:t>
+              <a:rPr lang="en-US" i="1" dirty="0"/>
+              <a:t>n</a:t>
+            </a:r>
+            <a:r>
+              <a:rPr lang="en-US" baseline="-25000" dirty="0">
+                <a:ea typeface="Cambria Math" pitchFamily="18" charset="0"/>
+              </a:rPr>
+              <a:t>1</a:t>
+            </a:r>
+            <a:r>
+              <a:rPr lang="en-US" dirty="0"/>
+              <a:t> )</a:t>
+            </a:r>
+            <a:r>
+              <a:rPr lang="en-US" i="1" dirty="0"/>
+              <a:t> C</a:t>
+            </a:r>
+            <a:r>
+              <a:rPr lang="en-US" dirty="0"/>
+              <a:t>(</a:t>
+            </a:r>
+            <a:r>
+              <a:rPr lang="en-US" i="1" dirty="0"/>
+              <a:t>n</a:t>
+            </a:r>
+            <a:r>
+              <a:rPr lang="en-US" i="1" dirty="0">
+                <a:ea typeface="Cambria Math"/>
+              </a:rPr>
+              <a:t> −</a:t>
+            </a:r>
+            <a:r>
+              <a:rPr lang="en-US" i="1" dirty="0"/>
+              <a:t> n</a:t>
+            </a:r>
+            <a:r>
+              <a:rPr lang="en-US" baseline="-25000" dirty="0">
+                <a:ea typeface="Cambria Math" pitchFamily="18" charset="0"/>
+              </a:rPr>
+              <a:t>1</a:t>
+            </a:r>
+            <a:r>
+              <a:rPr lang="en-US" dirty="0"/>
+              <a:t>, </a:t>
+            </a:r>
+            <a:r>
+              <a:rPr lang="en-US" i="1" dirty="0"/>
+              <a:t>n</a:t>
+            </a:r>
+            <a:r>
+              <a:rPr lang="en-US" baseline="-25000" dirty="0">
+                <a:ea typeface="Cambria Math" pitchFamily="18" charset="0"/>
+              </a:rPr>
+              <a:t>2</a:t>
+            </a:r>
+            <a:r>
+              <a:rPr lang="en-US" dirty="0"/>
+              <a:t> ) </a:t>
+            </a:r>
+            <a:r>
+              <a:rPr lang="en-US" i="1" dirty="0">
+                <a:ea typeface="Cambria Math"/>
+              </a:rPr>
+              <a:t>∙∙∙ </a:t>
             </a:r>
             <a:r>
               <a:rPr lang="en-US" i="1" dirty="0"/>
@@ -17444,31 +17329,351 @@
               <a:t>(</a:t>
             </a:r>
             <a:r>
-              <a:rPr lang="en-US" dirty="0">
-                <a:ea typeface="Cambria Math" pitchFamily="18" charset="0"/>
-              </a:rPr>
-              <a:t>4</a:t>
+              <a:rPr lang="en-US" i="1" dirty="0"/>
+              <a:t>n </a:t>
+            </a:r>
+            <a:r>
+              <a:rPr lang="en-US" i="1" dirty="0">
+                <a:ea typeface="Cambria Math"/>
+              </a:rPr>
+              <a:t>− </a:t>
+            </a:r>
+            <a:r>
+              <a:rPr lang="en-US" i="1" dirty="0"/>
+              <a:t>n</a:t>
+            </a:r>
+            <a:r>
+              <a:rPr lang="en-US" baseline="-25000" dirty="0">
+                <a:ea typeface="Cambria Math" pitchFamily="18" charset="0"/>
+              </a:rPr>
+              <a:t>1</a:t>
+            </a:r>
+            <a:r>
+              <a:rPr lang="en-US" i="1" dirty="0"/>
+              <a:t> </a:t>
+            </a:r>
+            <a:r>
+              <a:rPr lang="en-US" i="1" dirty="0">
+                <a:ea typeface="Cambria Math"/>
+              </a:rPr>
+              <a:t>−</a:t>
+            </a:r>
+            <a:r>
+              <a:rPr lang="en-US" dirty="0"/>
+              <a:t> </a:t>
+            </a:r>
+            <a:r>
+              <a:rPr lang="en-US" i="1" dirty="0"/>
+              <a:t>n</a:t>
+            </a:r>
+            <a:r>
+              <a:rPr lang="en-US" baseline="-25000" dirty="0">
+                <a:ea typeface="Cambria Math" pitchFamily="18" charset="0"/>
+              </a:rPr>
+              <a:t>2</a:t>
+            </a:r>
+            <a:r>
+              <a:rPr lang="en-US" i="1" dirty="0"/>
+              <a:t> </a:t>
+            </a:r>
+            <a:r>
+              <a:rPr lang="en-US" i="1" dirty="0">
+                <a:ea typeface="Cambria Math"/>
+              </a:rPr>
+              <a:t>− ∙∙∙ − </a:t>
+            </a:r>
+            <a:r>
+              <a:rPr lang="en-US" i="1" dirty="0" err="1"/>
+              <a:t>n</a:t>
+            </a:r>
+            <a:r>
+              <a:rPr lang="en-US" i="1" baseline="-25000" dirty="0" err="1"/>
+              <a:t>k</a:t>
             </a:r>
             <a:r>
               <a:rPr lang="en-US" dirty="0"/>
               <a:t>, </a:t>
             </a:r>
             <a:r>
-              <a:rPr lang="en-US" dirty="0">
+              <a:rPr lang="en-US" i="1" dirty="0" err="1"/>
+              <a:t>n</a:t>
+            </a:r>
+            <a:r>
+              <a:rPr lang="en-US" i="1" baseline="-25000" dirty="0" err="1"/>
+              <a:t>k</a:t>
+            </a:r>
+            <a:r>
+              <a:rPr lang="en-US" dirty="0"/>
+              <a:t>)  since</a:t>
+            </a:r>
+          </a:p>
+          <a:p>
+            <a:pPr lvl="1">
+              <a:lnSpc>
+                <a:spcPct val="120000"/>
+              </a:lnSpc>
+            </a:pPr>
+            <a:r>
+              <a:rPr lang="en-US" dirty="0"/>
+              <a:t>The </a:t>
+            </a:r>
+            <a:r>
+              <a:rPr lang="en-US" i="1" dirty="0"/>
+              <a:t>n</a:t>
+            </a:r>
+            <a:r>
+              <a:rPr lang="en-US" baseline="-25000" dirty="0">
+                <a:ea typeface="Cambria Math" pitchFamily="18" charset="0"/>
+              </a:rPr>
+              <a:t>1 </a:t>
+            </a:r>
+            <a:r>
+              <a:rPr lang="en-US" dirty="0"/>
+              <a:t>objects of type one can be placed in the </a:t>
+            </a:r>
+            <a:r>
+              <a:rPr lang="en-US" i="1" dirty="0"/>
+              <a:t>n</a:t>
+            </a:r>
+            <a:r>
+              <a:rPr lang="en-US" dirty="0"/>
+              <a:t> positions in </a:t>
+            </a:r>
+            <a:r>
+              <a:rPr lang="en-US" i="1" dirty="0"/>
+              <a:t>C</a:t>
+            </a:r>
+            <a:r>
+              <a:rPr lang="en-US" dirty="0"/>
+              <a:t>(</a:t>
+            </a:r>
+            <a:r>
+              <a:rPr lang="en-US" i="1" dirty="0"/>
+              <a:t>n</a:t>
+            </a:r>
+            <a:r>
+              <a:rPr lang="en-US" dirty="0"/>
+              <a:t>, </a:t>
+            </a:r>
+            <a:r>
+              <a:rPr lang="en-US" i="1" dirty="0"/>
+              <a:t>n</a:t>
+            </a:r>
+            <a:r>
+              <a:rPr lang="en-US" baseline="-25000" dirty="0">
+                <a:ea typeface="Cambria Math" pitchFamily="18" charset="0"/>
+              </a:rPr>
+              <a:t>1</a:t>
+            </a:r>
+            <a:r>
+              <a:rPr lang="en-US" dirty="0"/>
+              <a:t> ) ways, leaving  </a:t>
+            </a:r>
+            <a:r>
+              <a:rPr lang="en-US" i="1" dirty="0"/>
+              <a:t>n </a:t>
+            </a:r>
+            <a:r>
+              <a:rPr lang="en-US" i="1" dirty="0">
+                <a:ea typeface="Cambria Math"/>
+              </a:rPr>
+              <a:t>− </a:t>
+            </a:r>
+            <a:r>
+              <a:rPr lang="en-US" i="1" dirty="0"/>
+              <a:t>n</a:t>
+            </a:r>
+            <a:r>
+              <a:rPr lang="en-US" baseline="-25000" dirty="0">
+                <a:ea typeface="Cambria Math" pitchFamily="18" charset="0"/>
+              </a:rPr>
+              <a:t>1</a:t>
+            </a:r>
+            <a:r>
+              <a:rPr lang="en-US" dirty="0"/>
+              <a:t> positions. </a:t>
+            </a:r>
+          </a:p>
+          <a:p>
+            <a:pPr lvl="1">
+              <a:lnSpc>
+                <a:spcPct val="120000"/>
+              </a:lnSpc>
+            </a:pPr>
+            <a:r>
+              <a:rPr lang="en-US" dirty="0"/>
+              <a:t>Then the</a:t>
+            </a:r>
+            <a:r>
+              <a:rPr lang="en-US" i="1" dirty="0"/>
+              <a:t> n</a:t>
+            </a:r>
+            <a:r>
+              <a:rPr lang="en-US" baseline="-25000" dirty="0">
+                <a:ea typeface="Cambria Math" pitchFamily="18" charset="0"/>
+              </a:rPr>
+              <a:t>2 </a:t>
+            </a:r>
+            <a:r>
+              <a:rPr lang="en-US" dirty="0"/>
+              <a:t>objects of type two can be placed in the </a:t>
+            </a:r>
+            <a:r>
+              <a:rPr lang="en-US" i="1" dirty="0"/>
+              <a:t>n </a:t>
+            </a:r>
+            <a:r>
+              <a:rPr lang="en-US" i="1" dirty="0">
+                <a:ea typeface="Cambria Math"/>
+              </a:rPr>
+              <a:t>−</a:t>
+            </a:r>
+            <a:r>
+              <a:rPr lang="en-US" dirty="0"/>
+              <a:t> </a:t>
+            </a:r>
+            <a:r>
+              <a:rPr lang="en-US" i="1" dirty="0"/>
+              <a:t>n</a:t>
+            </a:r>
+            <a:r>
+              <a:rPr lang="en-US" baseline="-25000" dirty="0">
+                <a:ea typeface="Cambria Math" pitchFamily="18" charset="0"/>
+              </a:rPr>
+              <a:t>1 </a:t>
+            </a:r>
+            <a:r>
+              <a:rPr lang="en-US" dirty="0"/>
+              <a:t>positions in </a:t>
+            </a:r>
+            <a:r>
+              <a:rPr lang="en-US" i="1" dirty="0"/>
+              <a:t>C</a:t>
+            </a:r>
+            <a:r>
+              <a:rPr lang="en-US" dirty="0"/>
+              <a:t>(</a:t>
+            </a:r>
+            <a:r>
+              <a:rPr lang="en-US" i="1" dirty="0"/>
+              <a:t>n </a:t>
+            </a:r>
+            <a:r>
+              <a:rPr lang="en-US" i="1" dirty="0">
+                <a:ea typeface="Cambria Math"/>
+              </a:rPr>
+              <a:t>− </a:t>
+            </a:r>
+            <a:r>
+              <a:rPr lang="en-US" i="1" dirty="0"/>
+              <a:t>n</a:t>
+            </a:r>
+            <a:r>
+              <a:rPr lang="en-US" baseline="-25000" dirty="0">
+                <a:ea typeface="Cambria Math" pitchFamily="18" charset="0"/>
+              </a:rPr>
+              <a:t>1</a:t>
+            </a:r>
+            <a:r>
+              <a:rPr lang="en-US" dirty="0"/>
+              <a:t>, </a:t>
+            </a:r>
+            <a:r>
+              <a:rPr lang="en-US" i="1" dirty="0"/>
+              <a:t>n</a:t>
+            </a:r>
+            <a:r>
+              <a:rPr lang="en-US" baseline="-25000" dirty="0">
                 <a:ea typeface="Cambria Math" pitchFamily="18" charset="0"/>
               </a:rPr>
               <a:t>2</a:t>
             </a:r>
             <a:r>
               <a:rPr lang="en-US" dirty="0"/>
-              <a:t>) different ways, leaving two positions free. </a:t>
-            </a:r>
-          </a:p>
-          <a:p>
-            <a:pPr lvl="1"/>
-            <a:r>
-              <a:rPr lang="en-US" dirty="0"/>
-              <a:t>Then the U can be placed in </a:t>
+              <a:t> ) ways, leaving </a:t>
+            </a:r>
+            <a:r>
+              <a:rPr lang="en-US" i="1" dirty="0"/>
+              <a:t>n</a:t>
+            </a:r>
+            <a:r>
+              <a:rPr lang="en-US" i="1" dirty="0">
+                <a:ea typeface="Cambria Math"/>
+              </a:rPr>
+              <a:t> −</a:t>
+            </a:r>
+            <a:r>
+              <a:rPr lang="en-US" i="1" dirty="0"/>
+              <a:t> n</a:t>
+            </a:r>
+            <a:r>
+              <a:rPr lang="en-US" baseline="-25000" dirty="0">
+                <a:ea typeface="Cambria Math" pitchFamily="18" charset="0"/>
+              </a:rPr>
+              <a:t>1</a:t>
+            </a:r>
+            <a:r>
+              <a:rPr lang="en-US" i="1" dirty="0"/>
+              <a:t> </a:t>
+            </a:r>
+            <a:r>
+              <a:rPr lang="en-US" i="1" dirty="0">
+                <a:ea typeface="Cambria Math"/>
+              </a:rPr>
+              <a:t>−</a:t>
+            </a:r>
+            <a:r>
+              <a:rPr lang="en-US" dirty="0"/>
+              <a:t> </a:t>
+            </a:r>
+            <a:r>
+              <a:rPr lang="en-US" i="1" dirty="0"/>
+              <a:t>n</a:t>
+            </a:r>
+            <a:r>
+              <a:rPr lang="en-US" baseline="-25000" dirty="0">
+                <a:ea typeface="Cambria Math" pitchFamily="18" charset="0"/>
+              </a:rPr>
+              <a:t>2</a:t>
+            </a:r>
+            <a:r>
+              <a:rPr lang="en-US" dirty="0"/>
+              <a:t> positions. </a:t>
+            </a:r>
+          </a:p>
+          <a:p>
+            <a:pPr lvl="1">
+              <a:lnSpc>
+                <a:spcPct val="120000"/>
+              </a:lnSpc>
+            </a:pPr>
+            <a:r>
+              <a:rPr lang="en-US" dirty="0"/>
+              <a:t>This is repeated, until </a:t>
+            </a:r>
+            <a:r>
+              <a:rPr lang="en-US" i="1" dirty="0" err="1"/>
+              <a:t>n</a:t>
+            </a:r>
+            <a:r>
+              <a:rPr lang="en-US" i="1" baseline="-25000" dirty="0" err="1"/>
+              <a:t>k</a:t>
+            </a:r>
+            <a:r>
+              <a:rPr lang="en-US" baseline="-25000" dirty="0"/>
+              <a:t> </a:t>
+            </a:r>
+            <a:r>
+              <a:rPr lang="en-US" dirty="0"/>
+              <a:t>objects of type </a:t>
+            </a:r>
+            <a:r>
+              <a:rPr lang="en-US" i="1" dirty="0"/>
+              <a:t>k</a:t>
+            </a:r>
+            <a:r>
+              <a:rPr lang="en-US" dirty="0"/>
+              <a:t> are placed in </a:t>
             </a:r>
             <a:r>
               <a:rPr lang="en-US" i="1" dirty="0"/>
@@ -17479,69 +17684,104 @@
               <a:t>(</a:t>
             </a:r>
             <a:r>
-              <a:rPr lang="en-US" dirty="0">
+              <a:rPr lang="en-US" i="1" dirty="0"/>
+              <a:t>n </a:t>
+            </a:r>
+            <a:r>
+              <a:rPr lang="en-US" i="1" dirty="0">
+                <a:ea typeface="Cambria Math"/>
+              </a:rPr>
+              <a:t>− </a:t>
+            </a:r>
+            <a:r>
+              <a:rPr lang="en-US" i="1" dirty="0"/>
+              <a:t>n</a:t>
+            </a:r>
+            <a:r>
+              <a:rPr lang="en-US" baseline="-25000" dirty="0">
+                <a:ea typeface="Cambria Math" pitchFamily="18" charset="0"/>
+              </a:rPr>
+              <a:t>1</a:t>
+            </a:r>
+            <a:r>
+              <a:rPr lang="en-US" i="1" dirty="0"/>
+              <a:t> </a:t>
+            </a:r>
+            <a:r>
+              <a:rPr lang="en-US" i="1" dirty="0">
+                <a:ea typeface="Cambria Math"/>
+              </a:rPr>
+              <a:t>−</a:t>
+            </a:r>
+            <a:r>
+              <a:rPr lang="en-US" dirty="0"/>
+              <a:t> </a:t>
+            </a:r>
+            <a:r>
+              <a:rPr lang="en-US" i="1" dirty="0"/>
+              <a:t>n</a:t>
+            </a:r>
+            <a:r>
+              <a:rPr lang="en-US" baseline="-25000" dirty="0">
                 <a:ea typeface="Cambria Math" pitchFamily="18" charset="0"/>
               </a:rPr>
               <a:t>2</a:t>
             </a:r>
             <a:r>
+              <a:rPr lang="en-US" i="1" dirty="0"/>
+              <a:t> </a:t>
+            </a:r>
+            <a:r>
+              <a:rPr lang="en-US" i="1" dirty="0">
+                <a:ea typeface="Cambria Math"/>
+              </a:rPr>
+              <a:t>− ∙∙∙ − </a:t>
+            </a:r>
+            <a:r>
+              <a:rPr lang="en-US" i="1" dirty="0" err="1"/>
+              <a:t>n</a:t>
+            </a:r>
+            <a:r>
+              <a:rPr lang="en-US" i="1" baseline="-25000" dirty="0" err="1"/>
+              <a:t>k</a:t>
+            </a:r>
+            <a:r>
               <a:rPr lang="en-US" dirty="0"/>
               <a:t>, </a:t>
             </a:r>
             <a:r>
-              <a:rPr lang="en-US" dirty="0">
-                <a:ea typeface="Cambria Math" pitchFamily="18" charset="0"/>
-              </a:rPr>
-              <a:t>1</a:t>
-            </a:r>
-            <a:r>
-              <a:rPr lang="en-US" dirty="0"/>
-              <a:t>) different ways, leaving one position free. </a:t>
-            </a:r>
-          </a:p>
-          <a:p>
-            <a:pPr lvl="1"/>
-            <a:r>
-              <a:rPr lang="en-US" dirty="0"/>
-              <a:t>Then the E can be placed in </a:t>
-            </a:r>
-            <a:r>
-              <a:rPr lang="en-US" i="1" dirty="0"/>
-              <a:t>C</a:t>
-            </a:r>
-            <a:r>
-              <a:rPr lang="en-US" dirty="0"/>
-              <a:t>(</a:t>
-            </a:r>
-            <a:r>
-              <a:rPr lang="en-US" dirty="0">
-                <a:ea typeface="Cambria Math" pitchFamily="18" charset="0"/>
-              </a:rPr>
-              <a:t>1</a:t>
-            </a:r>
-            <a:r>
-              <a:rPr lang="en-US" dirty="0"/>
-              <a:t>, </a:t>
-            </a:r>
-            <a:r>
-              <a:rPr lang="en-US" dirty="0">
-                <a:ea typeface="Cambria Math" pitchFamily="18" charset="0"/>
-              </a:rPr>
-              <a:t>1</a:t>
-            </a:r>
-            <a:r>
-              <a:rPr lang="en-US" dirty="0"/>
-              <a:t>) ways.</a:t>
+              <a:rPr lang="en-US" i="1" dirty="0" err="1"/>
+              <a:t>n</a:t>
+            </a:r>
+            <a:r>
+              <a:rPr lang="en-US" i="1" baseline="-25000" dirty="0" err="1"/>
+              <a:t>k</a:t>
+            </a:r>
+            <a:r>
+              <a:rPr lang="en-US" dirty="0"/>
+              <a:t>) ways. </a:t>
             </a:r>
           </a:p>
           <a:p>
             <a:pPr>
+              <a:lnSpc>
+                <a:spcPct val="120000"/>
+              </a:lnSpc>
               <a:buNone/>
             </a:pPr>
             <a:r>
               <a:rPr lang="en-US" dirty="0"/>
-              <a:t>     By the product rule, the number of different strings is:</a:t>
-            </a:r>
+              <a:t>Then</a:t>
+            </a:r>
+          </a:p>
+          <a:p>
+            <a:endParaRPr lang="en-US" dirty="0"/>
+          </a:p>
+          <a:p>
+            <a:pPr>
+              <a:buNone/>
+            </a:pPr>
+            <a:endParaRPr lang="en-US" dirty="0"/>
           </a:p>
           <a:p>
             <a:pPr>
@@ -17553,7 +17793,7 @@
       </p:sp>
       <p:pic>
         <p:nvPicPr>
-          <p:cNvPr id="7" name="Picture 6" descr="addin_tmp.png"/>
+          <p:cNvPr id="11" name="Picture 10" descr="addin_tmp.png"/>
           <p:cNvPicPr>
             <a:picLocks noChangeAspect="1"/>
           </p:cNvPicPr>
@@ -17564,25 +17804,88 @@
           </p:nvPr>
         </p:nvPicPr>
         <p:blipFill>
-          <a:blip r:embed="rId3" cstate="print"/>
+          <a:blip r:embed="rId4" cstate="print"/>
           <a:stretch>
             <a:fillRect/>
           </a:stretch>
         </p:blipFill>
         <p:spPr>
           <a:xfrm>
-            <a:off x="1533843" y="5858828"/>
-            <a:ext cx="10290432" cy="453072"/>
+            <a:off x="2586399" y="2587075"/>
+            <a:ext cx="1704441" cy="492455"/>
           </a:xfrm>
           <a:prstGeom prst="rect">
             <a:avLst/>
           </a:prstGeom>
         </p:spPr>
       </p:pic>
+      <p:pic>
+        <p:nvPicPr>
+          <p:cNvPr id="10" name="Picture 9" descr="addin_tmp.png"/>
+          <p:cNvPicPr>
+            <a:picLocks noChangeAspect="1"/>
+          </p:cNvPicPr>
+          <p:nvPr>
+            <p:custDataLst>
+              <p:tags r:id="rId2"/>
+            </p:custDataLst>
+          </p:nvPr>
+        </p:nvPicPr>
+        <p:blipFill>
+          <a:blip r:embed="rId5" cstate="print"/>
+          <a:stretch>
+            <a:fillRect/>
+          </a:stretch>
+        </p:blipFill>
+        <p:spPr>
+          <a:xfrm>
+            <a:off x="2107980" y="5782628"/>
+            <a:ext cx="8335395" cy="529272"/>
+          </a:xfrm>
+          <a:prstGeom prst="rect">
+            <a:avLst/>
+          </a:prstGeom>
+        </p:spPr>
+      </p:pic>
+      <p:sp>
+        <p:nvSpPr>
+          <p:cNvPr id="4" name="Rectangle 3">
+            <a:extLst>
+              <a:ext uri="{FF2B5EF4-FFF2-40B4-BE49-F238E27FC236}">
+                <a16:creationId xmlns:a16="http://schemas.microsoft.com/office/drawing/2014/main" id="{934A079B-D45E-004B-9BE3-CED267076BED}"/>
+              </a:ext>
+            </a:extLst>
+          </p:cNvPr>
+          <p:cNvSpPr/>
+          <p:nvPr/>
+        </p:nvSpPr>
+        <p:spPr>
+          <a:xfrm>
+            <a:off x="9994132" y="5862598"/>
+            <a:ext cx="1359668" cy="369332"/>
+          </a:xfrm>
+          <a:prstGeom prst="rect">
+            <a:avLst/>
+          </a:prstGeom>
+        </p:spPr>
+        <p:txBody>
+          <a:bodyPr wrap="none">
+            <a:spAutoFit/>
+          </a:bodyPr>
+          <a:lstStyle/>
+          <a:p>
+            <a:r>
+              <a:rPr lang="en-US" dirty="0"/>
+              <a:t>	◀︎ </a:t>
+            </a:r>
+            <a:endParaRPr lang="en-US"/>
+          </a:p>
+        </p:txBody>
+      </p:sp>
     </p:spTree>
     <p:extLst>
       <p:ext uri="{BB962C8B-B14F-4D97-AF65-F5344CB8AC3E}">
-        <p14:creationId xmlns:p14="http://schemas.microsoft.com/office/powerpoint/2010/main" val="1894197044"/>
+        <p14:creationId xmlns:p14="http://schemas.microsoft.com/office/powerpoint/2010/main" val="446109822"/>
       </p:ext>
     </p:extLst>
   </p:cSld>
@@ -17791,855 +18094,6 @@
 </file>
 
 <file path=ppt/slides/slide60.xml><?xml version="1.0" encoding="utf-8"?>
-<p:sld xmlns:a="http://schemas.openxmlformats.org/drawingml/2006/main" xmlns:r="http://schemas.openxmlformats.org/officeDocument/2006/relationships" xmlns:p="http://schemas.openxmlformats.org/presentationml/2006/main">
-  <p:cSld>
-    <p:spTree>
-      <p:nvGrpSpPr>
-        <p:cNvPr id="1" name=""/>
-        <p:cNvGrpSpPr/>
-        <p:nvPr/>
-      </p:nvGrpSpPr>
-      <p:grpSpPr>
-        <a:xfrm>
-          <a:off x="0" y="0"/>
-          <a:ext cx="0" cy="0"/>
-          <a:chOff x="0" y="0"/>
-          <a:chExt cx="0" cy="0"/>
-        </a:xfrm>
-      </p:grpSpPr>
-      <p:sp>
-        <p:nvSpPr>
-          <p:cNvPr id="2" name="Title 1"/>
-          <p:cNvSpPr>
-            <a:spLocks noGrp="1"/>
-          </p:cNvSpPr>
-          <p:nvPr>
-            <p:ph type="title"/>
-          </p:nvPr>
-        </p:nvSpPr>
-        <p:spPr/>
-        <p:txBody>
-          <a:bodyPr>
-            <a:normAutofit/>
-          </a:bodyPr>
-          <a:lstStyle/>
-          <a:p>
-            <a:r>
-              <a:rPr lang="en-US" dirty="0"/>
-              <a:t>Permutations with Indistinguishable Objects</a:t>
-            </a:r>
-          </a:p>
-        </p:txBody>
-      </p:sp>
-      <p:sp>
-        <p:nvSpPr>
-          <p:cNvPr id="3" name="Content Placeholder 2"/>
-          <p:cNvSpPr>
-            <a:spLocks noGrp="1"/>
-          </p:cNvSpPr>
-          <p:nvPr>
-            <p:ph idx="1"/>
-          </p:nvPr>
-        </p:nvSpPr>
-        <p:spPr/>
-        <p:txBody>
-          <a:bodyPr>
-            <a:normAutofit fontScale="70000" lnSpcReduction="20000"/>
-          </a:bodyPr>
-          <a:lstStyle/>
-          <a:p>
-            <a:pPr>
-              <a:lnSpc>
-                <a:spcPct val="120000"/>
-              </a:lnSpc>
-              <a:buNone/>
-            </a:pPr>
-            <a:r>
-              <a:rPr lang="en-US" b="1" dirty="0"/>
-              <a:t>Theorem </a:t>
-            </a:r>
-            <a:r>
-              <a:rPr lang="en-US" b="1" dirty="0">
-                <a:ea typeface="Cambria Math" pitchFamily="18" charset="0"/>
-              </a:rPr>
-              <a:t>5</a:t>
-            </a:r>
-            <a:r>
-              <a:rPr lang="en-US" dirty="0"/>
-              <a:t>: The number of different permutations of </a:t>
-            </a:r>
-            <a:r>
-              <a:rPr lang="en-US" i="1" dirty="0"/>
-              <a:t>n</a:t>
-            </a:r>
-            <a:r>
-              <a:rPr lang="en-US" dirty="0"/>
-              <a:t> objects, where there are </a:t>
-            </a:r>
-            <a:r>
-              <a:rPr lang="en-US" i="1" dirty="0"/>
-              <a:t>n</a:t>
-            </a:r>
-            <a:r>
-              <a:rPr lang="en-US" baseline="-25000" dirty="0">
-                <a:ea typeface="Cambria Math" pitchFamily="18" charset="0"/>
-              </a:rPr>
-              <a:t>1</a:t>
-            </a:r>
-            <a:r>
-              <a:rPr lang="en-US" dirty="0"/>
-              <a:t> indistinguishable objects of type </a:t>
-            </a:r>
-            <a:r>
-              <a:rPr lang="en-US" dirty="0">
-                <a:ea typeface="Cambria Math" pitchFamily="18" charset="0"/>
-              </a:rPr>
-              <a:t>1</a:t>
-            </a:r>
-            <a:r>
-              <a:rPr lang="en-US" dirty="0"/>
-              <a:t>, </a:t>
-            </a:r>
-            <a:r>
-              <a:rPr lang="en-US" i="1" dirty="0"/>
-              <a:t>n</a:t>
-            </a:r>
-            <a:r>
-              <a:rPr lang="en-US" baseline="-25000" dirty="0">
-                <a:ea typeface="Cambria Math" pitchFamily="18" charset="0"/>
-              </a:rPr>
-              <a:t>2</a:t>
-            </a:r>
-            <a:r>
-              <a:rPr lang="en-US" dirty="0"/>
-              <a:t> indistinguishable objects of type </a:t>
-            </a:r>
-            <a:r>
-              <a:rPr lang="en-US" dirty="0">
-                <a:ea typeface="Cambria Math" pitchFamily="18" charset="0"/>
-              </a:rPr>
-              <a:t>2</a:t>
-            </a:r>
-            <a:r>
-              <a:rPr lang="en-US" dirty="0"/>
-              <a:t>, …., and </a:t>
-            </a:r>
-            <a:r>
-              <a:rPr lang="en-US" i="1" dirty="0" err="1"/>
-              <a:t>n</a:t>
-            </a:r>
-            <a:r>
-              <a:rPr lang="en-US" i="1" baseline="-25000" dirty="0" err="1"/>
-              <a:t>k</a:t>
-            </a:r>
-            <a:r>
-              <a:rPr lang="en-US" baseline="-25000" dirty="0"/>
-              <a:t> </a:t>
-            </a:r>
-            <a:r>
-              <a:rPr lang="en-US" dirty="0"/>
-              <a:t>indistinguishable objects of type </a:t>
-            </a:r>
-            <a:r>
-              <a:rPr lang="en-US" i="1" dirty="0"/>
-              <a:t>k</a:t>
-            </a:r>
-            <a:r>
-              <a:rPr lang="en-US" dirty="0"/>
-              <a:t>, is:</a:t>
-            </a:r>
-          </a:p>
-          <a:p>
-            <a:endParaRPr lang="en-US" dirty="0"/>
-          </a:p>
-          <a:p>
-            <a:endParaRPr lang="en-US" dirty="0"/>
-          </a:p>
-          <a:p>
-            <a:pPr>
-              <a:lnSpc>
-                <a:spcPct val="120000"/>
-              </a:lnSpc>
-              <a:buNone/>
-            </a:pPr>
-            <a:r>
-              <a:rPr lang="en-US" b="1" dirty="0"/>
-              <a:t>Proof</a:t>
-            </a:r>
-            <a:r>
-              <a:rPr lang="en-US" dirty="0"/>
-              <a:t>: By the product rule the total number of permutations is: </a:t>
-            </a:r>
-          </a:p>
-          <a:p>
-            <a:pPr>
-              <a:lnSpc>
-                <a:spcPct val="120000"/>
-              </a:lnSpc>
-              <a:buNone/>
-            </a:pPr>
-            <a:r>
-              <a:rPr lang="en-US" dirty="0"/>
-              <a:t>       </a:t>
-            </a:r>
-            <a:r>
-              <a:rPr lang="en-US" i="1" dirty="0"/>
-              <a:t>C</a:t>
-            </a:r>
-            <a:r>
-              <a:rPr lang="en-US" dirty="0"/>
-              <a:t>(</a:t>
-            </a:r>
-            <a:r>
-              <a:rPr lang="en-US" i="1" dirty="0"/>
-              <a:t>n</a:t>
-            </a:r>
-            <a:r>
-              <a:rPr lang="en-US" dirty="0"/>
-              <a:t>, </a:t>
-            </a:r>
-            <a:r>
-              <a:rPr lang="en-US" i="1" dirty="0"/>
-              <a:t>n</a:t>
-            </a:r>
-            <a:r>
-              <a:rPr lang="en-US" baseline="-25000" dirty="0">
-                <a:ea typeface="Cambria Math" pitchFamily="18" charset="0"/>
-              </a:rPr>
-              <a:t>1</a:t>
-            </a:r>
-            <a:r>
-              <a:rPr lang="en-US" dirty="0"/>
-              <a:t> )</a:t>
-            </a:r>
-            <a:r>
-              <a:rPr lang="en-US" i="1" dirty="0"/>
-              <a:t> C</a:t>
-            </a:r>
-            <a:r>
-              <a:rPr lang="en-US" dirty="0"/>
-              <a:t>(</a:t>
-            </a:r>
-            <a:r>
-              <a:rPr lang="en-US" i="1" dirty="0"/>
-              <a:t>n</a:t>
-            </a:r>
-            <a:r>
-              <a:rPr lang="en-US" i="1" dirty="0">
-                <a:ea typeface="Cambria Math"/>
-              </a:rPr>
-              <a:t> −</a:t>
-            </a:r>
-            <a:r>
-              <a:rPr lang="en-US" i="1" dirty="0"/>
-              <a:t> n</a:t>
-            </a:r>
-            <a:r>
-              <a:rPr lang="en-US" baseline="-25000" dirty="0">
-                <a:ea typeface="Cambria Math" pitchFamily="18" charset="0"/>
-              </a:rPr>
-              <a:t>1</a:t>
-            </a:r>
-            <a:r>
-              <a:rPr lang="en-US" dirty="0"/>
-              <a:t>, </a:t>
-            </a:r>
-            <a:r>
-              <a:rPr lang="en-US" i="1" dirty="0"/>
-              <a:t>n</a:t>
-            </a:r>
-            <a:r>
-              <a:rPr lang="en-US" baseline="-25000" dirty="0">
-                <a:ea typeface="Cambria Math" pitchFamily="18" charset="0"/>
-              </a:rPr>
-              <a:t>2</a:t>
-            </a:r>
-            <a:r>
-              <a:rPr lang="en-US" dirty="0"/>
-              <a:t> ) </a:t>
-            </a:r>
-            <a:r>
-              <a:rPr lang="en-US" i="1" dirty="0">
-                <a:ea typeface="Cambria Math"/>
-              </a:rPr>
-              <a:t>∙∙∙ </a:t>
-            </a:r>
-            <a:r>
-              <a:rPr lang="en-US" i="1" dirty="0"/>
-              <a:t>C</a:t>
-            </a:r>
-            <a:r>
-              <a:rPr lang="en-US" dirty="0"/>
-              <a:t>(</a:t>
-            </a:r>
-            <a:r>
-              <a:rPr lang="en-US" i="1" dirty="0"/>
-              <a:t>n </a:t>
-            </a:r>
-            <a:r>
-              <a:rPr lang="en-US" i="1" dirty="0">
-                <a:ea typeface="Cambria Math"/>
-              </a:rPr>
-              <a:t>− </a:t>
-            </a:r>
-            <a:r>
-              <a:rPr lang="en-US" i="1" dirty="0"/>
-              <a:t>n</a:t>
-            </a:r>
-            <a:r>
-              <a:rPr lang="en-US" baseline="-25000" dirty="0">
-                <a:ea typeface="Cambria Math" pitchFamily="18" charset="0"/>
-              </a:rPr>
-              <a:t>1</a:t>
-            </a:r>
-            <a:r>
-              <a:rPr lang="en-US" i="1" dirty="0"/>
-              <a:t> </a:t>
-            </a:r>
-            <a:r>
-              <a:rPr lang="en-US" i="1" dirty="0">
-                <a:ea typeface="Cambria Math"/>
-              </a:rPr>
-              <a:t>−</a:t>
-            </a:r>
-            <a:r>
-              <a:rPr lang="en-US" dirty="0"/>
-              <a:t> </a:t>
-            </a:r>
-            <a:r>
-              <a:rPr lang="en-US" i="1" dirty="0"/>
-              <a:t>n</a:t>
-            </a:r>
-            <a:r>
-              <a:rPr lang="en-US" baseline="-25000" dirty="0">
-                <a:ea typeface="Cambria Math" pitchFamily="18" charset="0"/>
-              </a:rPr>
-              <a:t>2</a:t>
-            </a:r>
-            <a:r>
-              <a:rPr lang="en-US" i="1" dirty="0"/>
-              <a:t> </a:t>
-            </a:r>
-            <a:r>
-              <a:rPr lang="en-US" i="1" dirty="0">
-                <a:ea typeface="Cambria Math"/>
-              </a:rPr>
-              <a:t>− ∙∙∙ − </a:t>
-            </a:r>
-            <a:r>
-              <a:rPr lang="en-US" i="1" dirty="0" err="1"/>
-              <a:t>n</a:t>
-            </a:r>
-            <a:r>
-              <a:rPr lang="en-US" i="1" baseline="-25000" dirty="0" err="1"/>
-              <a:t>k</a:t>
-            </a:r>
-            <a:r>
-              <a:rPr lang="en-US" dirty="0"/>
-              <a:t>, </a:t>
-            </a:r>
-            <a:r>
-              <a:rPr lang="en-US" i="1" dirty="0" err="1"/>
-              <a:t>n</a:t>
-            </a:r>
-            <a:r>
-              <a:rPr lang="en-US" i="1" baseline="-25000" dirty="0" err="1"/>
-              <a:t>k</a:t>
-            </a:r>
-            <a:r>
-              <a:rPr lang="en-US" dirty="0"/>
-              <a:t>)  since</a:t>
-            </a:r>
-          </a:p>
-          <a:p>
-            <a:pPr lvl="1">
-              <a:lnSpc>
-                <a:spcPct val="120000"/>
-              </a:lnSpc>
-            </a:pPr>
-            <a:r>
-              <a:rPr lang="en-US" dirty="0"/>
-              <a:t>The </a:t>
-            </a:r>
-            <a:r>
-              <a:rPr lang="en-US" i="1" dirty="0"/>
-              <a:t>n</a:t>
-            </a:r>
-            <a:r>
-              <a:rPr lang="en-US" baseline="-25000" dirty="0">
-                <a:ea typeface="Cambria Math" pitchFamily="18" charset="0"/>
-              </a:rPr>
-              <a:t>1 </a:t>
-            </a:r>
-            <a:r>
-              <a:rPr lang="en-US" dirty="0"/>
-              <a:t>objects of type one can be placed in the </a:t>
-            </a:r>
-            <a:r>
-              <a:rPr lang="en-US" i="1" dirty="0"/>
-              <a:t>n</a:t>
-            </a:r>
-            <a:r>
-              <a:rPr lang="en-US" dirty="0"/>
-              <a:t> positions in </a:t>
-            </a:r>
-            <a:r>
-              <a:rPr lang="en-US" i="1" dirty="0"/>
-              <a:t>C</a:t>
-            </a:r>
-            <a:r>
-              <a:rPr lang="en-US" dirty="0"/>
-              <a:t>(</a:t>
-            </a:r>
-            <a:r>
-              <a:rPr lang="en-US" i="1" dirty="0"/>
-              <a:t>n</a:t>
-            </a:r>
-            <a:r>
-              <a:rPr lang="en-US" dirty="0"/>
-              <a:t>, </a:t>
-            </a:r>
-            <a:r>
-              <a:rPr lang="en-US" i="1" dirty="0"/>
-              <a:t>n</a:t>
-            </a:r>
-            <a:r>
-              <a:rPr lang="en-US" baseline="-25000" dirty="0">
-                <a:ea typeface="Cambria Math" pitchFamily="18" charset="0"/>
-              </a:rPr>
-              <a:t>1</a:t>
-            </a:r>
-            <a:r>
-              <a:rPr lang="en-US" dirty="0"/>
-              <a:t> ) ways, leaving  </a:t>
-            </a:r>
-            <a:r>
-              <a:rPr lang="en-US" i="1" dirty="0"/>
-              <a:t>n </a:t>
-            </a:r>
-            <a:r>
-              <a:rPr lang="en-US" i="1" dirty="0">
-                <a:ea typeface="Cambria Math"/>
-              </a:rPr>
-              <a:t>− </a:t>
-            </a:r>
-            <a:r>
-              <a:rPr lang="en-US" i="1" dirty="0"/>
-              <a:t>n</a:t>
-            </a:r>
-            <a:r>
-              <a:rPr lang="en-US" baseline="-25000" dirty="0">
-                <a:ea typeface="Cambria Math" pitchFamily="18" charset="0"/>
-              </a:rPr>
-              <a:t>1</a:t>
-            </a:r>
-            <a:r>
-              <a:rPr lang="en-US" dirty="0"/>
-              <a:t> positions. </a:t>
-            </a:r>
-          </a:p>
-          <a:p>
-            <a:pPr lvl="1">
-              <a:lnSpc>
-                <a:spcPct val="120000"/>
-              </a:lnSpc>
-            </a:pPr>
-            <a:r>
-              <a:rPr lang="en-US" dirty="0"/>
-              <a:t>Then the</a:t>
-            </a:r>
-            <a:r>
-              <a:rPr lang="en-US" i="1" dirty="0"/>
-              <a:t> n</a:t>
-            </a:r>
-            <a:r>
-              <a:rPr lang="en-US" baseline="-25000" dirty="0">
-                <a:ea typeface="Cambria Math" pitchFamily="18" charset="0"/>
-              </a:rPr>
-              <a:t>2 </a:t>
-            </a:r>
-            <a:r>
-              <a:rPr lang="en-US" dirty="0"/>
-              <a:t>objects of type two can be placed in the </a:t>
-            </a:r>
-            <a:r>
-              <a:rPr lang="en-US" i="1" dirty="0"/>
-              <a:t>n </a:t>
-            </a:r>
-            <a:r>
-              <a:rPr lang="en-US" i="1" dirty="0">
-                <a:ea typeface="Cambria Math"/>
-              </a:rPr>
-              <a:t>−</a:t>
-            </a:r>
-            <a:r>
-              <a:rPr lang="en-US" dirty="0"/>
-              <a:t> </a:t>
-            </a:r>
-            <a:r>
-              <a:rPr lang="en-US" i="1" dirty="0"/>
-              <a:t>n</a:t>
-            </a:r>
-            <a:r>
-              <a:rPr lang="en-US" baseline="-25000" dirty="0">
-                <a:ea typeface="Cambria Math" pitchFamily="18" charset="0"/>
-              </a:rPr>
-              <a:t>1 </a:t>
-            </a:r>
-            <a:r>
-              <a:rPr lang="en-US" dirty="0"/>
-              <a:t>positions in </a:t>
-            </a:r>
-            <a:r>
-              <a:rPr lang="en-US" i="1" dirty="0"/>
-              <a:t>C</a:t>
-            </a:r>
-            <a:r>
-              <a:rPr lang="en-US" dirty="0"/>
-              <a:t>(</a:t>
-            </a:r>
-            <a:r>
-              <a:rPr lang="en-US" i="1" dirty="0"/>
-              <a:t>n </a:t>
-            </a:r>
-            <a:r>
-              <a:rPr lang="en-US" i="1" dirty="0">
-                <a:ea typeface="Cambria Math"/>
-              </a:rPr>
-              <a:t>− </a:t>
-            </a:r>
-            <a:r>
-              <a:rPr lang="en-US" i="1" dirty="0"/>
-              <a:t>n</a:t>
-            </a:r>
-            <a:r>
-              <a:rPr lang="en-US" baseline="-25000" dirty="0">
-                <a:ea typeface="Cambria Math" pitchFamily="18" charset="0"/>
-              </a:rPr>
-              <a:t>1</a:t>
-            </a:r>
-            <a:r>
-              <a:rPr lang="en-US" dirty="0"/>
-              <a:t>, </a:t>
-            </a:r>
-            <a:r>
-              <a:rPr lang="en-US" i="1" dirty="0"/>
-              <a:t>n</a:t>
-            </a:r>
-            <a:r>
-              <a:rPr lang="en-US" baseline="-25000" dirty="0">
-                <a:ea typeface="Cambria Math" pitchFamily="18" charset="0"/>
-              </a:rPr>
-              <a:t>2</a:t>
-            </a:r>
-            <a:r>
-              <a:rPr lang="en-US" dirty="0"/>
-              <a:t> ) ways, leaving </a:t>
-            </a:r>
-            <a:r>
-              <a:rPr lang="en-US" i="1" dirty="0"/>
-              <a:t>n</a:t>
-            </a:r>
-            <a:r>
-              <a:rPr lang="en-US" i="1" dirty="0">
-                <a:ea typeface="Cambria Math"/>
-              </a:rPr>
-              <a:t> −</a:t>
-            </a:r>
-            <a:r>
-              <a:rPr lang="en-US" i="1" dirty="0"/>
-              <a:t> n</a:t>
-            </a:r>
-            <a:r>
-              <a:rPr lang="en-US" baseline="-25000" dirty="0">
-                <a:ea typeface="Cambria Math" pitchFamily="18" charset="0"/>
-              </a:rPr>
-              <a:t>1</a:t>
-            </a:r>
-            <a:r>
-              <a:rPr lang="en-US" i="1" dirty="0"/>
-              <a:t> </a:t>
-            </a:r>
-            <a:r>
-              <a:rPr lang="en-US" i="1" dirty="0">
-                <a:ea typeface="Cambria Math"/>
-              </a:rPr>
-              <a:t>−</a:t>
-            </a:r>
-            <a:r>
-              <a:rPr lang="en-US" dirty="0"/>
-              <a:t> </a:t>
-            </a:r>
-            <a:r>
-              <a:rPr lang="en-US" i="1" dirty="0"/>
-              <a:t>n</a:t>
-            </a:r>
-            <a:r>
-              <a:rPr lang="en-US" baseline="-25000" dirty="0">
-                <a:ea typeface="Cambria Math" pitchFamily="18" charset="0"/>
-              </a:rPr>
-              <a:t>2</a:t>
-            </a:r>
-            <a:r>
-              <a:rPr lang="en-US" dirty="0"/>
-              <a:t> positions. </a:t>
-            </a:r>
-          </a:p>
-          <a:p>
-            <a:pPr lvl="1">
-              <a:lnSpc>
-                <a:spcPct val="120000"/>
-              </a:lnSpc>
-            </a:pPr>
-            <a:r>
-              <a:rPr lang="en-US" dirty="0"/>
-              <a:t>This is repeated, until </a:t>
-            </a:r>
-            <a:r>
-              <a:rPr lang="en-US" i="1" dirty="0" err="1"/>
-              <a:t>n</a:t>
-            </a:r>
-            <a:r>
-              <a:rPr lang="en-US" i="1" baseline="-25000" dirty="0" err="1"/>
-              <a:t>k</a:t>
-            </a:r>
-            <a:r>
-              <a:rPr lang="en-US" baseline="-25000" dirty="0"/>
-              <a:t> </a:t>
-            </a:r>
-            <a:r>
-              <a:rPr lang="en-US" dirty="0"/>
-              <a:t>objects of type </a:t>
-            </a:r>
-            <a:r>
-              <a:rPr lang="en-US" i="1" dirty="0"/>
-              <a:t>k</a:t>
-            </a:r>
-            <a:r>
-              <a:rPr lang="en-US" dirty="0"/>
-              <a:t> are placed in </a:t>
-            </a:r>
-            <a:r>
-              <a:rPr lang="en-US" i="1" dirty="0"/>
-              <a:t>C</a:t>
-            </a:r>
-            <a:r>
-              <a:rPr lang="en-US" dirty="0"/>
-              <a:t>(</a:t>
-            </a:r>
-            <a:r>
-              <a:rPr lang="en-US" i="1" dirty="0"/>
-              <a:t>n </a:t>
-            </a:r>
-            <a:r>
-              <a:rPr lang="en-US" i="1" dirty="0">
-                <a:ea typeface="Cambria Math"/>
-              </a:rPr>
-              <a:t>− </a:t>
-            </a:r>
-            <a:r>
-              <a:rPr lang="en-US" i="1" dirty="0"/>
-              <a:t>n</a:t>
-            </a:r>
-            <a:r>
-              <a:rPr lang="en-US" baseline="-25000" dirty="0">
-                <a:ea typeface="Cambria Math" pitchFamily="18" charset="0"/>
-              </a:rPr>
-              <a:t>1</a:t>
-            </a:r>
-            <a:r>
-              <a:rPr lang="en-US" i="1" dirty="0"/>
-              <a:t> </a:t>
-            </a:r>
-            <a:r>
-              <a:rPr lang="en-US" i="1" dirty="0">
-                <a:ea typeface="Cambria Math"/>
-              </a:rPr>
-              <a:t>−</a:t>
-            </a:r>
-            <a:r>
-              <a:rPr lang="en-US" dirty="0"/>
-              <a:t> </a:t>
-            </a:r>
-            <a:r>
-              <a:rPr lang="en-US" i="1" dirty="0"/>
-              <a:t>n</a:t>
-            </a:r>
-            <a:r>
-              <a:rPr lang="en-US" baseline="-25000" dirty="0">
-                <a:ea typeface="Cambria Math" pitchFamily="18" charset="0"/>
-              </a:rPr>
-              <a:t>2</a:t>
-            </a:r>
-            <a:r>
-              <a:rPr lang="en-US" i="1" dirty="0"/>
-              <a:t> </a:t>
-            </a:r>
-            <a:r>
-              <a:rPr lang="en-US" i="1" dirty="0">
-                <a:ea typeface="Cambria Math"/>
-              </a:rPr>
-              <a:t>− ∙∙∙ − </a:t>
-            </a:r>
-            <a:r>
-              <a:rPr lang="en-US" i="1" dirty="0" err="1"/>
-              <a:t>n</a:t>
-            </a:r>
-            <a:r>
-              <a:rPr lang="en-US" i="1" baseline="-25000" dirty="0" err="1"/>
-              <a:t>k</a:t>
-            </a:r>
-            <a:r>
-              <a:rPr lang="en-US" dirty="0"/>
-              <a:t>, </a:t>
-            </a:r>
-            <a:r>
-              <a:rPr lang="en-US" i="1" dirty="0" err="1"/>
-              <a:t>n</a:t>
-            </a:r>
-            <a:r>
-              <a:rPr lang="en-US" i="1" baseline="-25000" dirty="0" err="1"/>
-              <a:t>k</a:t>
-            </a:r>
-            <a:r>
-              <a:rPr lang="en-US" dirty="0"/>
-              <a:t>) ways. </a:t>
-            </a:r>
-          </a:p>
-          <a:p>
-            <a:pPr>
-              <a:lnSpc>
-                <a:spcPct val="120000"/>
-              </a:lnSpc>
-              <a:buNone/>
-            </a:pPr>
-            <a:r>
-              <a:rPr lang="en-US" dirty="0"/>
-              <a:t>Then</a:t>
-            </a:r>
-          </a:p>
-          <a:p>
-            <a:endParaRPr lang="en-US" dirty="0"/>
-          </a:p>
-          <a:p>
-            <a:pPr>
-              <a:buNone/>
-            </a:pPr>
-            <a:endParaRPr lang="en-US" dirty="0"/>
-          </a:p>
-          <a:p>
-            <a:pPr>
-              <a:buNone/>
-            </a:pPr>
-            <a:endParaRPr lang="en-US" dirty="0"/>
-          </a:p>
-        </p:txBody>
-      </p:sp>
-      <p:pic>
-        <p:nvPicPr>
-          <p:cNvPr id="11" name="Picture 10" descr="addin_tmp.png"/>
-          <p:cNvPicPr>
-            <a:picLocks noChangeAspect="1"/>
-          </p:cNvPicPr>
-          <p:nvPr>
-            <p:custDataLst>
-              <p:tags r:id="rId1"/>
-            </p:custDataLst>
-          </p:nvPr>
-        </p:nvPicPr>
-        <p:blipFill>
-          <a:blip r:embed="rId4" cstate="print"/>
-          <a:stretch>
-            <a:fillRect/>
-          </a:stretch>
-        </p:blipFill>
-        <p:spPr>
-          <a:xfrm>
-            <a:off x="2586399" y="2587075"/>
-            <a:ext cx="1704441" cy="492455"/>
-          </a:xfrm>
-          <a:prstGeom prst="rect">
-            <a:avLst/>
-          </a:prstGeom>
-        </p:spPr>
-      </p:pic>
-      <p:pic>
-        <p:nvPicPr>
-          <p:cNvPr id="10" name="Picture 9" descr="addin_tmp.png"/>
-          <p:cNvPicPr>
-            <a:picLocks noChangeAspect="1"/>
-          </p:cNvPicPr>
-          <p:nvPr>
-            <p:custDataLst>
-              <p:tags r:id="rId2"/>
-            </p:custDataLst>
-          </p:nvPr>
-        </p:nvPicPr>
-        <p:blipFill>
-          <a:blip r:embed="rId5" cstate="print"/>
-          <a:stretch>
-            <a:fillRect/>
-          </a:stretch>
-        </p:blipFill>
-        <p:spPr>
-          <a:xfrm>
-            <a:off x="2107980" y="5782628"/>
-            <a:ext cx="8335395" cy="529272"/>
-          </a:xfrm>
-          <a:prstGeom prst="rect">
-            <a:avLst/>
-          </a:prstGeom>
-        </p:spPr>
-      </p:pic>
-      <p:sp>
-        <p:nvSpPr>
-          <p:cNvPr id="4" name="Rectangle 3">
-            <a:extLst>
-              <a:ext uri="{FF2B5EF4-FFF2-40B4-BE49-F238E27FC236}">
-                <a16:creationId xmlns:a16="http://schemas.microsoft.com/office/drawing/2014/main" id="{934A079B-D45E-004B-9BE3-CED267076BED}"/>
-              </a:ext>
-            </a:extLst>
-          </p:cNvPr>
-          <p:cNvSpPr/>
-          <p:nvPr/>
-        </p:nvSpPr>
-        <p:spPr>
-          <a:xfrm>
-            <a:off x="9994132" y="5862598"/>
-            <a:ext cx="1359668" cy="369332"/>
-          </a:xfrm>
-          <a:prstGeom prst="rect">
-            <a:avLst/>
-          </a:prstGeom>
-        </p:spPr>
-        <p:txBody>
-          <a:bodyPr wrap="none">
-            <a:spAutoFit/>
-          </a:bodyPr>
-          <a:lstStyle/>
-          <a:p>
-            <a:r>
-              <a:rPr lang="en-US" dirty="0"/>
-              <a:t>	◀︎ </a:t>
-            </a:r>
-            <a:endParaRPr lang="en-US"/>
-          </a:p>
-        </p:txBody>
-      </p:sp>
-    </p:spTree>
-    <p:extLst>
-      <p:ext uri="{BB962C8B-B14F-4D97-AF65-F5344CB8AC3E}">
-        <p14:creationId xmlns:p14="http://schemas.microsoft.com/office/powerpoint/2010/main" val="446109822"/>
-      </p:ext>
-    </p:extLst>
-  </p:cSld>
-  <p:clrMapOvr>
-    <a:masterClrMapping/>
-  </p:clrMapOvr>
-</p:sld>
-</file>
-
-<file path=ppt/slides/slide61.xml><?xml version="1.0" encoding="utf-8"?>
 <p:sld xmlns:a="http://schemas.openxmlformats.org/drawingml/2006/main" xmlns:r="http://schemas.openxmlformats.org/officeDocument/2006/relationships" xmlns:p="http://schemas.openxmlformats.org/presentationml/2006/main">
   <p:cSld>
     <p:bg>
@@ -19671,70 +19125,70 @@
 
 <file path=ppt/tags/tag10.xml><?xml version="1.0" encoding="utf-8"?>
 <p:tagLst xmlns:a="http://schemas.openxmlformats.org/drawingml/2006/main" xmlns:r="http://schemas.openxmlformats.org/officeDocument/2006/relationships" xmlns:p="http://schemas.openxmlformats.org/presentationml/2006/main">
-  <p:tag name="LATEXADDIN" val="\documentclass{article}&#10;\usepackage{amsmath}&#10;\pagestyle{empty}&#10;\begin{document}&#10;&#10;$C(n,n-r)  = \frac{n!}{(n -r)! [n - (n - r)]!} = \frac{n!}{(n - r)!r!}\;.$&#10;&#10;\end{document}"/>
-  <p:tag name="IGUANATEXSIZE" val="25"/>
+  <p:tag name="LATEXADDIN" val="\documentclass{article}&#10;\usepackage{amsmath}&#10;\pagestyle{empty}&#10;\begin{document}&#10;&#10;$$&#10;(x + y)^n =\sum_{j = 0}^{n}\left(\begin{array}{l} n\\j\end{array}\right)x^{n-j}y^j =\left(\begin{array}{l}n\\0\end{array}\right)x^n + \left(\begin{array}{l}n\\1\end{array}\right)x^{n-1}y + \cdots + \left(\begin{array}{l}n\\n-1\end{array}\right)xy^{n-1} + \left(\begin{array}{l}n\\n\end{array}\right) y^n .&#10;$$&#10;&#10;&#10;\end{document}"/>
+  <p:tag name="IGUANATEXSIZE" val="15"/>
 </p:tagLst>
 </file>
 
 <file path=ppt/tags/tag11.xml><?xml version="1.0" encoding="utf-8"?>
 <p:tagLst xmlns:a="http://schemas.openxmlformats.org/drawingml/2006/main" xmlns:r="http://schemas.openxmlformats.org/officeDocument/2006/relationships" xmlns:p="http://schemas.openxmlformats.org/presentationml/2006/main">
-  <p:tag name="LATEXADDIN" val="\documentclass{article}&#10;\usepackage{amsmath}&#10;\pagestyle{empty}&#10;\begin{document}&#10;&#10;$$&#10;(x + y)^n =\sum_{j = 0}^{n}\left(\begin{array}{l} n\\j\end{array}\right)x^{n-j}y^j =\left(\begin{array}{l}n\\0\end{array}\right)x^n + \left(\begin{array}{l}n\\1\end{array}\right)x^{n-1}y + \cdots + \left(\begin{array}{l}n\\n-1\end{array}\right)xy^{n-1} + \left(\begin{array}{l}n\\n\end{array}\right) y^n .&#10;$$&#10;&#10;&#10;\end{document}"/>
+  <p:tag name="LATEXADDIN" val="\documentclass{article}&#10;\usepackage{amsmath}&#10;\pagestyle{empty}&#10;\begin{document}&#10;&#10;$$&#10;(2x + (-3y))^{25} =\sum_{j = 0}^{25}\left(\begin{array}{l} 25\\j\end{array}\right)(2x)^{25-j}(-3y)^j.&#10;$$&#10;&#10;&#10;\end{document}"/>
   <p:tag name="IGUANATEXSIZE" val="15"/>
 </p:tagLst>
 </file>
 
 <file path=ppt/tags/tag12.xml><?xml version="1.0" encoding="utf-8"?>
 <p:tagLst xmlns:a="http://schemas.openxmlformats.org/drawingml/2006/main" xmlns:r="http://schemas.openxmlformats.org/officeDocument/2006/relationships" xmlns:p="http://schemas.openxmlformats.org/presentationml/2006/main">
-  <p:tag name="LATEXADDIN" val="\documentclass{article}&#10;\usepackage{amsmath}&#10;\pagestyle{empty}&#10;\begin{document}&#10;&#10;$$&#10;(2x + (-3y))^{25} =\sum_{j = 0}^{25}\left(\begin{array}{l} 25\\j\end{array}\right)(2x)^{25-j}(-3y)^j.&#10;$$&#10;&#10;&#10;\end{document}"/>
+  <p:tag name="LATEXADDIN" val="\documentclass{article}&#10;\usepackage{amsmath}&#10;\pagestyle{empty}&#10;\begin{document}&#10;&#10;$$&#10;\left(\begin{array}{l} 25\\13\end{array}\right)2^{12}(-3)^{13} = -\frac{25!}{13! 12!}2^{12}3^{13}.&#10;  $$&#10;&#10;&#10;\end{document}"/>
   <p:tag name="IGUANATEXSIZE" val="15"/>
 </p:tagLst>
 </file>
 
 <file path=ppt/tags/tag13.xml><?xml version="1.0" encoding="utf-8"?>
 <p:tagLst xmlns:a="http://schemas.openxmlformats.org/drawingml/2006/main" xmlns:r="http://schemas.openxmlformats.org/officeDocument/2006/relationships" xmlns:p="http://schemas.openxmlformats.org/presentationml/2006/main">
-  <p:tag name="LATEXADDIN" val="\documentclass{article}&#10;\usepackage{amsmath}&#10;\pagestyle{empty}&#10;\begin{document}&#10;&#10;$$&#10;\left(\begin{array}{l} 25\\13\end{array}\right)2^{12}(-3)^{13} = -\frac{25!}{13! 12!}2^{12}3^{13}.&#10;  $$&#10;&#10;&#10;\end{document}"/>
+  <p:tag name="LATEXADDIN" val="\documentclass{article}&#10;\usepackage{amsmath}&#10;\pagestyle{empty}&#10;\begin{document}&#10;&#10;$$&#10;\sum_{k = 0}^{n}\left(\begin{array}{l} n\\k\end{array}\right)= 2^n.&#10;$$&#10;&#10;&#10;\end{document}"/>
   <p:tag name="IGUANATEXSIZE" val="15"/>
 </p:tagLst>
 </file>
 
 <file path=ppt/tags/tag14.xml><?xml version="1.0" encoding="utf-8"?>
 <p:tagLst xmlns:a="http://schemas.openxmlformats.org/drawingml/2006/main" xmlns:r="http://schemas.openxmlformats.org/officeDocument/2006/relationships" xmlns:p="http://schemas.openxmlformats.org/presentationml/2006/main">
-  <p:tag name="LATEXADDIN" val="\documentclass{article}&#10;\usepackage{amsmath}&#10;\pagestyle{empty}&#10;\begin{document}&#10;&#10;$$&#10;\sum_{k = 0}^{n}\left(\begin{array}{l} n\\k\end{array}\right)= 2^n.&#10;$$&#10;&#10;&#10;\end{document}"/>
+  <p:tag name="LATEXADDIN" val="\documentclass{article}&#10;\usepackage{amsmath}&#10;\pagestyle{empty}&#10;\begin{document}&#10;&#10;$$&#10;2^n = (1 + 1)^n =\sum_{k = 0}^{n}\left(\begin{array}{l} n\\k\end{array}\right)1^k 1^{(n-k)} =\sum_{k = 0}^{n}\left(\begin{array}{l}n\\k\end{array}\right) .&#10;$$&#10;&#10;&#10;\end{document}"/>
   <p:tag name="IGUANATEXSIZE" val="15"/>
 </p:tagLst>
 </file>
 
 <file path=ppt/tags/tag15.xml><?xml version="1.0" encoding="utf-8"?>
 <p:tagLst xmlns:a="http://schemas.openxmlformats.org/drawingml/2006/main" xmlns:r="http://schemas.openxmlformats.org/officeDocument/2006/relationships" xmlns:p="http://schemas.openxmlformats.org/presentationml/2006/main">
-  <p:tag name="LATEXADDIN" val="\documentclass{article}&#10;\usepackage{amsmath}&#10;\pagestyle{empty}&#10;\begin{document}&#10;&#10;$$&#10;2^n = (1 + 1)^n =\sum_{k = 0}^{n}\left(\begin{array}{l} n\\k\end{array}\right)1^k 1^{(n-k)} =\sum_{k = 0}^{n}\left(\begin{array}{l}n\\k\end{array}\right) .&#10;$$&#10;&#10;&#10;\end{document}"/>
+  <p:tag name="LATEXADDIN" val="\documentclass{article}&#10;\usepackage{amsmath}&#10;\pagestyle{empty}&#10;\begin{document}&#10;&#10;$$&#10;\left(\begin{array}{c} n + 1 \\k\end{array}\right) =\left(\begin{array}{c}n\\k - 1\end{array}\right) + \left(\begin{array}{c}n\\k\end{array}\right) .&#10;$$&#10;&#10;&#10;\end{document}"/>
   <p:tag name="IGUANATEXSIZE" val="15"/>
 </p:tagLst>
 </file>
 
 <file path=ppt/tags/tag16.xml><?xml version="1.0" encoding="utf-8"?>
 <p:tagLst xmlns:a="http://schemas.openxmlformats.org/drawingml/2006/main" xmlns:r="http://schemas.openxmlformats.org/officeDocument/2006/relationships" xmlns:p="http://schemas.openxmlformats.org/presentationml/2006/main">
-  <p:tag name="LATEXADDIN" val="\documentclass{article}&#10;\usepackage{amsmath}&#10;\pagestyle{empty}&#10;\begin{document}&#10;&#10;$$&#10;\left(\begin{array}{c} n + 1 \\k\end{array}\right) =\left(\begin{array}{c}n\\k - 1\end{array}\right) + \left(\begin{array}{c}n\\k\end{array}\right) .&#10;$$&#10;&#10;&#10;\end{document}"/>
-  <p:tag name="IGUANATEXSIZE" val="15"/>
+  <p:tag name="LATEXADDIN" val="\documentclass{article}&#10;\usepackage{amsmath}&#10;\pagestyle{empty}&#10;\begin{document}&#10;&#10;$C(11,5) = \frac{11!}{5!6!} = 462$&#10;&#10;&#10;\end{document}"/>
+  <p:tag name="IGUANATEXSIZE" val="20"/>
 </p:tagLst>
 </file>
 
 <file path=ppt/tags/tag17.xml><?xml version="1.0" encoding="utf-8"?>
 <p:tagLst xmlns:a="http://schemas.openxmlformats.org/drawingml/2006/main" xmlns:r="http://schemas.openxmlformats.org/officeDocument/2006/relationships" xmlns:p="http://schemas.openxmlformats.org/presentationml/2006/main">
-  <p:tag name="LATEXADDIN" val="\documentclass{article}&#10;\usepackage{amsmath}&#10;\pagestyle{empty}&#10;\begin{document}&#10;&#10;$C(11,5) = \frac{11!}{5!6!} = 462$&#10;&#10;&#10;\end{document}"/>
+  <p:tag name="LATEXADDIN" val="\documentclass{article}&#10;\usepackage{amsmath}&#10;\pagestyle{empty}&#10;\begin{document}&#10;&#10;$C(3 + 11 -1,11) = C(13,11) = C(13,2) =  \frac{13 \cdot 12}{1 \cdot 2} = 78$&#10;&#10;&#10;\end{document}"/>
   <p:tag name="IGUANATEXSIZE" val="20"/>
 </p:tagLst>
 </file>
 
 <file path=ppt/tags/tag18.xml><?xml version="1.0" encoding="utf-8"?>
 <p:tagLst xmlns:a="http://schemas.openxmlformats.org/drawingml/2006/main" xmlns:r="http://schemas.openxmlformats.org/officeDocument/2006/relationships" xmlns:p="http://schemas.openxmlformats.org/presentationml/2006/main">
-  <p:tag name="LATEXADDIN" val="\documentclass{article}&#10;\usepackage{amsmath}&#10;\pagestyle{empty}&#10;\begin{document}&#10;&#10;$C(3 + 11 -1,11) = C(13,11) = C(13,2) =  \frac{13 \cdot 12}{1 \cdot 2} = 78$&#10;&#10;&#10;\end{document}"/>
+  <p:tag name="LATEXADDIN" val="\documentclass{article}&#10;\usepackage{amsmath}&#10;\pagestyle{empty}&#10;\begin{document}&#10;&#10;$C(7,3)C(4,2)C(2,1)C(1,1) =\frac{7!}{3!4!}\cdot \frac{4!}{2!2!}\cdot \frac{2!}{1! 1!}\cdot \frac{1!}{1!0!}=\frac{7!}{3!2!1!1!} = 420.$&#10;&#10;\end{document}"/>
   <p:tag name="IGUANATEXSIZE" val="20"/>
 </p:tagLst>
 </file>
 
 <file path=ppt/tags/tag19.xml><?xml version="1.0" encoding="utf-8"?>
 <p:tagLst xmlns:a="http://schemas.openxmlformats.org/drawingml/2006/main" xmlns:r="http://schemas.openxmlformats.org/officeDocument/2006/relationships" xmlns:p="http://schemas.openxmlformats.org/presentationml/2006/main">
-  <p:tag name="LATEXADDIN" val="\documentclass{article}&#10;\usepackage{amsmath}&#10;\pagestyle{empty}&#10;\begin{document}&#10;&#10;$C(7,3)C(4,2)C(2,1)C(1,1) =\frac{7!}{3!4!}\cdot \frac{4!}{2!2!}\cdot \frac{2!}{1! 1!}\cdot \frac{1!}{1!0!}=\frac{7!}{3!2!1!1!} = 420.$&#10;&#10;\end{document}"/>
+  <p:tag name="LATEXADDIN" val="\documentclass{article}&#10;\usepackage{amsmath}&#10;\pagestyle{empty}&#10;\begin{document}&#10;&#10;$\frac{n!}{n_1!n_2!\cdots n_k!}\; .$&#10;&#10;\end{document}"/>
   <p:tag name="IGUANATEXSIZE" val="20"/>
 </p:tagLst>
 </file>
@@ -19748,13 +19202,6 @@
 
 <file path=ppt/tags/tag20.xml><?xml version="1.0" encoding="utf-8"?>
 <p:tagLst xmlns:a="http://schemas.openxmlformats.org/drawingml/2006/main" xmlns:r="http://schemas.openxmlformats.org/officeDocument/2006/relationships" xmlns:p="http://schemas.openxmlformats.org/presentationml/2006/main">
-  <p:tag name="LATEXADDIN" val="\documentclass{article}&#10;\usepackage{amsmath}&#10;\pagestyle{empty}&#10;\begin{document}&#10;&#10;$\frac{n!}{n_1!n_2!\cdots n_k!}\; .$&#10;&#10;\end{document}"/>
-  <p:tag name="IGUANATEXSIZE" val="20"/>
-</p:tagLst>
-</file>
-
-<file path=ppt/tags/tag21.xml><?xml version="1.0" encoding="utf-8"?>
-<p:tagLst xmlns:a="http://schemas.openxmlformats.org/drawingml/2006/main" xmlns:r="http://schemas.openxmlformats.org/officeDocument/2006/relationships" xmlns:p="http://schemas.openxmlformats.org/presentationml/2006/main">
   <p:tag name="LATEXADDIN" val="\documentclass{article}&#10;\usepackage{amsmath}&#10;\pagestyle{empty}&#10;\begin{document}&#10;&#10;$\frac{n!}{n_1!(n -  n_1)!}\frac{(n - n_1)!}{n_2!(n - n_1 - n_2!)}\cdot\cdot\cdot\frac{(n - n_1 - \cdot \cdot \cdot - n_{k-1})!}{n_k!0!} =\frac{n!}{n_1!n_2!\cdots n_k!}\; .$&#10;&#10;\end{document}"/>
   <p:tag name="IGUANATEXSIZE" val="20"/>
 </p:tagLst>
@@ -19762,49 +19209,49 @@
 
 <file path=ppt/tags/tag3.xml><?xml version="1.0" encoding="utf-8"?>
 <p:tagLst xmlns:a="http://schemas.openxmlformats.org/drawingml/2006/main" xmlns:r="http://schemas.openxmlformats.org/officeDocument/2006/relationships" xmlns:p="http://schemas.openxmlformats.org/presentationml/2006/main">
-  <p:tag name="LATEXADDIN" val="\documentclass{article}&#10;\usepackage{amsmath}&#10;\pagestyle{empty}&#10;\begin{document}&#10;&#10;$P(n,r) = \frac{n!}{(n - r)!}$&#10;&#10;\end{document}"/>
-  <p:tag name="IGUANATEXSIZE" val="30"/>
+  <p:tag name="LATEXADDIN" val="\documentclass{article}&#10;\usepackage{amsmath}&#10;\pagestyle{empty}&#10;\begin{document}&#10;&#10;$C(n,r) = \frac{P(n,r)}{P(r,r)} =\frac{n!/(n - r)!}{r!/(r - r)!} = \frac{n!}{(n -r)! r!}\;.$&#10;&#10;\end{document}"/>
+  <p:tag name="IGUANATEXSIZE" val="25"/>
 </p:tagLst>
 </file>
 
 <file path=ppt/tags/tag4.xml><?xml version="1.0" encoding="utf-8"?>
 <p:tagLst xmlns:a="http://schemas.openxmlformats.org/drawingml/2006/main" xmlns:r="http://schemas.openxmlformats.org/officeDocument/2006/relationships" xmlns:p="http://schemas.openxmlformats.org/presentationml/2006/main">
-  <p:tag name="LATEXADDIN" val="\documentclass{article}&#10;\usepackage{amsmath}&#10;\pagestyle{empty}&#10;\begin{document}&#10;&#10;$C(n,r) = \frac{P(n,r)}{P(r,r)} =\frac{n!/(n - r)!}{r!/(r - r)!} = \frac{n!}{(n -r)! r!}\;.$&#10;&#10;\end{document}"/>
+  <p:tag name="LATEXADDIN" val="\documentclass{article}&#10;\usepackage{amsmath}&#10;\pagestyle{empty}&#10;\begin{document}&#10;&#10;$C(n,r) = \frac{n!}{(n -r)! r!}.$&#10;&#10;\end{document}"/>
   <p:tag name="IGUANATEXSIZE" val="25"/>
 </p:tagLst>
 </file>
 
 <file path=ppt/tags/tag5.xml><?xml version="1.0" encoding="utf-8"?>
 <p:tagLst xmlns:a="http://schemas.openxmlformats.org/drawingml/2006/main" xmlns:r="http://schemas.openxmlformats.org/officeDocument/2006/relationships" xmlns:p="http://schemas.openxmlformats.org/presentationml/2006/main">
-  <p:tag name="LATEXADDIN" val="\documentclass{article}&#10;\usepackage{amsmath}&#10;\pagestyle{empty}&#10;\begin{document}&#10;&#10;$C(n,r) = \frac{n!}{(n -r)! r!}.$&#10;&#10;\end{document}"/>
+  <p:tag name="LATEXADDIN" val="\documentclass{article}&#10;\usepackage{amsmath}&#10;\pagestyle{empty}&#10;\begin{document}&#10;&#10;$C(52,5) = \frac{52!}{5!47!}$&#10;&#10;\end{document}"/>
   <p:tag name="IGUANATEXSIZE" val="25"/>
 </p:tagLst>
 </file>
 
 <file path=ppt/tags/tag6.xml><?xml version="1.0" encoding="utf-8"?>
 <p:tagLst xmlns:a="http://schemas.openxmlformats.org/drawingml/2006/main" xmlns:r="http://schemas.openxmlformats.org/officeDocument/2006/relationships" xmlns:p="http://schemas.openxmlformats.org/presentationml/2006/main">
-  <p:tag name="LATEXADDIN" val="\documentclass{article}&#10;\usepackage{amsmath}&#10;\pagestyle{empty}&#10;\begin{document}&#10;&#10;$C(52,5) = \frac{52!}{5!47!}$&#10;&#10;\end{document}"/>
+  <p:tag name="LATEXADDIN" val="\documentclass{article}&#10;\usepackage{amsmath}&#10;\pagestyle{empty}&#10;\begin{document}&#10;&#10;$= \frac{52\cdot 51 \cdot 50 \cdot 49 \cdot 48}{5\cdot 4 \cdot 3 \cdot 2 \cdot 1} = 26 \cdot 17 \cdot 10 \cdot 49 \cdot 12 = 2,598,960$&#10;&#10;\end{document}"/>
   <p:tag name="IGUANATEXSIZE" val="25"/>
 </p:tagLst>
 </file>
 
 <file path=ppt/tags/tag7.xml><?xml version="1.0" encoding="utf-8"?>
 <p:tagLst xmlns:a="http://schemas.openxmlformats.org/drawingml/2006/main" xmlns:r="http://schemas.openxmlformats.org/officeDocument/2006/relationships" xmlns:p="http://schemas.openxmlformats.org/presentationml/2006/main">
-  <p:tag name="LATEXADDIN" val="\documentclass{article}&#10;\usepackage{amsmath}&#10;\pagestyle{empty}&#10;\begin{document}&#10;&#10;$= \frac{52\cdot 51 \cdot 50 \cdot 49 \cdot 48}{5\cdot 4 \cdot 3 \cdot 2 \cdot 1} = 26 \cdot 17 \cdot 10 \cdot 49 \cdot 12 = 2,598,960$&#10;&#10;\end{document}"/>
+  <p:tag name="LATEXADDIN" val="\documentclass{article}&#10;\usepackage{amsmath}&#10;\pagestyle{empty}&#10;\begin{document}&#10;&#10;$C(52,47) = \frac{52!}{47!5!} = C(52,5) = 2, 598,960 .$&#10;&#10;\end{document}"/>
   <p:tag name="IGUANATEXSIZE" val="25"/>
 </p:tagLst>
 </file>
 
 <file path=ppt/tags/tag8.xml><?xml version="1.0" encoding="utf-8"?>
 <p:tagLst xmlns:a="http://schemas.openxmlformats.org/drawingml/2006/main" xmlns:r="http://schemas.openxmlformats.org/officeDocument/2006/relationships" xmlns:p="http://schemas.openxmlformats.org/presentationml/2006/main">
-  <p:tag name="LATEXADDIN" val="\documentclass{article}&#10;\usepackage{amsmath}&#10;\pagestyle{empty}&#10;\begin{document}&#10;&#10;$C(52,47) = \frac{52!}{47!5!} = C(52,5) = 2, 598,960 .$&#10;&#10;\end{document}"/>
+  <p:tag name="LATEXADDIN" val="\documentclass{article}&#10;\usepackage{amsmath}&#10;\pagestyle{empty}&#10;\begin{document}&#10;&#10;$C(n,r) = \frac{n!}{(n -r)! r!}$&#10;&#10;\end{document}"/>
   <p:tag name="IGUANATEXSIZE" val="25"/>
 </p:tagLst>
 </file>
 
 <file path=ppt/tags/tag9.xml><?xml version="1.0" encoding="utf-8"?>
 <p:tagLst xmlns:a="http://schemas.openxmlformats.org/drawingml/2006/main" xmlns:r="http://schemas.openxmlformats.org/officeDocument/2006/relationships" xmlns:p="http://schemas.openxmlformats.org/presentationml/2006/main">
-  <p:tag name="LATEXADDIN" val="\documentclass{article}&#10;\usepackage{amsmath}&#10;\pagestyle{empty}&#10;\begin{document}&#10;&#10;$C(n,r) = \frac{n!}{(n -r)! r!}$&#10;&#10;\end{document}"/>
+  <p:tag name="LATEXADDIN" val="\documentclass{article}&#10;\usepackage{amsmath}&#10;\pagestyle{empty}&#10;\begin{document}&#10;&#10;$C(n,n-r)  = \frac{n!}{(n -r)! [n - (n - r)]!} = \frac{n!}{(n - r)!r!}\;.$&#10;&#10;\end{document}"/>
   <p:tag name="IGUANATEXSIZE" val="25"/>
 </p:tagLst>
 </file>
